--- a/발표자료.pptx
+++ b/발표자료.pptx
@@ -23,6 +23,7 @@
     <p:sldId id="271" r:id="rId22"/>
     <p:sldId id="272" r:id="rId23"/>
     <p:sldId id="273" r:id="rId24"/>
+    <p:sldId id="274" r:id="rId25"/>
   </p:sldIdLst>
   <p:sldSz cx="12191695" cy="6858000" type="screen4x3"/>
   <p:notesSz cx="6858000" cy="9144000"/>
@@ -3775,7 +3776,7 @@
         </p:blipFill>
         <p:spPr>
           <a:xfrm>
-            <a:off x="822960" y="1691640"/>
+            <a:off x="2658073" y="1691640"/>
             <a:ext cx="1478857" cy="3200400"/>
           </a:xfrm>
           <a:prstGeom prst="rect">
@@ -3791,7 +3792,7 @@
         </p:nvSpPr>
         <p:spPr>
           <a:xfrm>
-            <a:off x="640080" y="4946904"/>
+            <a:off x="2475193" y="4946904"/>
             <a:ext cx="1844617" cy="320040"/>
           </a:xfrm>
           <a:prstGeom prst="rect">
@@ -3838,7 +3839,7 @@
         </p:blipFill>
         <p:spPr>
           <a:xfrm>
-            <a:off x="2621857" y="1691640"/>
+            <a:off x="4456970" y="1691640"/>
             <a:ext cx="1478857" cy="3200400"/>
           </a:xfrm>
           <a:prstGeom prst="rect">
@@ -3854,7 +3855,7 @@
         </p:nvSpPr>
         <p:spPr>
           <a:xfrm>
-            <a:off x="2438977" y="4946904"/>
+            <a:off x="4274090" y="4946904"/>
             <a:ext cx="1844617" cy="320040"/>
           </a:xfrm>
           <a:prstGeom prst="rect">
@@ -3901,7 +3902,7 @@
         </p:blipFill>
         <p:spPr>
           <a:xfrm>
-            <a:off x="4420754" y="1691640"/>
+            <a:off x="6255867" y="1691640"/>
             <a:ext cx="1478857" cy="3200400"/>
           </a:xfrm>
           <a:prstGeom prst="rect">
@@ -3917,7 +3918,7 @@
         </p:nvSpPr>
         <p:spPr>
           <a:xfrm>
-            <a:off x="4237874" y="4946904"/>
+            <a:off x="6072987" y="4946904"/>
             <a:ext cx="1844617" cy="320040"/>
           </a:xfrm>
           <a:prstGeom prst="rect">
@@ -3964,7 +3965,7 @@
         </p:blipFill>
         <p:spPr>
           <a:xfrm>
-            <a:off x="6219651" y="1691640"/>
+            <a:off x="8054764" y="1691640"/>
             <a:ext cx="1478857" cy="3200400"/>
           </a:xfrm>
           <a:prstGeom prst="rect">
@@ -3980,7 +3981,7 @@
         </p:nvSpPr>
         <p:spPr>
           <a:xfrm>
-            <a:off x="6036771" y="4946904"/>
+            <a:off x="7871884" y="4946904"/>
             <a:ext cx="1844617" cy="320040"/>
           </a:xfrm>
           <a:prstGeom prst="rect">
@@ -4865,7 +4866,7 @@
                       </a:r>
                     </a:p>
                   </a:txBody>
-                  <a:tcPr>
+                  <a:tcPr marL="91440">
                     <a:solidFill>
                       <a:srgbClr val="161B22"/>
                     </a:solidFill>
@@ -4888,7 +4889,7 @@
                       </a:r>
                     </a:p>
                   </a:txBody>
-                  <a:tcPr>
+                  <a:tcPr marL="91440">
                     <a:solidFill>
                       <a:srgbClr val="161B22"/>
                     </a:solidFill>
@@ -4911,7 +4912,7 @@
                       </a:r>
                     </a:p>
                   </a:txBody>
-                  <a:tcPr>
+                  <a:tcPr marL="91440">
                     <a:solidFill>
                       <a:srgbClr val="161B22"/>
                     </a:solidFill>
@@ -4936,7 +4937,7 @@
                       </a:r>
                     </a:p>
                   </a:txBody>
-                  <a:tcPr>
+                  <a:tcPr marL="91440">
                     <a:solidFill>
                       <a:srgbClr val="161B22"/>
                     </a:solidFill>
@@ -4959,7 +4960,7 @@
                       </a:r>
                     </a:p>
                   </a:txBody>
-                  <a:tcPr>
+                  <a:tcPr marL="91440">
                     <a:solidFill>
                       <a:srgbClr val="161B22"/>
                     </a:solidFill>
@@ -4982,7 +4983,7 @@
                       </a:r>
                     </a:p>
                   </a:txBody>
-                  <a:tcPr>
+                  <a:tcPr marL="91440">
                     <a:solidFill>
                       <a:srgbClr val="161B22"/>
                     </a:solidFill>
@@ -7774,7 +7775,7 @@
                       </a:r>
                     </a:p>
                   </a:txBody>
-                  <a:tcPr>
+                  <a:tcPr marL="91440">
                     <a:solidFill>
                       <a:srgbClr val="161B22"/>
                     </a:solidFill>
@@ -7797,7 +7798,7 @@
                       </a:r>
                     </a:p>
                   </a:txBody>
-                  <a:tcPr>
+                  <a:tcPr marL="91440">
                     <a:solidFill>
                       <a:srgbClr val="161B22"/>
                     </a:solidFill>
@@ -7820,7 +7821,7 @@
                       </a:r>
                     </a:p>
                   </a:txBody>
-                  <a:tcPr>
+                  <a:tcPr marL="91440">
                     <a:solidFill>
                       <a:srgbClr val="161B22"/>
                     </a:solidFill>
@@ -7845,7 +7846,7 @@
                       </a:r>
                     </a:p>
                   </a:txBody>
-                  <a:tcPr>
+                  <a:tcPr marL="91440">
                     <a:solidFill>
                       <a:srgbClr val="161B22"/>
                     </a:solidFill>
@@ -7868,7 +7869,7 @@
                       </a:r>
                     </a:p>
                   </a:txBody>
-                  <a:tcPr>
+                  <a:tcPr marL="91440">
                     <a:solidFill>
                       <a:srgbClr val="161B22"/>
                     </a:solidFill>
@@ -7891,7 +7892,7 @@
                       </a:r>
                     </a:p>
                   </a:txBody>
-                  <a:tcPr>
+                  <a:tcPr marL="91440">
                     <a:solidFill>
                       <a:srgbClr val="161B22"/>
                     </a:solidFill>
@@ -7916,7 +7917,7 @@
                       </a:r>
                     </a:p>
                   </a:txBody>
-                  <a:tcPr>
+                  <a:tcPr marL="91440">
                     <a:solidFill>
                       <a:srgbClr val="161B22"/>
                     </a:solidFill>
@@ -7939,7 +7940,7 @@
                       </a:r>
                     </a:p>
                   </a:txBody>
-                  <a:tcPr>
+                  <a:tcPr marL="91440">
                     <a:solidFill>
                       <a:srgbClr val="161B22"/>
                     </a:solidFill>
@@ -7962,7 +7963,7 @@
                       </a:r>
                     </a:p>
                   </a:txBody>
-                  <a:tcPr>
+                  <a:tcPr marL="91440">
                     <a:solidFill>
                       <a:srgbClr val="161B22"/>
                     </a:solidFill>
@@ -7987,7 +7988,7 @@
                       </a:r>
                     </a:p>
                   </a:txBody>
-                  <a:tcPr>
+                  <a:tcPr marL="91440">
                     <a:solidFill>
                       <a:srgbClr val="161B22"/>
                     </a:solidFill>
@@ -8010,7 +8011,7 @@
                       </a:r>
                     </a:p>
                   </a:txBody>
-                  <a:tcPr>
+                  <a:tcPr marL="91440">
                     <a:solidFill>
                       <a:srgbClr val="161B22"/>
                     </a:solidFill>
@@ -8033,7 +8034,7 @@
                       </a:r>
                     </a:p>
                   </a:txBody>
-                  <a:tcPr>
+                  <a:tcPr marL="91440">
                     <a:solidFill>
                       <a:srgbClr val="161B22"/>
                     </a:solidFill>
@@ -8058,7 +8059,7 @@
                       </a:r>
                     </a:p>
                   </a:txBody>
-                  <a:tcPr>
+                  <a:tcPr marL="91440">
                     <a:solidFill>
                       <a:srgbClr val="161B22"/>
                     </a:solidFill>
@@ -8081,7 +8082,7 @@
                       </a:r>
                     </a:p>
                   </a:txBody>
-                  <a:tcPr>
+                  <a:tcPr marL="91440">
                     <a:solidFill>
                       <a:srgbClr val="161B22"/>
                     </a:solidFill>
@@ -8104,7 +8105,7 @@
                       </a:r>
                     </a:p>
                   </a:txBody>
-                  <a:tcPr>
+                  <a:tcPr marL="91440">
                     <a:solidFill>
                       <a:srgbClr val="161B22"/>
                     </a:solidFill>
@@ -8129,7 +8130,7 @@
                       </a:r>
                     </a:p>
                   </a:txBody>
-                  <a:tcPr>
+                  <a:tcPr marL="91440">
                     <a:solidFill>
                       <a:srgbClr val="161B22"/>
                     </a:solidFill>
@@ -8152,7 +8153,7 @@
                       </a:r>
                     </a:p>
                   </a:txBody>
-                  <a:tcPr>
+                  <a:tcPr marL="91440">
                     <a:solidFill>
                       <a:srgbClr val="161B22"/>
                     </a:solidFill>
@@ -8175,7 +8176,7 @@
                       </a:r>
                     </a:p>
                   </a:txBody>
-                  <a:tcPr>
+                  <a:tcPr marL="91440">
                     <a:solidFill>
                       <a:srgbClr val="161B22"/>
                     </a:solidFill>
@@ -8283,6 +8284,1385 @@
                 <a:latin typeface="맑은 고딕"/>
               </a:rPr>
               <a:t>18</a:t>
+            </a:r>
+          </a:p>
+        </p:txBody>
+      </p:sp>
+      <p:sp>
+        <p:nvSpPr>
+          <p:cNvPr id="4" name="TextBox 3"/>
+          <p:cNvSpPr txBox="1"/>
+          <p:nvPr/>
+        </p:nvSpPr>
+        <p:spPr>
+          <a:xfrm>
+            <a:off x="640080" y="320040"/>
+            <a:ext cx="10881360" cy="365760"/>
+          </a:xfrm>
+          <a:prstGeom prst="rect">
+            <a:avLst/>
+          </a:prstGeom>
+          <a:noFill/>
+        </p:spPr>
+        <p:txBody>
+          <a:bodyPr wrap="square">
+            <a:spAutoFit/>
+          </a:bodyPr>
+          <a:lstStyle/>
+          <a:p>
+            <a:pPr algn="l">
+              <a:spcAft>
+                <a:spcPts val="600"/>
+              </a:spcAft>
+            </a:pPr>
+            <a:r>
+              <a:rPr sz="1400" b="1">
+                <a:solidFill>
+                  <a:srgbClr val="5EE6C5"/>
+                </a:solidFill>
+                <a:latin typeface="맑은 고딕"/>
+              </a:rPr>
+              <a:t>필수 체크리스트</a:t>
+            </a:r>
+          </a:p>
+        </p:txBody>
+      </p:sp>
+      <p:sp>
+        <p:nvSpPr>
+          <p:cNvPr id="5" name="TextBox 4"/>
+          <p:cNvSpPr txBox="1"/>
+          <p:nvPr/>
+        </p:nvSpPr>
+        <p:spPr>
+          <a:xfrm>
+            <a:off x="640080" y="658368"/>
+            <a:ext cx="10881360" cy="822960"/>
+          </a:xfrm>
+          <a:prstGeom prst="rect">
+            <a:avLst/>
+          </a:prstGeom>
+          <a:noFill/>
+        </p:spPr>
+        <p:txBody>
+          <a:bodyPr wrap="square">
+            <a:spAutoFit/>
+          </a:bodyPr>
+          <a:lstStyle/>
+          <a:p>
+            <a:pPr algn="l">
+              <a:spcAft>
+                <a:spcPts val="600"/>
+              </a:spcAft>
+            </a:pPr>
+            <a:r>
+              <a:rPr sz="3200" b="1">
+                <a:solidFill>
+                  <a:srgbClr val="E8EDF4"/>
+                </a:solidFill>
+                <a:latin typeface="맑은 고딕"/>
+              </a:rPr>
+              <a:t>학생 자체 점검 11항목 — 증빙자료</a:t>
+            </a:r>
+          </a:p>
+        </p:txBody>
+      </p:sp>
+      <p:sp>
+        <p:nvSpPr>
+          <p:cNvPr id="6" name="Rectangle 5"/>
+          <p:cNvSpPr/>
+          <p:nvPr/>
+        </p:nvSpPr>
+        <p:spPr>
+          <a:xfrm>
+            <a:off x="640080" y="1417320"/>
+            <a:ext cx="10881360" cy="25400"/>
+          </a:xfrm>
+          <a:prstGeom prst="rect">
+            <a:avLst/>
+          </a:prstGeom>
+          <a:solidFill>
+            <a:srgbClr val="232A34"/>
+          </a:solidFill>
+          <a:ln>
+            <a:noFill/>
+          </a:ln>
+          <a:effectLst/>
+        </p:spPr>
+        <p:style>
+          <a:lnRef idx="1">
+            <a:schemeClr val="accent1"/>
+          </a:lnRef>
+          <a:fillRef idx="3">
+            <a:schemeClr val="accent1"/>
+          </a:fillRef>
+          <a:effectRef idx="2">
+            <a:schemeClr val="accent1"/>
+          </a:effectRef>
+          <a:fontRef idx="minor">
+            <a:schemeClr val="lt1"/>
+          </a:fontRef>
+        </p:style>
+        <p:txBody>
+          <a:bodyPr rtlCol="0" anchor="ctr"/>
+          <a:lstStyle/>
+          <a:p>
+            <a:pPr algn="ctr"/>
+          </a:p>
+        </p:txBody>
+      </p:sp>
+      <p:graphicFrame>
+        <p:nvGraphicFramePr>
+          <p:cNvPr id="7" name="Table 6"/>
+          <p:cNvGraphicFramePr>
+            <a:graphicFrameLocks noGrp="1"/>
+          </p:cNvGraphicFramePr>
+          <p:nvPr/>
+        </p:nvGraphicFramePr>
+        <p:xfrm>
+          <a:off x="640080" y="1600200"/>
+          <a:ext cx="10881360" cy="4892040"/>
+        </p:xfrm>
+        <a:graphic>
+          <a:graphicData uri="http://schemas.openxmlformats.org/drawingml/2006/table">
+            <a:tbl>
+              <a:tblPr firstRow="1" bandRow="1">
+                <a:tableStyleId>{5C22544A-7EE6-4342-B048-85BDC9FD1C3A}</a:tableStyleId>
+              </a:tblPr>
+              <a:tblGrid>
+                <a:gridCol w="502920"/>
+                <a:gridCol w="4617720"/>
+                <a:gridCol w="1005840"/>
+                <a:gridCol w="4754880"/>
+              </a:tblGrid>
+              <a:tr h="407670">
+                <a:tc>
+                  <a:txBody>
+                    <a:bodyPr/>
+                    <a:lstStyle/>
+                    <a:p>
+                      <a:pPr algn="ctr"/>
+                      <a:r>
+                        <a:rPr b="1" sz="1200">
+                          <a:solidFill>
+                            <a:srgbClr val="E8EDF4"/>
+                          </a:solidFill>
+                          <a:latin typeface="맑은 고딕"/>
+                        </a:rPr>
+                        <a:t>#</a:t>
+                      </a:r>
+                    </a:p>
+                  </a:txBody>
+                  <a:tcPr>
+                    <a:solidFill>
+                      <a:srgbClr val="232A34"/>
+                    </a:solidFill>
+                  </a:tcPr>
+                </a:tc>
+                <a:tc>
+                  <a:txBody>
+                    <a:bodyPr/>
+                    <a:lstStyle/>
+                    <a:p>
+                      <a:pPr algn="l"/>
+                      <a:r>
+                        <a:rPr b="1" sz="1200">
+                          <a:solidFill>
+                            <a:srgbClr val="E8EDF4"/>
+                          </a:solidFill>
+                          <a:latin typeface="맑은 고딕"/>
+                        </a:rPr>
+                        <a:t>체크리스트 항목</a:t>
+                      </a:r>
+                    </a:p>
+                  </a:txBody>
+                  <a:tcPr>
+                    <a:solidFill>
+                      <a:srgbClr val="232A34"/>
+                    </a:solidFill>
+                  </a:tcPr>
+                </a:tc>
+                <a:tc>
+                  <a:txBody>
+                    <a:bodyPr/>
+                    <a:lstStyle/>
+                    <a:p>
+                      <a:pPr algn="ctr"/>
+                      <a:r>
+                        <a:rPr b="1" sz="1200">
+                          <a:solidFill>
+                            <a:srgbClr val="E8EDF4"/>
+                          </a:solidFill>
+                          <a:latin typeface="맑은 고딕"/>
+                        </a:rPr>
+                        <a:t>상태</a:t>
+                      </a:r>
+                    </a:p>
+                  </a:txBody>
+                  <a:tcPr>
+                    <a:solidFill>
+                      <a:srgbClr val="232A34"/>
+                    </a:solidFill>
+                  </a:tcPr>
+                </a:tc>
+                <a:tc>
+                  <a:txBody>
+                    <a:bodyPr/>
+                    <a:lstStyle/>
+                    <a:p>
+                      <a:pPr algn="l"/>
+                      <a:r>
+                        <a:rPr b="1" sz="1200">
+                          <a:solidFill>
+                            <a:srgbClr val="E8EDF4"/>
+                          </a:solidFill>
+                          <a:latin typeface="맑은 고딕"/>
+                        </a:rPr>
+                        <a:t>증빙자료</a:t>
+                      </a:r>
+                    </a:p>
+                  </a:txBody>
+                  <a:tcPr>
+                    <a:solidFill>
+                      <a:srgbClr val="232A34"/>
+                    </a:solidFill>
+                  </a:tcPr>
+                </a:tc>
+              </a:tr>
+              <a:tr h="407670">
+                <a:tc>
+                  <a:txBody>
+                    <a:bodyPr/>
+                    <a:lstStyle/>
+                    <a:p>
+                      <a:pPr algn="ctr"/>
+                      <a:r>
+                        <a:rPr sz="1200">
+                          <a:solidFill>
+                            <a:srgbClr val="8A94A6"/>
+                          </a:solidFill>
+                          <a:latin typeface="맑은 고딕"/>
+                        </a:rPr>
+                        <a:t>1</a:t>
+                      </a:r>
+                    </a:p>
+                  </a:txBody>
+                  <a:tcPr marL="91440">
+                    <a:solidFill>
+                      <a:srgbClr val="161B22"/>
+                    </a:solidFill>
+                  </a:tcPr>
+                </a:tc>
+                <a:tc>
+                  <a:txBody>
+                    <a:bodyPr/>
+                    <a:lstStyle/>
+                    <a:p>
+                      <a:pPr algn="l"/>
+                      <a:r>
+                        <a:rPr sz="1200">
+                          <a:solidFill>
+                            <a:srgbClr val="8A94A6"/>
+                          </a:solidFill>
+                          <a:latin typeface="맑은 고딕"/>
+                        </a:rPr>
+                        <a:t>공개 주소에서 시작→종료→재시작 가능</a:t>
+                      </a:r>
+                    </a:p>
+                  </a:txBody>
+                  <a:tcPr marL="101600">
+                    <a:solidFill>
+                      <a:srgbClr val="161B22"/>
+                    </a:solidFill>
+                  </a:tcPr>
+                </a:tc>
+                <a:tc>
+                  <a:txBody>
+                    <a:bodyPr/>
+                    <a:lstStyle/>
+                    <a:p>
+                      <a:pPr algn="ctr"/>
+                      <a:r>
+                        <a:rPr sz="1200">
+                          <a:solidFill>
+                            <a:srgbClr val="8A94A6"/>
+                          </a:solidFill>
+                          <a:latin typeface="맑은 고딕"/>
+                        </a:rPr>
+                        <a:t>완료</a:t>
+                      </a:r>
+                    </a:p>
+                  </a:txBody>
+                  <a:tcPr marL="91440">
+                    <a:solidFill>
+                      <a:srgbClr val="161B22"/>
+                    </a:solidFill>
+                  </a:tcPr>
+                </a:tc>
+                <a:tc>
+                  <a:txBody>
+                    <a:bodyPr/>
+                    <a:lstStyle/>
+                    <a:p>
+                      <a:pPr algn="l"/>
+                      <a:r>
+                        <a:rPr sz="1200">
+                          <a:solidFill>
+                            <a:srgbClr val="8A94A6"/>
+                          </a:solidFill>
+                          <a:latin typeface="맑은 고딕"/>
+                        </a:rPr>
+                        <a:t>배포 URL 직접 실행</a:t>
+                      </a:r>
+                    </a:p>
+                  </a:txBody>
+                  <a:tcPr marL="101600">
+                    <a:solidFill>
+                      <a:srgbClr val="161B22"/>
+                    </a:solidFill>
+                  </a:tcPr>
+                </a:tc>
+              </a:tr>
+              <a:tr h="407670">
+                <a:tc>
+                  <a:txBody>
+                    <a:bodyPr/>
+                    <a:lstStyle/>
+                    <a:p>
+                      <a:pPr algn="ctr"/>
+                      <a:r>
+                        <a:rPr sz="1200">
+                          <a:solidFill>
+                            <a:srgbClr val="8A94A6"/>
+                          </a:solidFill>
+                          <a:latin typeface="맑은 고딕"/>
+                        </a:rPr>
+                        <a:t>2</a:t>
+                      </a:r>
+                    </a:p>
+                  </a:txBody>
+                  <a:tcPr marL="91440">
+                    <a:solidFill>
+                      <a:srgbClr val="161B22"/>
+                    </a:solidFill>
+                  </a:tcPr>
+                </a:tc>
+                <a:tc>
+                  <a:txBody>
+                    <a:bodyPr/>
+                    <a:lstStyle/>
+                    <a:p>
+                      <a:pPr algn="l"/>
+                      <a:r>
+                        <a:rPr sz="1200">
+                          <a:solidFill>
+                            <a:srgbClr val="8A94A6"/>
+                          </a:solidFill>
+                          <a:latin typeface="맑은 고딕"/>
+                        </a:rPr>
+                        <a:t>핵심 조작과 성공·실패 상태가 화면에서 구분</a:t>
+                      </a:r>
+                    </a:p>
+                  </a:txBody>
+                  <a:tcPr marL="101600">
+                    <a:solidFill>
+                      <a:srgbClr val="161B22"/>
+                    </a:solidFill>
+                  </a:tcPr>
+                </a:tc>
+                <a:tc>
+                  <a:txBody>
+                    <a:bodyPr/>
+                    <a:lstStyle/>
+                    <a:p>
+                      <a:pPr algn="ctr"/>
+                      <a:r>
+                        <a:rPr sz="1200">
+                          <a:solidFill>
+                            <a:srgbClr val="8A94A6"/>
+                          </a:solidFill>
+                          <a:latin typeface="맑은 고딕"/>
+                        </a:rPr>
+                        <a:t>완료</a:t>
+                      </a:r>
+                    </a:p>
+                  </a:txBody>
+                  <a:tcPr marL="91440">
+                    <a:solidFill>
+                      <a:srgbClr val="161B22"/>
+                    </a:solidFill>
+                  </a:tcPr>
+                </a:tc>
+                <a:tc>
+                  <a:txBody>
+                    <a:bodyPr/>
+                    <a:lstStyle/>
+                    <a:p>
+                      <a:pPr algn="l"/>
+                      <a:r>
+                        <a:rPr sz="1200">
+                          <a:solidFill>
+                            <a:srgbClr val="8A94A6"/>
+                          </a:solidFill>
+                          <a:latin typeface="맑은 고딕"/>
+                        </a:rPr>
+                        <a:t>슬라이드 3 (카드1 스크린샷)</a:t>
+                      </a:r>
+                    </a:p>
+                  </a:txBody>
+                  <a:tcPr marL="101600">
+                    <a:solidFill>
+                      <a:srgbClr val="161B22"/>
+                    </a:solidFill>
+                  </a:tcPr>
+                </a:tc>
+              </a:tr>
+              <a:tr h="407670">
+                <a:tc>
+                  <a:txBody>
+                    <a:bodyPr/>
+                    <a:lstStyle/>
+                    <a:p>
+                      <a:pPr algn="ctr"/>
+                      <a:r>
+                        <a:rPr sz="1200">
+                          <a:solidFill>
+                            <a:srgbClr val="8A94A6"/>
+                          </a:solidFill>
+                          <a:latin typeface="맑은 고딕"/>
+                        </a:rPr>
+                        <a:t>3</a:t>
+                      </a:r>
+                    </a:p>
+                  </a:txBody>
+                  <a:tcPr marL="91440">
+                    <a:solidFill>
+                      <a:srgbClr val="161B22"/>
+                    </a:solidFill>
+                  </a:tcPr>
+                </a:tc>
+                <a:tc>
+                  <a:txBody>
+                    <a:bodyPr/>
+                    <a:lstStyle/>
+                    <a:p>
+                      <a:pPr algn="l"/>
+                      <a:r>
+                        <a:rPr sz="1200">
+                          <a:solidFill>
+                            <a:srgbClr val="8A94A6"/>
+                          </a:solidFill>
+                          <a:latin typeface="맑은 고딕"/>
+                        </a:rPr>
+                        <a:t>두 기준 해상도에서 잘림·가로 넘침 없음</a:t>
+                      </a:r>
+                    </a:p>
+                  </a:txBody>
+                  <a:tcPr marL="101600">
+                    <a:solidFill>
+                      <a:srgbClr val="161B22"/>
+                    </a:solidFill>
+                  </a:tcPr>
+                </a:tc>
+                <a:tc>
+                  <a:txBody>
+                    <a:bodyPr/>
+                    <a:lstStyle/>
+                    <a:p>
+                      <a:pPr algn="ctr"/>
+                      <a:r>
+                        <a:rPr sz="1200">
+                          <a:solidFill>
+                            <a:srgbClr val="8A94A6"/>
+                          </a:solidFill>
+                          <a:latin typeface="맑은 고딕"/>
+                        </a:rPr>
+                        <a:t>완료</a:t>
+                      </a:r>
+                    </a:p>
+                  </a:txBody>
+                  <a:tcPr marL="91440">
+                    <a:solidFill>
+                      <a:srgbClr val="161B22"/>
+                    </a:solidFill>
+                  </a:tcPr>
+                </a:tc>
+                <a:tc>
+                  <a:txBody>
+                    <a:bodyPr/>
+                    <a:lstStyle/>
+                    <a:p>
+                      <a:pPr algn="l"/>
+                      <a:r>
+                        <a:rPr sz="1200">
+                          <a:solidFill>
+                            <a:srgbClr val="8A94A6"/>
+                          </a:solidFill>
+                          <a:latin typeface="맑은 고딕"/>
+                        </a:rPr>
+                        <a:t>슬라이드 9 검사표 (1366×768·1920×1080 실측)</a:t>
+                      </a:r>
+                    </a:p>
+                  </a:txBody>
+                  <a:tcPr marL="101600">
+                    <a:solidFill>
+                      <a:srgbClr val="161B22"/>
+                    </a:solidFill>
+                  </a:tcPr>
+                </a:tc>
+              </a:tr>
+              <a:tr h="407670">
+                <a:tc>
+                  <a:txBody>
+                    <a:bodyPr/>
+                    <a:lstStyle/>
+                    <a:p>
+                      <a:pPr algn="ctr"/>
+                      <a:r>
+                        <a:rPr sz="1200">
+                          <a:solidFill>
+                            <a:srgbClr val="8A94A6"/>
+                          </a:solidFill>
+                          <a:latin typeface="맑은 고딕"/>
+                        </a:rPr>
+                        <a:t>4</a:t>
+                      </a:r>
+                    </a:p>
+                  </a:txBody>
+                  <a:tcPr marL="91440">
+                    <a:solidFill>
+                      <a:srgbClr val="161B22"/>
+                    </a:solidFill>
+                  </a:tcPr>
+                </a:tc>
+                <a:tc>
+                  <a:txBody>
+                    <a:bodyPr/>
+                    <a:lstStyle/>
+                    <a:p>
+                      <a:pPr algn="l"/>
+                      <a:r>
+                        <a:rPr sz="1200">
+                          <a:solidFill>
+                            <a:srgbClr val="8A94A6"/>
+                          </a:solidFill>
+                          <a:latin typeface="맑은 고딕"/>
+                        </a:rPr>
+                        <a:t>연속 입력·포커스·일시정지·10분 실행 검사 통과</a:t>
+                      </a:r>
+                    </a:p>
+                  </a:txBody>
+                  <a:tcPr marL="101600">
+                    <a:solidFill>
+                      <a:srgbClr val="161B22"/>
+                    </a:solidFill>
+                  </a:tcPr>
+                </a:tc>
+                <a:tc>
+                  <a:txBody>
+                    <a:bodyPr/>
+                    <a:lstStyle/>
+                    <a:p>
+                      <a:pPr algn="ctr"/>
+                      <a:r>
+                        <a:rPr sz="1200">
+                          <a:solidFill>
+                            <a:srgbClr val="8A94A6"/>
+                          </a:solidFill>
+                          <a:latin typeface="맑은 고딕"/>
+                        </a:rPr>
+                        <a:t>완료</a:t>
+                      </a:r>
+                    </a:p>
+                  </a:txBody>
+                  <a:tcPr marL="91440">
+                    <a:solidFill>
+                      <a:srgbClr val="161B22"/>
+                    </a:solidFill>
+                  </a:tcPr>
+                </a:tc>
+                <a:tc>
+                  <a:txBody>
+                    <a:bodyPr/>
+                    <a:lstStyle/>
+                    <a:p>
+                      <a:pPr algn="l"/>
+                      <a:r>
+                        <a:rPr sz="1200">
+                          <a:solidFill>
+                            <a:srgbClr val="8A94A6"/>
+                          </a:solidFill>
+                          <a:latin typeface="맑은 고딕"/>
+                        </a:rPr>
+                        <a:t>슬라이드 9~10, 10분_안정성_로그.csv</a:t>
+                      </a:r>
+                    </a:p>
+                  </a:txBody>
+                  <a:tcPr marL="101600">
+                    <a:solidFill>
+                      <a:srgbClr val="161B22"/>
+                    </a:solidFill>
+                  </a:tcPr>
+                </a:tc>
+              </a:tr>
+              <a:tr h="407670">
+                <a:tc>
+                  <a:txBody>
+                    <a:bodyPr/>
+                    <a:lstStyle/>
+                    <a:p>
+                      <a:pPr algn="ctr"/>
+                      <a:r>
+                        <a:rPr sz="1200">
+                          <a:solidFill>
+                            <a:srgbClr val="8A94A6"/>
+                          </a:solidFill>
+                          <a:latin typeface="맑은 고딕"/>
+                        </a:rPr>
+                        <a:t>5</a:t>
+                      </a:r>
+                    </a:p>
+                  </a:txBody>
+                  <a:tcPr marL="91440">
+                    <a:solidFill>
+                      <a:srgbClr val="161B22"/>
+                    </a:solidFill>
+                  </a:tcPr>
+                </a:tc>
+                <a:tc>
+                  <a:txBody>
+                    <a:bodyPr/>
+                    <a:lstStyle/>
+                    <a:p>
+                      <a:pPr algn="l"/>
+                      <a:r>
+                        <a:rPr sz="1200">
+                          <a:solidFill>
+                            <a:srgbClr val="8A94A6"/>
+                          </a:solidFill>
+                          <a:latin typeface="맑은 고딕"/>
+                        </a:rPr>
+                        <a:t>콘솔 빨간 오류 0건</a:t>
+                      </a:r>
+                    </a:p>
+                  </a:txBody>
+                  <a:tcPr marL="101600">
+                    <a:solidFill>
+                      <a:srgbClr val="161B22"/>
+                    </a:solidFill>
+                  </a:tcPr>
+                </a:tc>
+                <a:tc>
+                  <a:txBody>
+                    <a:bodyPr/>
+                    <a:lstStyle/>
+                    <a:p>
+                      <a:pPr algn="ctr"/>
+                      <a:r>
+                        <a:rPr sz="1200">
+                          <a:solidFill>
+                            <a:srgbClr val="8A94A6"/>
+                          </a:solidFill>
+                          <a:latin typeface="맑은 고딕"/>
+                        </a:rPr>
+                        <a:t>완료</a:t>
+                      </a:r>
+                    </a:p>
+                  </a:txBody>
+                  <a:tcPr marL="91440">
+                    <a:solidFill>
+                      <a:srgbClr val="161B22"/>
+                    </a:solidFill>
+                  </a:tcPr>
+                </a:tc>
+                <a:tc>
+                  <a:txBody>
+                    <a:bodyPr/>
+                    <a:lstStyle/>
+                    <a:p>
+                      <a:pPr algn="l"/>
+                      <a:r>
+                        <a:rPr sz="1200">
+                          <a:solidFill>
+                            <a:srgbClr val="8A94A6"/>
+                          </a:solidFill>
+                          <a:latin typeface="맑은 고딕"/>
+                        </a:rPr>
+                        <a:t>전 슬라이드 공통 확인</a:t>
+                      </a:r>
+                    </a:p>
+                  </a:txBody>
+                  <a:tcPr marL="101600">
+                    <a:solidFill>
+                      <a:srgbClr val="161B22"/>
+                    </a:solidFill>
+                  </a:tcPr>
+                </a:tc>
+              </a:tr>
+              <a:tr h="407670">
+                <a:tc>
+                  <a:txBody>
+                    <a:bodyPr/>
+                    <a:lstStyle/>
+                    <a:p>
+                      <a:pPr algn="ctr"/>
+                      <a:r>
+                        <a:rPr sz="1200">
+                          <a:solidFill>
+                            <a:srgbClr val="8A94A6"/>
+                          </a:solidFill>
+                          <a:latin typeface="맑은 고딕"/>
+                        </a:rPr>
+                        <a:t>6</a:t>
+                      </a:r>
+                    </a:p>
+                  </a:txBody>
+                  <a:tcPr marL="91440">
+                    <a:solidFill>
+                      <a:srgbClr val="161B22"/>
+                    </a:solidFill>
+                  </a:tcPr>
+                </a:tc>
+                <a:tc>
+                  <a:txBody>
+                    <a:bodyPr/>
+                    <a:lstStyle/>
+                    <a:p>
+                      <a:pPr algn="l"/>
+                      <a:r>
+                        <a:rPr sz="1200">
+                          <a:solidFill>
+                            <a:srgbClr val="8A94A6"/>
+                          </a:solidFill>
+                          <a:latin typeface="맑은 고딕"/>
+                        </a:rPr>
+                        <a:t>전·후 각 10회 기록, 난이도 값 1개만 변경</a:t>
+                      </a:r>
+                    </a:p>
+                  </a:txBody>
+                  <a:tcPr marL="101600">
+                    <a:solidFill>
+                      <a:srgbClr val="161B22"/>
+                    </a:solidFill>
+                  </a:tcPr>
+                </a:tc>
+                <a:tc>
+                  <a:txBody>
+                    <a:bodyPr/>
+                    <a:lstStyle/>
+                    <a:p>
+                      <a:pPr algn="ctr"/>
+                      <a:r>
+                        <a:rPr sz="1200">
+                          <a:solidFill>
+                            <a:srgbClr val="8A94A6"/>
+                          </a:solidFill>
+                          <a:latin typeface="맑은 고딕"/>
+                        </a:rPr>
+                        <a:t>완료</a:t>
+                      </a:r>
+                    </a:p>
+                  </a:txBody>
+                  <a:tcPr marL="91440">
+                    <a:solidFill>
+                      <a:srgbClr val="161B22"/>
+                    </a:solidFill>
+                  </a:tcPr>
+                </a:tc>
+                <a:tc>
+                  <a:txBody>
+                    <a:bodyPr/>
+                    <a:lstStyle/>
+                    <a:p>
+                      <a:pPr algn="l"/>
+                      <a:r>
+                        <a:rPr sz="1200">
+                          <a:solidFill>
+                            <a:srgbClr val="8A94A6"/>
+                          </a:solidFill>
+                          <a:latin typeface="맑은 고딕"/>
+                        </a:rPr>
+                        <a:t>슬라이드 11, 카드3_플레이로그_자동.csv</a:t>
+                      </a:r>
+                    </a:p>
+                  </a:txBody>
+                  <a:tcPr marL="101600">
+                    <a:solidFill>
+                      <a:srgbClr val="161B22"/>
+                    </a:solidFill>
+                  </a:tcPr>
+                </a:tc>
+              </a:tr>
+              <a:tr h="407670">
+                <a:tc>
+                  <a:txBody>
+                    <a:bodyPr/>
+                    <a:lstStyle/>
+                    <a:p>
+                      <a:pPr algn="ctr"/>
+                      <a:r>
+                        <a:rPr sz="1200">
+                          <a:solidFill>
+                            <a:srgbClr val="8A94A6"/>
+                          </a:solidFill>
+                          <a:latin typeface="맑은 고딕"/>
+                        </a:rPr>
+                        <a:t>7</a:t>
+                      </a:r>
+                    </a:p>
+                  </a:txBody>
+                  <a:tcPr marL="91440">
+                    <a:solidFill>
+                      <a:srgbClr val="161B22"/>
+                    </a:solidFill>
+                  </a:tcPr>
+                </a:tc>
+                <a:tc>
+                  <a:txBody>
+                    <a:bodyPr/>
+                    <a:lstStyle/>
+                    <a:p>
+                      <a:pPr algn="l"/>
+                      <a:r>
+                        <a:rPr sz="1200">
+                          <a:solidFill>
+                            <a:srgbClr val="8A94A6"/>
+                          </a:solidFill>
+                          <a:latin typeface="맑은 고딕"/>
+                        </a:rPr>
+                        <a:t>저장값이 비거나 손상돼도 기본값으로 실행</a:t>
+                      </a:r>
+                    </a:p>
+                  </a:txBody>
+                  <a:tcPr marL="101600">
+                    <a:solidFill>
+                      <a:srgbClr val="161B22"/>
+                    </a:solidFill>
+                  </a:tcPr>
+                </a:tc>
+                <a:tc>
+                  <a:txBody>
+                    <a:bodyPr/>
+                    <a:lstStyle/>
+                    <a:p>
+                      <a:pPr algn="ctr"/>
+                      <a:r>
+                        <a:rPr sz="1200">
+                          <a:solidFill>
+                            <a:srgbClr val="8A94A6"/>
+                          </a:solidFill>
+                          <a:latin typeface="맑은 고딕"/>
+                        </a:rPr>
+                        <a:t>완료</a:t>
+                      </a:r>
+                    </a:p>
+                  </a:txBody>
+                  <a:tcPr marL="91440">
+                    <a:solidFill>
+                      <a:srgbClr val="161B22"/>
+                    </a:solidFill>
+                  </a:tcPr>
+                </a:tc>
+                <a:tc>
+                  <a:txBody>
+                    <a:bodyPr/>
+                    <a:lstStyle/>
+                    <a:p>
+                      <a:pPr algn="l"/>
+                      <a:r>
+                        <a:rPr sz="1200">
+                          <a:solidFill>
+                            <a:srgbClr val="8A94A6"/>
+                          </a:solidFill>
+                          <a:latin typeface="맑은 고딕"/>
+                        </a:rPr>
+                        <a:t>슬라이드 12 (손상값 6종)</a:t>
+                      </a:r>
+                    </a:p>
+                  </a:txBody>
+                  <a:tcPr marL="101600">
+                    <a:solidFill>
+                      <a:srgbClr val="161B22"/>
+                    </a:solidFill>
+                  </a:tcPr>
+                </a:tc>
+              </a:tr>
+              <a:tr h="407670">
+                <a:tc>
+                  <a:txBody>
+                    <a:bodyPr/>
+                    <a:lstStyle/>
+                    <a:p>
+                      <a:pPr algn="ctr"/>
+                      <a:r>
+                        <a:rPr sz="1200">
+                          <a:solidFill>
+                            <a:srgbClr val="8A94A6"/>
+                          </a:solidFill>
+                          <a:latin typeface="맑은 고딕"/>
+                        </a:rPr>
+                        <a:t>8</a:t>
+                      </a:r>
+                    </a:p>
+                  </a:txBody>
+                  <a:tcPr marL="91440">
+                    <a:solidFill>
+                      <a:srgbClr val="161B22"/>
+                    </a:solidFill>
+                  </a:tcPr>
+                </a:tc>
+                <a:tc>
+                  <a:txBody>
+                    <a:bodyPr/>
+                    <a:lstStyle/>
+                    <a:p>
+                      <a:pPr algn="l"/>
+                      <a:r>
+                        <a:rPr sz="1200">
+                          <a:solidFill>
+                            <a:srgbClr val="8A94A6"/>
+                          </a:solidFill>
+                          <a:latin typeface="맑은 고딕"/>
+                        </a:rPr>
+                        <a:t>현재 판 초기화 + 보존 대상 기록 유지</a:t>
+                      </a:r>
+                    </a:p>
+                  </a:txBody>
+                  <a:tcPr marL="101600">
+                    <a:solidFill>
+                      <a:srgbClr val="161B22"/>
+                    </a:solidFill>
+                  </a:tcPr>
+                </a:tc>
+                <a:tc>
+                  <a:txBody>
+                    <a:bodyPr/>
+                    <a:lstStyle/>
+                    <a:p>
+                      <a:pPr algn="ctr"/>
+                      <a:r>
+                        <a:rPr sz="1200">
+                          <a:solidFill>
+                            <a:srgbClr val="8A94A6"/>
+                          </a:solidFill>
+                          <a:latin typeface="맑은 고딕"/>
+                        </a:rPr>
+                        <a:t>완료</a:t>
+                      </a:r>
+                    </a:p>
+                  </a:txBody>
+                  <a:tcPr marL="91440">
+                    <a:solidFill>
+                      <a:srgbClr val="161B22"/>
+                    </a:solidFill>
+                  </a:tcPr>
+                </a:tc>
+                <a:tc>
+                  <a:txBody>
+                    <a:bodyPr/>
+                    <a:lstStyle/>
+                    <a:p>
+                      <a:pPr algn="l"/>
+                      <a:r>
+                        <a:rPr sz="1200">
+                          <a:solidFill>
+                            <a:srgbClr val="8A94A6"/>
+                          </a:solidFill>
+                          <a:latin typeface="맑은 고딕"/>
+                        </a:rPr>
+                        <a:t>슬라이드 12</a:t>
+                      </a:r>
+                    </a:p>
+                  </a:txBody>
+                  <a:tcPr marL="101600">
+                    <a:solidFill>
+                      <a:srgbClr val="161B22"/>
+                    </a:solidFill>
+                  </a:tcPr>
+                </a:tc>
+              </a:tr>
+              <a:tr h="407670">
+                <a:tc>
+                  <a:txBody>
+                    <a:bodyPr/>
+                    <a:lstStyle/>
+                    <a:p>
+                      <a:pPr algn="ctr"/>
+                      <a:r>
+                        <a:rPr sz="1200">
+                          <a:solidFill>
+                            <a:srgbClr val="8A94A6"/>
+                          </a:solidFill>
+                          <a:latin typeface="맑은 고딕"/>
+                        </a:rPr>
+                        <a:t>9</a:t>
+                      </a:r>
+                    </a:p>
+                  </a:txBody>
+                  <a:tcPr marL="91440">
+                    <a:solidFill>
+                      <a:srgbClr val="161B22"/>
+                    </a:solidFill>
+                  </a:tcPr>
+                </a:tc>
+                <a:tc>
+                  <a:txBody>
+                    <a:bodyPr/>
+                    <a:lstStyle/>
+                    <a:p>
+                      <a:pPr algn="l"/>
+                      <a:r>
+                        <a:rPr sz="1200">
+                          <a:solidFill>
+                            <a:srgbClr val="8A94A6"/>
+                          </a:solidFill>
+                          <a:latin typeface="맑은 고딕"/>
+                        </a:rPr>
+                        <a:t>효과를 줄이거나 끄는 선택이 작동</a:t>
+                      </a:r>
+                    </a:p>
+                  </a:txBody>
+                  <a:tcPr marL="101600">
+                    <a:solidFill>
+                      <a:srgbClr val="161B22"/>
+                    </a:solidFill>
+                  </a:tcPr>
+                </a:tc>
+                <a:tc>
+                  <a:txBody>
+                    <a:bodyPr/>
+                    <a:lstStyle/>
+                    <a:p>
+                      <a:pPr algn="ctr"/>
+                      <a:r>
+                        <a:rPr sz="1200">
+                          <a:solidFill>
+                            <a:srgbClr val="8A94A6"/>
+                          </a:solidFill>
+                          <a:latin typeface="맑은 고딕"/>
+                        </a:rPr>
+                        <a:t>완료</a:t>
+                      </a:r>
+                    </a:p>
+                  </a:txBody>
+                  <a:tcPr marL="91440">
+                    <a:solidFill>
+                      <a:srgbClr val="161B22"/>
+                    </a:solidFill>
+                  </a:tcPr>
+                </a:tc>
+                <a:tc>
+                  <a:txBody>
+                    <a:bodyPr/>
+                    <a:lstStyle/>
+                    <a:p>
+                      <a:pPr algn="l"/>
+                      <a:r>
+                        <a:rPr sz="1200">
+                          <a:solidFill>
+                            <a:srgbClr val="8A94A6"/>
+                          </a:solidFill>
+                          <a:latin typeface="맑은 고딕"/>
+                        </a:rPr>
+                        <a:t>슬라이드 13 (카드5 스크린샷)</a:t>
+                      </a:r>
+                    </a:p>
+                  </a:txBody>
+                  <a:tcPr marL="101600">
+                    <a:solidFill>
+                      <a:srgbClr val="161B22"/>
+                    </a:solidFill>
+                  </a:tcPr>
+                </a:tc>
+              </a:tr>
+              <a:tr h="407670">
+                <a:tc>
+                  <a:txBody>
+                    <a:bodyPr/>
+                    <a:lstStyle/>
+                    <a:p>
+                      <a:pPr algn="ctr"/>
+                      <a:r>
+                        <a:rPr sz="1200">
+                          <a:solidFill>
+                            <a:srgbClr val="8A94A6"/>
+                          </a:solidFill>
+                          <a:latin typeface="맑은 고딕"/>
+                        </a:rPr>
+                        <a:t>10</a:t>
+                      </a:r>
+                    </a:p>
+                  </a:txBody>
+                  <a:tcPr marL="91440">
+                    <a:solidFill>
+                      <a:srgbClr val="161B22"/>
+                    </a:solidFill>
+                  </a:tcPr>
+                </a:tc>
+                <a:tc>
+                  <a:txBody>
+                    <a:bodyPr/>
+                    <a:lstStyle/>
+                    <a:p>
+                      <a:pPr algn="l"/>
+                      <a:r>
+                        <a:rPr sz="1200">
+                          <a:solidFill>
+                            <a:srgbClr val="8A94A6"/>
+                          </a:solidFill>
+                          <a:latin typeface="맑은 고딕"/>
+                        </a:rPr>
+                        <a:t>공개 화면·파일·제출 기록에 개인정보·비밀값 0건</a:t>
+                      </a:r>
+                    </a:p>
+                  </a:txBody>
+                  <a:tcPr marL="101600">
+                    <a:solidFill>
+                      <a:srgbClr val="161B22"/>
+                    </a:solidFill>
+                  </a:tcPr>
+                </a:tc>
+                <a:tc>
+                  <a:txBody>
+                    <a:bodyPr/>
+                    <a:lstStyle/>
+                    <a:p>
+                      <a:pPr algn="ctr"/>
+                      <a:r>
+                        <a:rPr sz="1200">
+                          <a:solidFill>
+                            <a:srgbClr val="8A94A6"/>
+                          </a:solidFill>
+                          <a:latin typeface="맑은 고딕"/>
+                        </a:rPr>
+                        <a:t>완료</a:t>
+                      </a:r>
+                    </a:p>
+                  </a:txBody>
+                  <a:tcPr marL="91440">
+                    <a:solidFill>
+                      <a:srgbClr val="161B22"/>
+                    </a:solidFill>
+                  </a:tcPr>
+                </a:tc>
+                <a:tc>
+                  <a:txBody>
+                    <a:bodyPr/>
+                    <a:lstStyle/>
+                    <a:p>
+                      <a:pPr algn="l"/>
+                      <a:r>
+                        <a:rPr sz="1200">
+                          <a:solidFill>
+                            <a:srgbClr val="8A94A6"/>
+                          </a:solidFill>
+                          <a:latin typeface="맑은 고딕"/>
+                        </a:rPr>
+                        <a:t>저장소 전수 grep 검사</a:t>
+                      </a:r>
+                    </a:p>
+                  </a:txBody>
+                  <a:tcPr marL="101600">
+                    <a:solidFill>
+                      <a:srgbClr val="161B22"/>
+                    </a:solidFill>
+                  </a:tcPr>
+                </a:tc>
+              </a:tr>
+              <a:tr h="407670">
+                <a:tc>
+                  <a:txBody>
+                    <a:bodyPr/>
+                    <a:lstStyle/>
+                    <a:p>
+                      <a:pPr algn="ctr"/>
+                      <a:r>
+                        <a:rPr sz="1200">
+                          <a:solidFill>
+                            <a:srgbClr val="8A94A6"/>
+                          </a:solidFill>
+                          <a:latin typeface="맑은 고딕"/>
+                        </a:rPr>
+                        <a:t>11</a:t>
+                      </a:r>
+                    </a:p>
+                  </a:txBody>
+                  <a:tcPr marL="91440">
+                    <a:solidFill>
+                      <a:srgbClr val="161B22"/>
+                    </a:solidFill>
+                  </a:tcPr>
+                </a:tc>
+                <a:tc>
+                  <a:txBody>
+                    <a:bodyPr/>
+                    <a:lstStyle/>
+                    <a:p>
+                      <a:pPr algn="l"/>
+                      <a:r>
+                        <a:rPr sz="1200">
+                          <a:solidFill>
+                            <a:srgbClr val="8A94A6"/>
+                          </a:solidFill>
+                          <a:latin typeface="맑은 고딕"/>
+                        </a:rPr>
+                        <a:t>위 항목 1~10 모두 완료</a:t>
+                      </a:r>
+                    </a:p>
+                  </a:txBody>
+                  <a:tcPr marL="101600">
+                    <a:solidFill>
+                      <a:srgbClr val="161B22"/>
+                    </a:solidFill>
+                  </a:tcPr>
+                </a:tc>
+                <a:tc>
+                  <a:txBody>
+                    <a:bodyPr/>
+                    <a:lstStyle/>
+                    <a:p>
+                      <a:pPr algn="ctr"/>
+                      <a:r>
+                        <a:rPr sz="1200">
+                          <a:solidFill>
+                            <a:srgbClr val="8A94A6"/>
+                          </a:solidFill>
+                          <a:latin typeface="맑은 고딕"/>
+                        </a:rPr>
+                        <a:t>완료</a:t>
+                      </a:r>
+                    </a:p>
+                  </a:txBody>
+                  <a:tcPr marL="91440">
+                    <a:solidFill>
+                      <a:srgbClr val="161B22"/>
+                    </a:solidFill>
+                  </a:tcPr>
+                </a:tc>
+                <a:tc>
+                  <a:txBody>
+                    <a:bodyPr/>
+                    <a:lstStyle/>
+                    <a:p>
+                      <a:pPr algn="l"/>
+                      <a:r>
+                        <a:rPr sz="1200">
+                          <a:solidFill>
+                            <a:srgbClr val="8A94A6"/>
+                          </a:solidFill>
+                          <a:latin typeface="맑은 고딕"/>
+                        </a:rPr>
+                        <a:t>본 슬라이드 요약</a:t>
+                      </a:r>
+                    </a:p>
+                  </a:txBody>
+                  <a:tcPr marL="101600">
+                    <a:solidFill>
+                      <a:srgbClr val="161B22"/>
+                    </a:solidFill>
+                  </a:tcPr>
+                </a:tc>
+              </a:tr>
+            </a:tbl>
+          </a:graphicData>
+        </a:graphic>
+      </p:graphicFrame>
+    </p:spTree>
+  </p:cSld>
+  <p:clrMapOvr>
+    <a:masterClrMapping/>
+  </p:clrMapOvr>
+</p:sld>
+</file>
+
+<file path=ppt/slides/slide19.xml><?xml version="1.0" encoding="utf-8"?>
+<p:sld xmlns:a="http://schemas.openxmlformats.org/drawingml/2006/main" xmlns:p="http://schemas.openxmlformats.org/presentationml/2006/main" xmlns:r="http://schemas.openxmlformats.org/officeDocument/2006/relationships">
+  <p:cSld>
+    <p:spTree>
+      <p:nvGrpSpPr>
+        <p:cNvPr id="1" name=""/>
+        <p:cNvGrpSpPr/>
+        <p:nvPr/>
+      </p:nvGrpSpPr>
+      <p:grpSpPr/>
+      <p:sp>
+        <p:nvSpPr>
+          <p:cNvPr id="2" name="Rectangle 1"/>
+          <p:cNvSpPr/>
+          <p:nvPr/>
+        </p:nvSpPr>
+        <p:spPr>
+          <a:xfrm>
+            <a:off x="0" y="0"/>
+            <a:ext cx="12191695" cy="6858000"/>
+          </a:xfrm>
+          <a:prstGeom prst="rect">
+            <a:avLst/>
+          </a:prstGeom>
+          <a:solidFill>
+            <a:srgbClr val="0E1116"/>
+          </a:solidFill>
+          <a:ln>
+            <a:noFill/>
+          </a:ln>
+          <a:effectLst/>
+        </p:spPr>
+        <p:style>
+          <a:lnRef idx="1">
+            <a:schemeClr val="accent1"/>
+          </a:lnRef>
+          <a:fillRef idx="3">
+            <a:schemeClr val="accent1"/>
+          </a:fillRef>
+          <a:effectRef idx="2">
+            <a:schemeClr val="accent1"/>
+          </a:effectRef>
+          <a:fontRef idx="minor">
+            <a:schemeClr val="lt1"/>
+          </a:fontRef>
+        </p:style>
+        <p:txBody>
+          <a:bodyPr rtlCol="0" anchor="ctr"/>
+          <a:lstStyle/>
+          <a:p>
+            <a:pPr algn="ctr"/>
+          </a:p>
+        </p:txBody>
+      </p:sp>
+      <p:sp>
+        <p:nvSpPr>
+          <p:cNvPr id="3" name="TextBox 2"/>
+          <p:cNvSpPr txBox="1"/>
+          <p:nvPr/>
+        </p:nvSpPr>
+        <p:spPr>
+          <a:xfrm>
+            <a:off x="11430000" y="6492240"/>
+            <a:ext cx="640080" cy="274320"/>
+          </a:xfrm>
+          <a:prstGeom prst="rect">
+            <a:avLst/>
+          </a:prstGeom>
+          <a:noFill/>
+        </p:spPr>
+        <p:txBody>
+          <a:bodyPr wrap="square">
+            <a:spAutoFit/>
+          </a:bodyPr>
+          <a:lstStyle/>
+          <a:p>
+            <a:pPr algn="r">
+              <a:spcAft>
+                <a:spcPts val="600"/>
+              </a:spcAft>
+            </a:pPr>
+            <a:r>
+              <a:rPr sz="1100" b="0">
+                <a:solidFill>
+                  <a:srgbClr val="8A94A6"/>
+                </a:solidFill>
+                <a:latin typeface="맑은 고딕"/>
+              </a:rPr>
+              <a:t>19</a:t>
             </a:r>
           </a:p>
         </p:txBody>
@@ -9938,7 +11318,7 @@
                       </a:r>
                     </a:p>
                   </a:txBody>
-                  <a:tcPr>
+                  <a:tcPr marL="91440">
                     <a:solidFill>
                       <a:srgbClr val="161B22"/>
                     </a:solidFill>
@@ -9961,7 +11341,7 @@
                       </a:r>
                     </a:p>
                   </a:txBody>
-                  <a:tcPr>
+                  <a:tcPr marL="91440">
                     <a:solidFill>
                       <a:srgbClr val="161B22"/>
                     </a:solidFill>
@@ -9984,7 +11364,7 @@
                       </a:r>
                     </a:p>
                   </a:txBody>
-                  <a:tcPr>
+                  <a:tcPr marL="91440">
                     <a:solidFill>
                       <a:srgbClr val="161B22"/>
                     </a:solidFill>
@@ -10007,7 +11387,7 @@
                       </a:r>
                     </a:p>
                   </a:txBody>
-                  <a:tcPr>
+                  <a:tcPr marL="91440">
                     <a:solidFill>
                       <a:srgbClr val="161B22"/>
                     </a:solidFill>
@@ -10032,7 +11412,7 @@
                       </a:r>
                     </a:p>
                   </a:txBody>
-                  <a:tcPr>
+                  <a:tcPr marL="91440">
                     <a:solidFill>
                       <a:srgbClr val="161B22"/>
                     </a:solidFill>
@@ -10055,7 +11435,7 @@
                       </a:r>
                     </a:p>
                   </a:txBody>
-                  <a:tcPr>
+                  <a:tcPr marL="91440">
                     <a:solidFill>
                       <a:srgbClr val="161B22"/>
                     </a:solidFill>
@@ -10078,7 +11458,7 @@
                       </a:r>
                     </a:p>
                   </a:txBody>
-                  <a:tcPr>
+                  <a:tcPr marL="91440">
                     <a:solidFill>
                       <a:srgbClr val="161B22"/>
                     </a:solidFill>
@@ -10101,7 +11481,7 @@
                       </a:r>
                     </a:p>
                   </a:txBody>
-                  <a:tcPr>
+                  <a:tcPr marL="91440">
                     <a:solidFill>
                       <a:srgbClr val="161B22"/>
                     </a:solidFill>
@@ -10126,7 +11506,7 @@
                       </a:r>
                     </a:p>
                   </a:txBody>
-                  <a:tcPr>
+                  <a:tcPr marL="91440">
                     <a:solidFill>
                       <a:srgbClr val="161B22"/>
                     </a:solidFill>
@@ -10149,7 +11529,7 @@
                       </a:r>
                     </a:p>
                   </a:txBody>
-                  <a:tcPr>
+                  <a:tcPr marL="91440">
                     <a:solidFill>
                       <a:srgbClr val="161B22"/>
                     </a:solidFill>
@@ -10172,7 +11552,7 @@
                       </a:r>
                     </a:p>
                   </a:txBody>
-                  <a:tcPr>
+                  <a:tcPr marL="91440">
                     <a:solidFill>
                       <a:srgbClr val="161B22"/>
                     </a:solidFill>
@@ -10195,7 +11575,7 @@
                       </a:r>
                     </a:p>
                   </a:txBody>
-                  <a:tcPr>
+                  <a:tcPr marL="91440">
                     <a:solidFill>
                       <a:srgbClr val="161B22"/>
                     </a:solidFill>
@@ -10220,7 +11600,7 @@
                       </a:r>
                     </a:p>
                   </a:txBody>
-                  <a:tcPr>
+                  <a:tcPr marL="91440">
                     <a:solidFill>
                       <a:srgbClr val="161B22"/>
                     </a:solidFill>
@@ -10243,7 +11623,7 @@
                       </a:r>
                     </a:p>
                   </a:txBody>
-                  <a:tcPr>
+                  <a:tcPr marL="91440">
                     <a:solidFill>
                       <a:srgbClr val="161B22"/>
                     </a:solidFill>
@@ -10266,7 +11646,7 @@
                       </a:r>
                     </a:p>
                   </a:txBody>
-                  <a:tcPr>
+                  <a:tcPr marL="91440">
                     <a:solidFill>
                       <a:srgbClr val="161B22"/>
                     </a:solidFill>
@@ -10289,7 +11669,7 @@
                       </a:r>
                     </a:p>
                   </a:txBody>
-                  <a:tcPr>
+                  <a:tcPr marL="91440">
                     <a:solidFill>
                       <a:srgbClr val="161B22"/>
                     </a:solidFill>
@@ -13064,7 +14444,7 @@
                       </a:r>
                     </a:p>
                   </a:txBody>
-                  <a:tcPr>
+                  <a:tcPr marL="91440">
                     <a:solidFill>
                       <a:srgbClr val="161B22"/>
                     </a:solidFill>
@@ -13087,7 +14467,7 @@
                       </a:r>
                     </a:p>
                   </a:txBody>
-                  <a:tcPr>
+                  <a:tcPr marL="91440">
                     <a:solidFill>
                       <a:srgbClr val="161B22"/>
                     </a:solidFill>
@@ -13110,7 +14490,7 @@
                       </a:r>
                     </a:p>
                   </a:txBody>
-                  <a:tcPr>
+                  <a:tcPr marL="91440">
                     <a:solidFill>
                       <a:srgbClr val="161B22"/>
                     </a:solidFill>
@@ -13135,7 +14515,7 @@
                       </a:r>
                     </a:p>
                   </a:txBody>
-                  <a:tcPr>
+                  <a:tcPr marL="91440">
                     <a:solidFill>
                       <a:srgbClr val="161B22"/>
                     </a:solidFill>
@@ -13158,7 +14538,7 @@
                       </a:r>
                     </a:p>
                   </a:txBody>
-                  <a:tcPr>
+                  <a:tcPr marL="91440">
                     <a:solidFill>
                       <a:srgbClr val="161B22"/>
                     </a:solidFill>
@@ -13181,7 +14561,7 @@
                       </a:r>
                     </a:p>
                   </a:txBody>
-                  <a:tcPr>
+                  <a:tcPr marL="91440">
                     <a:solidFill>
                       <a:srgbClr val="161B22"/>
                     </a:solidFill>
@@ -13206,7 +14586,7 @@
                       </a:r>
                     </a:p>
                   </a:txBody>
-                  <a:tcPr>
+                  <a:tcPr marL="91440">
                     <a:solidFill>
                       <a:srgbClr val="161B22"/>
                     </a:solidFill>
@@ -13229,7 +14609,7 @@
                       </a:r>
                     </a:p>
                   </a:txBody>
-                  <a:tcPr>
+                  <a:tcPr marL="91440">
                     <a:solidFill>
                       <a:srgbClr val="161B22"/>
                     </a:solidFill>
@@ -13252,7 +14632,7 @@
                       </a:r>
                     </a:p>
                   </a:txBody>
-                  <a:tcPr>
+                  <a:tcPr marL="91440">
                     <a:solidFill>
                       <a:srgbClr val="161B22"/>
                     </a:solidFill>
@@ -13277,7 +14657,7 @@
                       </a:r>
                     </a:p>
                   </a:txBody>
-                  <a:tcPr>
+                  <a:tcPr marL="91440">
                     <a:solidFill>
                       <a:srgbClr val="161B22"/>
                     </a:solidFill>
@@ -13300,7 +14680,7 @@
                       </a:r>
                     </a:p>
                   </a:txBody>
-                  <a:tcPr>
+                  <a:tcPr marL="91440">
                     <a:solidFill>
                       <a:srgbClr val="161B22"/>
                     </a:solidFill>
@@ -13323,7 +14703,7 @@
                       </a:r>
                     </a:p>
                   </a:txBody>
-                  <a:tcPr>
+                  <a:tcPr marL="91440">
                     <a:solidFill>
                       <a:srgbClr val="161B22"/>
                     </a:solidFill>
@@ -13348,7 +14728,7 @@
                       </a:r>
                     </a:p>
                   </a:txBody>
-                  <a:tcPr>
+                  <a:tcPr marL="91440">
                     <a:solidFill>
                       <a:srgbClr val="161B22"/>
                     </a:solidFill>
@@ -13371,7 +14751,7 @@
                       </a:r>
                     </a:p>
                   </a:txBody>
-                  <a:tcPr>
+                  <a:tcPr marL="91440">
                     <a:solidFill>
                       <a:srgbClr val="161B22"/>
                     </a:solidFill>
@@ -13394,7 +14774,7 @@
                       </a:r>
                     </a:p>
                   </a:txBody>
-                  <a:tcPr>
+                  <a:tcPr marL="91440">
                     <a:solidFill>
                       <a:srgbClr val="161B22"/>
                     </a:solidFill>
@@ -13419,7 +14799,7 @@
                       </a:r>
                     </a:p>
                   </a:txBody>
-                  <a:tcPr>
+                  <a:tcPr marL="91440">
                     <a:solidFill>
                       <a:srgbClr val="161B22"/>
                     </a:solidFill>
@@ -13442,7 +14822,7 @@
                       </a:r>
                     </a:p>
                   </a:txBody>
-                  <a:tcPr>
+                  <a:tcPr marL="91440">
                     <a:solidFill>
                       <a:srgbClr val="161B22"/>
                     </a:solidFill>
@@ -13465,7 +14845,7 @@
                       </a:r>
                     </a:p>
                   </a:txBody>
-                  <a:tcPr>
+                  <a:tcPr marL="91440">
                     <a:solidFill>
                       <a:srgbClr val="161B22"/>
                     </a:solidFill>
@@ -13490,7 +14870,7 @@
                       </a:r>
                     </a:p>
                   </a:txBody>
-                  <a:tcPr>
+                  <a:tcPr marL="91440">
                     <a:solidFill>
                       <a:srgbClr val="161B22"/>
                     </a:solidFill>
@@ -13513,7 +14893,7 @@
                       </a:r>
                     </a:p>
                   </a:txBody>
-                  <a:tcPr>
+                  <a:tcPr marL="91440">
                     <a:solidFill>
                       <a:srgbClr val="161B22"/>
                     </a:solidFill>
@@ -13536,7 +14916,7 @@
                       </a:r>
                     </a:p>
                   </a:txBody>
-                  <a:tcPr>
+                  <a:tcPr marL="91440">
                     <a:solidFill>
                       <a:srgbClr val="161B22"/>
                     </a:solidFill>

--- a/발표자료.pptx
+++ b/발표자료.pptx
@@ -24,6 +24,7 @@
     <p:sldId id="272" r:id="rId23"/>
     <p:sldId id="273" r:id="rId24"/>
     <p:sldId id="274" r:id="rId25"/>
+    <p:sldId id="275" r:id="rId26"/>
   </p:sldIdLst>
   <p:sldSz cx="12191695" cy="6858000" type="screen4x3"/>
   <p:notesSz cx="6858000" cy="9144000"/>
@@ -8322,7 +8323,7 @@
                 </a:solidFill>
                 <a:latin typeface="맑은 고딕"/>
               </a:rPr>
-              <a:t>필수 체크리스트</a:t>
+              <a:t>필수 체크리스트 · 증거 1/2</a:t>
             </a:r>
           </a:p>
         </p:txBody>
@@ -8361,7 +8362,7 @@
                 </a:solidFill>
                 <a:latin typeface="맑은 고딕"/>
               </a:rPr>
-              <a:t>학생 자체 점검 11항목 — 증빙자료</a:t>
+              <a:t>학생 자체 점검 — 스크린샷 증거 (1~6)</a:t>
             </a:r>
           </a:p>
         </p:txBody>
@@ -8410,1162 +8411,771 @@
           </a:p>
         </p:txBody>
       </p:sp>
-      <p:graphicFrame>
-        <p:nvGraphicFramePr>
-          <p:cNvPr id="7" name="Table 6"/>
-          <p:cNvGraphicFramePr>
-            <a:graphicFrameLocks noGrp="1"/>
-          </p:cNvGraphicFramePr>
-          <p:nvPr/>
-        </p:nvGraphicFramePr>
-        <p:xfrm>
-          <a:off x="640080" y="1600200"/>
-          <a:ext cx="10881360" cy="4892040"/>
-        </p:xfrm>
-        <a:graphic>
-          <a:graphicData uri="http://schemas.openxmlformats.org/drawingml/2006/table">
-            <a:tbl>
-              <a:tblPr firstRow="1" bandRow="1">
-                <a:tableStyleId>{5C22544A-7EE6-4342-B048-85BDC9FD1C3A}</a:tableStyleId>
-              </a:tblPr>
-              <a:tblGrid>
-                <a:gridCol w="502920"/>
-                <a:gridCol w="4617720"/>
-                <a:gridCol w="1005840"/>
-                <a:gridCol w="4754880"/>
-              </a:tblGrid>
-              <a:tr h="407670">
-                <a:tc>
-                  <a:txBody>
-                    <a:bodyPr/>
-                    <a:lstStyle/>
-                    <a:p>
-                      <a:pPr algn="ctr"/>
-                      <a:r>
-                        <a:rPr b="1" sz="1200">
-                          <a:solidFill>
-                            <a:srgbClr val="E8EDF4"/>
-                          </a:solidFill>
-                          <a:latin typeface="맑은 고딕"/>
-                        </a:rPr>
-                        <a:t>#</a:t>
-                      </a:r>
-                    </a:p>
-                  </a:txBody>
-                  <a:tcPr>
-                    <a:solidFill>
-                      <a:srgbClr val="232A34"/>
-                    </a:solidFill>
-                  </a:tcPr>
-                </a:tc>
-                <a:tc>
-                  <a:txBody>
-                    <a:bodyPr/>
-                    <a:lstStyle/>
-                    <a:p>
-                      <a:pPr algn="l"/>
-                      <a:r>
-                        <a:rPr b="1" sz="1200">
-                          <a:solidFill>
-                            <a:srgbClr val="E8EDF4"/>
-                          </a:solidFill>
-                          <a:latin typeface="맑은 고딕"/>
-                        </a:rPr>
-                        <a:t>체크리스트 항목</a:t>
-                      </a:r>
-                    </a:p>
-                  </a:txBody>
-                  <a:tcPr>
-                    <a:solidFill>
-                      <a:srgbClr val="232A34"/>
-                    </a:solidFill>
-                  </a:tcPr>
-                </a:tc>
-                <a:tc>
-                  <a:txBody>
-                    <a:bodyPr/>
-                    <a:lstStyle/>
-                    <a:p>
-                      <a:pPr algn="ctr"/>
-                      <a:r>
-                        <a:rPr b="1" sz="1200">
-                          <a:solidFill>
-                            <a:srgbClr val="E8EDF4"/>
-                          </a:solidFill>
-                          <a:latin typeface="맑은 고딕"/>
-                        </a:rPr>
-                        <a:t>상태</a:t>
-                      </a:r>
-                    </a:p>
-                  </a:txBody>
-                  <a:tcPr>
-                    <a:solidFill>
-                      <a:srgbClr val="232A34"/>
-                    </a:solidFill>
-                  </a:tcPr>
-                </a:tc>
-                <a:tc>
-                  <a:txBody>
-                    <a:bodyPr/>
-                    <a:lstStyle/>
-                    <a:p>
-                      <a:pPr algn="l"/>
-                      <a:r>
-                        <a:rPr b="1" sz="1200">
-                          <a:solidFill>
-                            <a:srgbClr val="E8EDF4"/>
-                          </a:solidFill>
-                          <a:latin typeface="맑은 고딕"/>
-                        </a:rPr>
-                        <a:t>증빙자료</a:t>
-                      </a:r>
-                    </a:p>
-                  </a:txBody>
-                  <a:tcPr>
-                    <a:solidFill>
-                      <a:srgbClr val="232A34"/>
-                    </a:solidFill>
-                  </a:tcPr>
-                </a:tc>
-              </a:tr>
-              <a:tr h="407670">
-                <a:tc>
-                  <a:txBody>
-                    <a:bodyPr/>
-                    <a:lstStyle/>
-                    <a:p>
-                      <a:pPr algn="ctr"/>
-                      <a:r>
-                        <a:rPr sz="1200">
-                          <a:solidFill>
-                            <a:srgbClr val="8A94A6"/>
-                          </a:solidFill>
-                          <a:latin typeface="맑은 고딕"/>
-                        </a:rPr>
-                        <a:t>1</a:t>
-                      </a:r>
-                    </a:p>
-                  </a:txBody>
-                  <a:tcPr marL="91440">
-                    <a:solidFill>
-                      <a:srgbClr val="161B22"/>
-                    </a:solidFill>
-                  </a:tcPr>
-                </a:tc>
-                <a:tc>
-                  <a:txBody>
-                    <a:bodyPr/>
-                    <a:lstStyle/>
-                    <a:p>
-                      <a:pPr algn="l"/>
-                      <a:r>
-                        <a:rPr sz="1200">
-                          <a:solidFill>
-                            <a:srgbClr val="8A94A6"/>
-                          </a:solidFill>
-                          <a:latin typeface="맑은 고딕"/>
-                        </a:rPr>
-                        <a:t>공개 주소에서 시작→종료→재시작 가능</a:t>
-                      </a:r>
-                    </a:p>
-                  </a:txBody>
-                  <a:tcPr marL="101600">
-                    <a:solidFill>
-                      <a:srgbClr val="161B22"/>
-                    </a:solidFill>
-                  </a:tcPr>
-                </a:tc>
-                <a:tc>
-                  <a:txBody>
-                    <a:bodyPr/>
-                    <a:lstStyle/>
-                    <a:p>
-                      <a:pPr algn="ctr"/>
-                      <a:r>
-                        <a:rPr sz="1200">
-                          <a:solidFill>
-                            <a:srgbClr val="8A94A6"/>
-                          </a:solidFill>
-                          <a:latin typeface="맑은 고딕"/>
-                        </a:rPr>
-                        <a:t>완료</a:t>
-                      </a:r>
-                    </a:p>
-                  </a:txBody>
-                  <a:tcPr marL="91440">
-                    <a:solidFill>
-                      <a:srgbClr val="161B22"/>
-                    </a:solidFill>
-                  </a:tcPr>
-                </a:tc>
-                <a:tc>
-                  <a:txBody>
-                    <a:bodyPr/>
-                    <a:lstStyle/>
-                    <a:p>
-                      <a:pPr algn="l"/>
-                      <a:r>
-                        <a:rPr sz="1200">
-                          <a:solidFill>
-                            <a:srgbClr val="8A94A6"/>
-                          </a:solidFill>
-                          <a:latin typeface="맑은 고딕"/>
-                        </a:rPr>
-                        <a:t>배포 URL 직접 실행</a:t>
-                      </a:r>
-                    </a:p>
-                  </a:txBody>
-                  <a:tcPr marL="101600">
-                    <a:solidFill>
-                      <a:srgbClr val="161B22"/>
-                    </a:solidFill>
-                  </a:tcPr>
-                </a:tc>
-              </a:tr>
-              <a:tr h="407670">
-                <a:tc>
-                  <a:txBody>
-                    <a:bodyPr/>
-                    <a:lstStyle/>
-                    <a:p>
-                      <a:pPr algn="ctr"/>
-                      <a:r>
-                        <a:rPr sz="1200">
-                          <a:solidFill>
-                            <a:srgbClr val="8A94A6"/>
-                          </a:solidFill>
-                          <a:latin typeface="맑은 고딕"/>
-                        </a:rPr>
-                        <a:t>2</a:t>
-                      </a:r>
-                    </a:p>
-                  </a:txBody>
-                  <a:tcPr marL="91440">
-                    <a:solidFill>
-                      <a:srgbClr val="161B22"/>
-                    </a:solidFill>
-                  </a:tcPr>
-                </a:tc>
-                <a:tc>
-                  <a:txBody>
-                    <a:bodyPr/>
-                    <a:lstStyle/>
-                    <a:p>
-                      <a:pPr algn="l"/>
-                      <a:r>
-                        <a:rPr sz="1200">
-                          <a:solidFill>
-                            <a:srgbClr val="8A94A6"/>
-                          </a:solidFill>
-                          <a:latin typeface="맑은 고딕"/>
-                        </a:rPr>
-                        <a:t>핵심 조작과 성공·실패 상태가 화면에서 구분</a:t>
-                      </a:r>
-                    </a:p>
-                  </a:txBody>
-                  <a:tcPr marL="101600">
-                    <a:solidFill>
-                      <a:srgbClr val="161B22"/>
-                    </a:solidFill>
-                  </a:tcPr>
-                </a:tc>
-                <a:tc>
-                  <a:txBody>
-                    <a:bodyPr/>
-                    <a:lstStyle/>
-                    <a:p>
-                      <a:pPr algn="ctr"/>
-                      <a:r>
-                        <a:rPr sz="1200">
-                          <a:solidFill>
-                            <a:srgbClr val="8A94A6"/>
-                          </a:solidFill>
-                          <a:latin typeface="맑은 고딕"/>
-                        </a:rPr>
-                        <a:t>완료</a:t>
-                      </a:r>
-                    </a:p>
-                  </a:txBody>
-                  <a:tcPr marL="91440">
-                    <a:solidFill>
-                      <a:srgbClr val="161B22"/>
-                    </a:solidFill>
-                  </a:tcPr>
-                </a:tc>
-                <a:tc>
-                  <a:txBody>
-                    <a:bodyPr/>
-                    <a:lstStyle/>
-                    <a:p>
-                      <a:pPr algn="l"/>
-                      <a:r>
-                        <a:rPr sz="1200">
-                          <a:solidFill>
-                            <a:srgbClr val="8A94A6"/>
-                          </a:solidFill>
-                          <a:latin typeface="맑은 고딕"/>
-                        </a:rPr>
-                        <a:t>슬라이드 3 (카드1 스크린샷)</a:t>
-                      </a:r>
-                    </a:p>
-                  </a:txBody>
-                  <a:tcPr marL="101600">
-                    <a:solidFill>
-                      <a:srgbClr val="161B22"/>
-                    </a:solidFill>
-                  </a:tcPr>
-                </a:tc>
-              </a:tr>
-              <a:tr h="407670">
-                <a:tc>
-                  <a:txBody>
-                    <a:bodyPr/>
-                    <a:lstStyle/>
-                    <a:p>
-                      <a:pPr algn="ctr"/>
-                      <a:r>
-                        <a:rPr sz="1200">
-                          <a:solidFill>
-                            <a:srgbClr val="8A94A6"/>
-                          </a:solidFill>
-                          <a:latin typeface="맑은 고딕"/>
-                        </a:rPr>
-                        <a:t>3</a:t>
-                      </a:r>
-                    </a:p>
-                  </a:txBody>
-                  <a:tcPr marL="91440">
-                    <a:solidFill>
-                      <a:srgbClr val="161B22"/>
-                    </a:solidFill>
-                  </a:tcPr>
-                </a:tc>
-                <a:tc>
-                  <a:txBody>
-                    <a:bodyPr/>
-                    <a:lstStyle/>
-                    <a:p>
-                      <a:pPr algn="l"/>
-                      <a:r>
-                        <a:rPr sz="1200">
-                          <a:solidFill>
-                            <a:srgbClr val="8A94A6"/>
-                          </a:solidFill>
-                          <a:latin typeface="맑은 고딕"/>
-                        </a:rPr>
-                        <a:t>두 기준 해상도에서 잘림·가로 넘침 없음</a:t>
-                      </a:r>
-                    </a:p>
-                  </a:txBody>
-                  <a:tcPr marL="101600">
-                    <a:solidFill>
-                      <a:srgbClr val="161B22"/>
-                    </a:solidFill>
-                  </a:tcPr>
-                </a:tc>
-                <a:tc>
-                  <a:txBody>
-                    <a:bodyPr/>
-                    <a:lstStyle/>
-                    <a:p>
-                      <a:pPr algn="ctr"/>
-                      <a:r>
-                        <a:rPr sz="1200">
-                          <a:solidFill>
-                            <a:srgbClr val="8A94A6"/>
-                          </a:solidFill>
-                          <a:latin typeface="맑은 고딕"/>
-                        </a:rPr>
-                        <a:t>완료</a:t>
-                      </a:r>
-                    </a:p>
-                  </a:txBody>
-                  <a:tcPr marL="91440">
-                    <a:solidFill>
-                      <a:srgbClr val="161B22"/>
-                    </a:solidFill>
-                  </a:tcPr>
-                </a:tc>
-                <a:tc>
-                  <a:txBody>
-                    <a:bodyPr/>
-                    <a:lstStyle/>
-                    <a:p>
-                      <a:pPr algn="l"/>
-                      <a:r>
-                        <a:rPr sz="1200">
-                          <a:solidFill>
-                            <a:srgbClr val="8A94A6"/>
-                          </a:solidFill>
-                          <a:latin typeface="맑은 고딕"/>
-                        </a:rPr>
-                        <a:t>슬라이드 9 검사표 (1366×768·1920×1080 실측)</a:t>
-                      </a:r>
-                    </a:p>
-                  </a:txBody>
-                  <a:tcPr marL="101600">
-                    <a:solidFill>
-                      <a:srgbClr val="161B22"/>
-                    </a:solidFill>
-                  </a:tcPr>
-                </a:tc>
-              </a:tr>
-              <a:tr h="407670">
-                <a:tc>
-                  <a:txBody>
-                    <a:bodyPr/>
-                    <a:lstStyle/>
-                    <a:p>
-                      <a:pPr algn="ctr"/>
-                      <a:r>
-                        <a:rPr sz="1200">
-                          <a:solidFill>
-                            <a:srgbClr val="8A94A6"/>
-                          </a:solidFill>
-                          <a:latin typeface="맑은 고딕"/>
-                        </a:rPr>
-                        <a:t>4</a:t>
-                      </a:r>
-                    </a:p>
-                  </a:txBody>
-                  <a:tcPr marL="91440">
-                    <a:solidFill>
-                      <a:srgbClr val="161B22"/>
-                    </a:solidFill>
-                  </a:tcPr>
-                </a:tc>
-                <a:tc>
-                  <a:txBody>
-                    <a:bodyPr/>
-                    <a:lstStyle/>
-                    <a:p>
-                      <a:pPr algn="l"/>
-                      <a:r>
-                        <a:rPr sz="1200">
-                          <a:solidFill>
-                            <a:srgbClr val="8A94A6"/>
-                          </a:solidFill>
-                          <a:latin typeface="맑은 고딕"/>
-                        </a:rPr>
-                        <a:t>연속 입력·포커스·일시정지·10분 실행 검사 통과</a:t>
-                      </a:r>
-                    </a:p>
-                  </a:txBody>
-                  <a:tcPr marL="101600">
-                    <a:solidFill>
-                      <a:srgbClr val="161B22"/>
-                    </a:solidFill>
-                  </a:tcPr>
-                </a:tc>
-                <a:tc>
-                  <a:txBody>
-                    <a:bodyPr/>
-                    <a:lstStyle/>
-                    <a:p>
-                      <a:pPr algn="ctr"/>
-                      <a:r>
-                        <a:rPr sz="1200">
-                          <a:solidFill>
-                            <a:srgbClr val="8A94A6"/>
-                          </a:solidFill>
-                          <a:latin typeface="맑은 고딕"/>
-                        </a:rPr>
-                        <a:t>완료</a:t>
-                      </a:r>
-                    </a:p>
-                  </a:txBody>
-                  <a:tcPr marL="91440">
-                    <a:solidFill>
-                      <a:srgbClr val="161B22"/>
-                    </a:solidFill>
-                  </a:tcPr>
-                </a:tc>
-                <a:tc>
-                  <a:txBody>
-                    <a:bodyPr/>
-                    <a:lstStyle/>
-                    <a:p>
-                      <a:pPr algn="l"/>
-                      <a:r>
-                        <a:rPr sz="1200">
-                          <a:solidFill>
-                            <a:srgbClr val="8A94A6"/>
-                          </a:solidFill>
-                          <a:latin typeface="맑은 고딕"/>
-                        </a:rPr>
-                        <a:t>슬라이드 9~10, 10분_안정성_로그.csv</a:t>
-                      </a:r>
-                    </a:p>
-                  </a:txBody>
-                  <a:tcPr marL="101600">
-                    <a:solidFill>
-                      <a:srgbClr val="161B22"/>
-                    </a:solidFill>
-                  </a:tcPr>
-                </a:tc>
-              </a:tr>
-              <a:tr h="407670">
-                <a:tc>
-                  <a:txBody>
-                    <a:bodyPr/>
-                    <a:lstStyle/>
-                    <a:p>
-                      <a:pPr algn="ctr"/>
-                      <a:r>
-                        <a:rPr sz="1200">
-                          <a:solidFill>
-                            <a:srgbClr val="8A94A6"/>
-                          </a:solidFill>
-                          <a:latin typeface="맑은 고딕"/>
-                        </a:rPr>
-                        <a:t>5</a:t>
-                      </a:r>
-                    </a:p>
-                  </a:txBody>
-                  <a:tcPr marL="91440">
-                    <a:solidFill>
-                      <a:srgbClr val="161B22"/>
-                    </a:solidFill>
-                  </a:tcPr>
-                </a:tc>
-                <a:tc>
-                  <a:txBody>
-                    <a:bodyPr/>
-                    <a:lstStyle/>
-                    <a:p>
-                      <a:pPr algn="l"/>
-                      <a:r>
-                        <a:rPr sz="1200">
-                          <a:solidFill>
-                            <a:srgbClr val="8A94A6"/>
-                          </a:solidFill>
-                          <a:latin typeface="맑은 고딕"/>
-                        </a:rPr>
-                        <a:t>콘솔 빨간 오류 0건</a:t>
-                      </a:r>
-                    </a:p>
-                  </a:txBody>
-                  <a:tcPr marL="101600">
-                    <a:solidFill>
-                      <a:srgbClr val="161B22"/>
-                    </a:solidFill>
-                  </a:tcPr>
-                </a:tc>
-                <a:tc>
-                  <a:txBody>
-                    <a:bodyPr/>
-                    <a:lstStyle/>
-                    <a:p>
-                      <a:pPr algn="ctr"/>
-                      <a:r>
-                        <a:rPr sz="1200">
-                          <a:solidFill>
-                            <a:srgbClr val="8A94A6"/>
-                          </a:solidFill>
-                          <a:latin typeface="맑은 고딕"/>
-                        </a:rPr>
-                        <a:t>완료</a:t>
-                      </a:r>
-                    </a:p>
-                  </a:txBody>
-                  <a:tcPr marL="91440">
-                    <a:solidFill>
-                      <a:srgbClr val="161B22"/>
-                    </a:solidFill>
-                  </a:tcPr>
-                </a:tc>
-                <a:tc>
-                  <a:txBody>
-                    <a:bodyPr/>
-                    <a:lstStyle/>
-                    <a:p>
-                      <a:pPr algn="l"/>
-                      <a:r>
-                        <a:rPr sz="1200">
-                          <a:solidFill>
-                            <a:srgbClr val="8A94A6"/>
-                          </a:solidFill>
-                          <a:latin typeface="맑은 고딕"/>
-                        </a:rPr>
-                        <a:t>전 슬라이드 공통 확인</a:t>
-                      </a:r>
-                    </a:p>
-                  </a:txBody>
-                  <a:tcPr marL="101600">
-                    <a:solidFill>
-                      <a:srgbClr val="161B22"/>
-                    </a:solidFill>
-                  </a:tcPr>
-                </a:tc>
-              </a:tr>
-              <a:tr h="407670">
-                <a:tc>
-                  <a:txBody>
-                    <a:bodyPr/>
-                    <a:lstStyle/>
-                    <a:p>
-                      <a:pPr algn="ctr"/>
-                      <a:r>
-                        <a:rPr sz="1200">
-                          <a:solidFill>
-                            <a:srgbClr val="8A94A6"/>
-                          </a:solidFill>
-                          <a:latin typeface="맑은 고딕"/>
-                        </a:rPr>
-                        <a:t>6</a:t>
-                      </a:r>
-                    </a:p>
-                  </a:txBody>
-                  <a:tcPr marL="91440">
-                    <a:solidFill>
-                      <a:srgbClr val="161B22"/>
-                    </a:solidFill>
-                  </a:tcPr>
-                </a:tc>
-                <a:tc>
-                  <a:txBody>
-                    <a:bodyPr/>
-                    <a:lstStyle/>
-                    <a:p>
-                      <a:pPr algn="l"/>
-                      <a:r>
-                        <a:rPr sz="1200">
-                          <a:solidFill>
-                            <a:srgbClr val="8A94A6"/>
-                          </a:solidFill>
-                          <a:latin typeface="맑은 고딕"/>
-                        </a:rPr>
-                        <a:t>전·후 각 10회 기록, 난이도 값 1개만 변경</a:t>
-                      </a:r>
-                    </a:p>
-                  </a:txBody>
-                  <a:tcPr marL="101600">
-                    <a:solidFill>
-                      <a:srgbClr val="161B22"/>
-                    </a:solidFill>
-                  </a:tcPr>
-                </a:tc>
-                <a:tc>
-                  <a:txBody>
-                    <a:bodyPr/>
-                    <a:lstStyle/>
-                    <a:p>
-                      <a:pPr algn="ctr"/>
-                      <a:r>
-                        <a:rPr sz="1200">
-                          <a:solidFill>
-                            <a:srgbClr val="8A94A6"/>
-                          </a:solidFill>
-                          <a:latin typeface="맑은 고딕"/>
-                        </a:rPr>
-                        <a:t>완료</a:t>
-                      </a:r>
-                    </a:p>
-                  </a:txBody>
-                  <a:tcPr marL="91440">
-                    <a:solidFill>
-                      <a:srgbClr val="161B22"/>
-                    </a:solidFill>
-                  </a:tcPr>
-                </a:tc>
-                <a:tc>
-                  <a:txBody>
-                    <a:bodyPr/>
-                    <a:lstStyle/>
-                    <a:p>
-                      <a:pPr algn="l"/>
-                      <a:r>
-                        <a:rPr sz="1200">
-                          <a:solidFill>
-                            <a:srgbClr val="8A94A6"/>
-                          </a:solidFill>
-                          <a:latin typeface="맑은 고딕"/>
-                        </a:rPr>
-                        <a:t>슬라이드 11, 카드3_플레이로그_자동.csv</a:t>
-                      </a:r>
-                    </a:p>
-                  </a:txBody>
-                  <a:tcPr marL="101600">
-                    <a:solidFill>
-                      <a:srgbClr val="161B22"/>
-                    </a:solidFill>
-                  </a:tcPr>
-                </a:tc>
-              </a:tr>
-              <a:tr h="407670">
-                <a:tc>
-                  <a:txBody>
-                    <a:bodyPr/>
-                    <a:lstStyle/>
-                    <a:p>
-                      <a:pPr algn="ctr"/>
-                      <a:r>
-                        <a:rPr sz="1200">
-                          <a:solidFill>
-                            <a:srgbClr val="8A94A6"/>
-                          </a:solidFill>
-                          <a:latin typeface="맑은 고딕"/>
-                        </a:rPr>
-                        <a:t>7</a:t>
-                      </a:r>
-                    </a:p>
-                  </a:txBody>
-                  <a:tcPr marL="91440">
-                    <a:solidFill>
-                      <a:srgbClr val="161B22"/>
-                    </a:solidFill>
-                  </a:tcPr>
-                </a:tc>
-                <a:tc>
-                  <a:txBody>
-                    <a:bodyPr/>
-                    <a:lstStyle/>
-                    <a:p>
-                      <a:pPr algn="l"/>
-                      <a:r>
-                        <a:rPr sz="1200">
-                          <a:solidFill>
-                            <a:srgbClr val="8A94A6"/>
-                          </a:solidFill>
-                          <a:latin typeface="맑은 고딕"/>
-                        </a:rPr>
-                        <a:t>저장값이 비거나 손상돼도 기본값으로 실행</a:t>
-                      </a:r>
-                    </a:p>
-                  </a:txBody>
-                  <a:tcPr marL="101600">
-                    <a:solidFill>
-                      <a:srgbClr val="161B22"/>
-                    </a:solidFill>
-                  </a:tcPr>
-                </a:tc>
-                <a:tc>
-                  <a:txBody>
-                    <a:bodyPr/>
-                    <a:lstStyle/>
-                    <a:p>
-                      <a:pPr algn="ctr"/>
-                      <a:r>
-                        <a:rPr sz="1200">
-                          <a:solidFill>
-                            <a:srgbClr val="8A94A6"/>
-                          </a:solidFill>
-                          <a:latin typeface="맑은 고딕"/>
-                        </a:rPr>
-                        <a:t>완료</a:t>
-                      </a:r>
-                    </a:p>
-                  </a:txBody>
-                  <a:tcPr marL="91440">
-                    <a:solidFill>
-                      <a:srgbClr val="161B22"/>
-                    </a:solidFill>
-                  </a:tcPr>
-                </a:tc>
-                <a:tc>
-                  <a:txBody>
-                    <a:bodyPr/>
-                    <a:lstStyle/>
-                    <a:p>
-                      <a:pPr algn="l"/>
-                      <a:r>
-                        <a:rPr sz="1200">
-                          <a:solidFill>
-                            <a:srgbClr val="8A94A6"/>
-                          </a:solidFill>
-                          <a:latin typeface="맑은 고딕"/>
-                        </a:rPr>
-                        <a:t>슬라이드 12 (손상값 6종)</a:t>
-                      </a:r>
-                    </a:p>
-                  </a:txBody>
-                  <a:tcPr marL="101600">
-                    <a:solidFill>
-                      <a:srgbClr val="161B22"/>
-                    </a:solidFill>
-                  </a:tcPr>
-                </a:tc>
-              </a:tr>
-              <a:tr h="407670">
-                <a:tc>
-                  <a:txBody>
-                    <a:bodyPr/>
-                    <a:lstStyle/>
-                    <a:p>
-                      <a:pPr algn="ctr"/>
-                      <a:r>
-                        <a:rPr sz="1200">
-                          <a:solidFill>
-                            <a:srgbClr val="8A94A6"/>
-                          </a:solidFill>
-                          <a:latin typeface="맑은 고딕"/>
-                        </a:rPr>
-                        <a:t>8</a:t>
-                      </a:r>
-                    </a:p>
-                  </a:txBody>
-                  <a:tcPr marL="91440">
-                    <a:solidFill>
-                      <a:srgbClr val="161B22"/>
-                    </a:solidFill>
-                  </a:tcPr>
-                </a:tc>
-                <a:tc>
-                  <a:txBody>
-                    <a:bodyPr/>
-                    <a:lstStyle/>
-                    <a:p>
-                      <a:pPr algn="l"/>
-                      <a:r>
-                        <a:rPr sz="1200">
-                          <a:solidFill>
-                            <a:srgbClr val="8A94A6"/>
-                          </a:solidFill>
-                          <a:latin typeface="맑은 고딕"/>
-                        </a:rPr>
-                        <a:t>현재 판 초기화 + 보존 대상 기록 유지</a:t>
-                      </a:r>
-                    </a:p>
-                  </a:txBody>
-                  <a:tcPr marL="101600">
-                    <a:solidFill>
-                      <a:srgbClr val="161B22"/>
-                    </a:solidFill>
-                  </a:tcPr>
-                </a:tc>
-                <a:tc>
-                  <a:txBody>
-                    <a:bodyPr/>
-                    <a:lstStyle/>
-                    <a:p>
-                      <a:pPr algn="ctr"/>
-                      <a:r>
-                        <a:rPr sz="1200">
-                          <a:solidFill>
-                            <a:srgbClr val="8A94A6"/>
-                          </a:solidFill>
-                          <a:latin typeface="맑은 고딕"/>
-                        </a:rPr>
-                        <a:t>완료</a:t>
-                      </a:r>
-                    </a:p>
-                  </a:txBody>
-                  <a:tcPr marL="91440">
-                    <a:solidFill>
-                      <a:srgbClr val="161B22"/>
-                    </a:solidFill>
-                  </a:tcPr>
-                </a:tc>
-                <a:tc>
-                  <a:txBody>
-                    <a:bodyPr/>
-                    <a:lstStyle/>
-                    <a:p>
-                      <a:pPr algn="l"/>
-                      <a:r>
-                        <a:rPr sz="1200">
-                          <a:solidFill>
-                            <a:srgbClr val="8A94A6"/>
-                          </a:solidFill>
-                          <a:latin typeface="맑은 고딕"/>
-                        </a:rPr>
-                        <a:t>슬라이드 12</a:t>
-                      </a:r>
-                    </a:p>
-                  </a:txBody>
-                  <a:tcPr marL="101600">
-                    <a:solidFill>
-                      <a:srgbClr val="161B22"/>
-                    </a:solidFill>
-                  </a:tcPr>
-                </a:tc>
-              </a:tr>
-              <a:tr h="407670">
-                <a:tc>
-                  <a:txBody>
-                    <a:bodyPr/>
-                    <a:lstStyle/>
-                    <a:p>
-                      <a:pPr algn="ctr"/>
-                      <a:r>
-                        <a:rPr sz="1200">
-                          <a:solidFill>
-                            <a:srgbClr val="8A94A6"/>
-                          </a:solidFill>
-                          <a:latin typeface="맑은 고딕"/>
-                        </a:rPr>
-                        <a:t>9</a:t>
-                      </a:r>
-                    </a:p>
-                  </a:txBody>
-                  <a:tcPr marL="91440">
-                    <a:solidFill>
-                      <a:srgbClr val="161B22"/>
-                    </a:solidFill>
-                  </a:tcPr>
-                </a:tc>
-                <a:tc>
-                  <a:txBody>
-                    <a:bodyPr/>
-                    <a:lstStyle/>
-                    <a:p>
-                      <a:pPr algn="l"/>
-                      <a:r>
-                        <a:rPr sz="1200">
-                          <a:solidFill>
-                            <a:srgbClr val="8A94A6"/>
-                          </a:solidFill>
-                          <a:latin typeface="맑은 고딕"/>
-                        </a:rPr>
-                        <a:t>효과를 줄이거나 끄는 선택이 작동</a:t>
-                      </a:r>
-                    </a:p>
-                  </a:txBody>
-                  <a:tcPr marL="101600">
-                    <a:solidFill>
-                      <a:srgbClr val="161B22"/>
-                    </a:solidFill>
-                  </a:tcPr>
-                </a:tc>
-                <a:tc>
-                  <a:txBody>
-                    <a:bodyPr/>
-                    <a:lstStyle/>
-                    <a:p>
-                      <a:pPr algn="ctr"/>
-                      <a:r>
-                        <a:rPr sz="1200">
-                          <a:solidFill>
-                            <a:srgbClr val="8A94A6"/>
-                          </a:solidFill>
-                          <a:latin typeface="맑은 고딕"/>
-                        </a:rPr>
-                        <a:t>완료</a:t>
-                      </a:r>
-                    </a:p>
-                  </a:txBody>
-                  <a:tcPr marL="91440">
-                    <a:solidFill>
-                      <a:srgbClr val="161B22"/>
-                    </a:solidFill>
-                  </a:tcPr>
-                </a:tc>
-                <a:tc>
-                  <a:txBody>
-                    <a:bodyPr/>
-                    <a:lstStyle/>
-                    <a:p>
-                      <a:pPr algn="l"/>
-                      <a:r>
-                        <a:rPr sz="1200">
-                          <a:solidFill>
-                            <a:srgbClr val="8A94A6"/>
-                          </a:solidFill>
-                          <a:latin typeface="맑은 고딕"/>
-                        </a:rPr>
-                        <a:t>슬라이드 13 (카드5 스크린샷)</a:t>
-                      </a:r>
-                    </a:p>
-                  </a:txBody>
-                  <a:tcPr marL="101600">
-                    <a:solidFill>
-                      <a:srgbClr val="161B22"/>
-                    </a:solidFill>
-                  </a:tcPr>
-                </a:tc>
-              </a:tr>
-              <a:tr h="407670">
-                <a:tc>
-                  <a:txBody>
-                    <a:bodyPr/>
-                    <a:lstStyle/>
-                    <a:p>
-                      <a:pPr algn="ctr"/>
-                      <a:r>
-                        <a:rPr sz="1200">
-                          <a:solidFill>
-                            <a:srgbClr val="8A94A6"/>
-                          </a:solidFill>
-                          <a:latin typeface="맑은 고딕"/>
-                        </a:rPr>
-                        <a:t>10</a:t>
-                      </a:r>
-                    </a:p>
-                  </a:txBody>
-                  <a:tcPr marL="91440">
-                    <a:solidFill>
-                      <a:srgbClr val="161B22"/>
-                    </a:solidFill>
-                  </a:tcPr>
-                </a:tc>
-                <a:tc>
-                  <a:txBody>
-                    <a:bodyPr/>
-                    <a:lstStyle/>
-                    <a:p>
-                      <a:pPr algn="l"/>
-                      <a:r>
-                        <a:rPr sz="1200">
-                          <a:solidFill>
-                            <a:srgbClr val="8A94A6"/>
-                          </a:solidFill>
-                          <a:latin typeface="맑은 고딕"/>
-                        </a:rPr>
-                        <a:t>공개 화면·파일·제출 기록에 개인정보·비밀값 0건</a:t>
-                      </a:r>
-                    </a:p>
-                  </a:txBody>
-                  <a:tcPr marL="101600">
-                    <a:solidFill>
-                      <a:srgbClr val="161B22"/>
-                    </a:solidFill>
-                  </a:tcPr>
-                </a:tc>
-                <a:tc>
-                  <a:txBody>
-                    <a:bodyPr/>
-                    <a:lstStyle/>
-                    <a:p>
-                      <a:pPr algn="ctr"/>
-                      <a:r>
-                        <a:rPr sz="1200">
-                          <a:solidFill>
-                            <a:srgbClr val="8A94A6"/>
-                          </a:solidFill>
-                          <a:latin typeface="맑은 고딕"/>
-                        </a:rPr>
-                        <a:t>완료</a:t>
-                      </a:r>
-                    </a:p>
-                  </a:txBody>
-                  <a:tcPr marL="91440">
-                    <a:solidFill>
-                      <a:srgbClr val="161B22"/>
-                    </a:solidFill>
-                  </a:tcPr>
-                </a:tc>
-                <a:tc>
-                  <a:txBody>
-                    <a:bodyPr/>
-                    <a:lstStyle/>
-                    <a:p>
-                      <a:pPr algn="l"/>
-                      <a:r>
-                        <a:rPr sz="1200">
-                          <a:solidFill>
-                            <a:srgbClr val="8A94A6"/>
-                          </a:solidFill>
-                          <a:latin typeface="맑은 고딕"/>
-                        </a:rPr>
-                        <a:t>저장소 전수 grep 검사</a:t>
-                      </a:r>
-                    </a:p>
-                  </a:txBody>
-                  <a:tcPr marL="101600">
-                    <a:solidFill>
-                      <a:srgbClr val="161B22"/>
-                    </a:solidFill>
-                  </a:tcPr>
-                </a:tc>
-              </a:tr>
-              <a:tr h="407670">
-                <a:tc>
-                  <a:txBody>
-                    <a:bodyPr/>
-                    <a:lstStyle/>
-                    <a:p>
-                      <a:pPr algn="ctr"/>
-                      <a:r>
-                        <a:rPr sz="1200">
-                          <a:solidFill>
-                            <a:srgbClr val="8A94A6"/>
-                          </a:solidFill>
-                          <a:latin typeface="맑은 고딕"/>
-                        </a:rPr>
-                        <a:t>11</a:t>
-                      </a:r>
-                    </a:p>
-                  </a:txBody>
-                  <a:tcPr marL="91440">
-                    <a:solidFill>
-                      <a:srgbClr val="161B22"/>
-                    </a:solidFill>
-                  </a:tcPr>
-                </a:tc>
-                <a:tc>
-                  <a:txBody>
-                    <a:bodyPr/>
-                    <a:lstStyle/>
-                    <a:p>
-                      <a:pPr algn="l"/>
-                      <a:r>
-                        <a:rPr sz="1200">
-                          <a:solidFill>
-                            <a:srgbClr val="8A94A6"/>
-                          </a:solidFill>
-                          <a:latin typeface="맑은 고딕"/>
-                        </a:rPr>
-                        <a:t>위 항목 1~10 모두 완료</a:t>
-                      </a:r>
-                    </a:p>
-                  </a:txBody>
-                  <a:tcPr marL="101600">
-                    <a:solidFill>
-                      <a:srgbClr val="161B22"/>
-                    </a:solidFill>
-                  </a:tcPr>
-                </a:tc>
-                <a:tc>
-                  <a:txBody>
-                    <a:bodyPr/>
-                    <a:lstStyle/>
-                    <a:p>
-                      <a:pPr algn="ctr"/>
-                      <a:r>
-                        <a:rPr sz="1200">
-                          <a:solidFill>
-                            <a:srgbClr val="8A94A6"/>
-                          </a:solidFill>
-                          <a:latin typeface="맑은 고딕"/>
-                        </a:rPr>
-                        <a:t>완료</a:t>
-                      </a:r>
-                    </a:p>
-                  </a:txBody>
-                  <a:tcPr marL="91440">
-                    <a:solidFill>
-                      <a:srgbClr val="161B22"/>
-                    </a:solidFill>
-                  </a:tcPr>
-                </a:tc>
-                <a:tc>
-                  <a:txBody>
-                    <a:bodyPr/>
-                    <a:lstStyle/>
-                    <a:p>
-                      <a:pPr algn="l"/>
-                      <a:r>
-                        <a:rPr sz="1200">
-                          <a:solidFill>
-                            <a:srgbClr val="8A94A6"/>
-                          </a:solidFill>
-                          <a:latin typeface="맑은 고딕"/>
-                        </a:rPr>
-                        <a:t>본 슬라이드 요약</a:t>
-                      </a:r>
-                    </a:p>
-                  </a:txBody>
-                  <a:tcPr marL="101600">
-                    <a:solidFill>
-                      <a:srgbClr val="161B22"/>
-                    </a:solidFill>
-                  </a:tcPr>
-                </a:tc>
-              </a:tr>
-            </a:tbl>
-          </a:graphicData>
-        </a:graphic>
-      </p:graphicFrame>
+      <p:sp>
+        <p:nvSpPr>
+          <p:cNvPr id="7" name="Rounded Rectangle 6"/>
+          <p:cNvSpPr/>
+          <p:nvPr/>
+        </p:nvSpPr>
+        <p:spPr>
+          <a:xfrm>
+            <a:off x="457200" y="1600200"/>
+            <a:ext cx="3657600" cy="2395728"/>
+          </a:xfrm>
+          <a:prstGeom prst="roundRect">
+            <a:avLst/>
+          </a:prstGeom>
+          <a:solidFill>
+            <a:srgbClr val="161B22"/>
+          </a:solidFill>
+          <a:ln w="9525">
+            <a:solidFill>
+              <a:srgbClr val="232A34"/>
+            </a:solidFill>
+          </a:ln>
+          <a:effectLst/>
+        </p:spPr>
+        <p:style>
+          <a:lnRef idx="1">
+            <a:schemeClr val="accent1"/>
+          </a:lnRef>
+          <a:fillRef idx="3">
+            <a:schemeClr val="accent1"/>
+          </a:fillRef>
+          <a:effectRef idx="2">
+            <a:schemeClr val="accent1"/>
+          </a:effectRef>
+          <a:fontRef idx="minor">
+            <a:schemeClr val="lt1"/>
+          </a:fontRef>
+        </p:style>
+        <p:txBody>
+          <a:bodyPr rtlCol="0" anchor="ctr"/>
+          <a:lstStyle/>
+          <a:p>
+            <a:pPr algn="ctr"/>
+          </a:p>
+        </p:txBody>
+      </p:sp>
+      <p:sp>
+        <p:nvSpPr>
+          <p:cNvPr id="8" name="TextBox 7"/>
+          <p:cNvSpPr txBox="1"/>
+          <p:nvPr/>
+        </p:nvSpPr>
+        <p:spPr>
+          <a:xfrm>
+            <a:off x="566928" y="1655064"/>
+            <a:ext cx="3438144" cy="365760"/>
+          </a:xfrm>
+          <a:prstGeom prst="rect">
+            <a:avLst/>
+          </a:prstGeom>
+          <a:noFill/>
+        </p:spPr>
+        <p:txBody>
+          <a:bodyPr wrap="square">
+            <a:spAutoFit/>
+          </a:bodyPr>
+          <a:lstStyle/>
+          <a:p>
+            <a:pPr algn="l"/>
+            <a:r>
+              <a:rPr sz="1250" b="1">
+                <a:solidFill>
+                  <a:srgbClr val="5EE6C5"/>
+                </a:solidFill>
+                <a:latin typeface="맑은 고딕"/>
+              </a:rPr>
+              <a:t>1. 시작→종료→재시작</a:t>
+            </a:r>
+          </a:p>
+        </p:txBody>
+      </p:sp>
+      <p:pic>
+        <p:nvPicPr>
+          <p:cNvPr id="9" name="Picture 8" descr="01_start_after.png"/>
+          <p:cNvPicPr>
+            <a:picLocks noChangeAspect="1"/>
+          </p:cNvPicPr>
+          <p:nvPr/>
+        </p:nvPicPr>
+        <p:blipFill>
+          <a:blip r:embed="rId2"/>
+          <a:stretch>
+            <a:fillRect/>
+          </a:stretch>
+        </p:blipFill>
+        <p:spPr>
+          <a:xfrm>
+            <a:off x="1386075" y="2057400"/>
+            <a:ext cx="845061" cy="1828800"/>
+          </a:xfrm>
+          <a:prstGeom prst="rect">
+            <a:avLst/>
+          </a:prstGeom>
+        </p:spPr>
+      </p:pic>
+      <p:pic>
+        <p:nvPicPr>
+          <p:cNvPr id="10" name="Picture 9" descr="08_gameover_after.png"/>
+          <p:cNvPicPr>
+            <a:picLocks noChangeAspect="1"/>
+          </p:cNvPicPr>
+          <p:nvPr/>
+        </p:nvPicPr>
+        <p:blipFill>
+          <a:blip r:embed="rId3"/>
+          <a:stretch>
+            <a:fillRect/>
+          </a:stretch>
+        </p:blipFill>
+        <p:spPr>
+          <a:xfrm>
+            <a:off x="2340864" y="2057400"/>
+            <a:ext cx="845061" cy="1828800"/>
+          </a:xfrm>
+          <a:prstGeom prst="rect">
+            <a:avLst/>
+          </a:prstGeom>
+        </p:spPr>
+      </p:pic>
+      <p:sp>
+        <p:nvSpPr>
+          <p:cNvPr id="11" name="Rounded Rectangle 10"/>
+          <p:cNvSpPr/>
+          <p:nvPr/>
+        </p:nvSpPr>
+        <p:spPr>
+          <a:xfrm>
+            <a:off x="4251960" y="1600200"/>
+            <a:ext cx="3657600" cy="2395728"/>
+          </a:xfrm>
+          <a:prstGeom prst="roundRect">
+            <a:avLst/>
+          </a:prstGeom>
+          <a:solidFill>
+            <a:srgbClr val="161B22"/>
+          </a:solidFill>
+          <a:ln w="9525">
+            <a:solidFill>
+              <a:srgbClr val="232A34"/>
+            </a:solidFill>
+          </a:ln>
+          <a:effectLst/>
+        </p:spPr>
+        <p:style>
+          <a:lnRef idx="1">
+            <a:schemeClr val="accent1"/>
+          </a:lnRef>
+          <a:fillRef idx="3">
+            <a:schemeClr val="accent1"/>
+          </a:fillRef>
+          <a:effectRef idx="2">
+            <a:schemeClr val="accent1"/>
+          </a:effectRef>
+          <a:fontRef idx="minor">
+            <a:schemeClr val="lt1"/>
+          </a:fontRef>
+        </p:style>
+        <p:txBody>
+          <a:bodyPr rtlCol="0" anchor="ctr"/>
+          <a:lstStyle/>
+          <a:p>
+            <a:pPr algn="ctr"/>
+          </a:p>
+        </p:txBody>
+      </p:sp>
+      <p:sp>
+        <p:nvSpPr>
+          <p:cNvPr id="12" name="TextBox 11"/>
+          <p:cNvSpPr txBox="1"/>
+          <p:nvPr/>
+        </p:nvSpPr>
+        <p:spPr>
+          <a:xfrm>
+            <a:off x="4361688" y="1655064"/>
+            <a:ext cx="3438144" cy="365760"/>
+          </a:xfrm>
+          <a:prstGeom prst="rect">
+            <a:avLst/>
+          </a:prstGeom>
+          <a:noFill/>
+        </p:spPr>
+        <p:txBody>
+          <a:bodyPr wrap="square">
+            <a:spAutoFit/>
+          </a:bodyPr>
+          <a:lstStyle/>
+          <a:p>
+            <a:pPr algn="l"/>
+            <a:r>
+              <a:rPr sz="1250" b="1">
+                <a:solidFill>
+                  <a:srgbClr val="5EE6C5"/>
+                </a:solidFill>
+                <a:latin typeface="맑은 고딕"/>
+              </a:rPr>
+              <a:t>2. 성공·실패 상태 구분</a:t>
+            </a:r>
+          </a:p>
+        </p:txBody>
+      </p:sp>
+      <p:pic>
+        <p:nvPicPr>
+          <p:cNvPr id="13" name="Picture 12" descr="02_correct_after.png"/>
+          <p:cNvPicPr>
+            <a:picLocks noChangeAspect="1"/>
+          </p:cNvPicPr>
+          <p:nvPr/>
+        </p:nvPicPr>
+        <p:blipFill>
+          <a:blip r:embed="rId4"/>
+          <a:stretch>
+            <a:fillRect/>
+          </a:stretch>
+        </p:blipFill>
+        <p:spPr>
+          <a:xfrm>
+            <a:off x="5180835" y="2057400"/>
+            <a:ext cx="845061" cy="1828800"/>
+          </a:xfrm>
+          <a:prstGeom prst="rect">
+            <a:avLst/>
+          </a:prstGeom>
+        </p:spPr>
+      </p:pic>
+      <p:pic>
+        <p:nvPicPr>
+          <p:cNvPr id="14" name="Picture 13" descr="03_wrong_after.png"/>
+          <p:cNvPicPr>
+            <a:picLocks noChangeAspect="1"/>
+          </p:cNvPicPr>
+          <p:nvPr/>
+        </p:nvPicPr>
+        <p:blipFill>
+          <a:blip r:embed="rId5"/>
+          <a:stretch>
+            <a:fillRect/>
+          </a:stretch>
+        </p:blipFill>
+        <p:spPr>
+          <a:xfrm>
+            <a:off x="6135624" y="2057400"/>
+            <a:ext cx="845061" cy="1828800"/>
+          </a:xfrm>
+          <a:prstGeom prst="rect">
+            <a:avLst/>
+          </a:prstGeom>
+        </p:spPr>
+      </p:pic>
+      <p:sp>
+        <p:nvSpPr>
+          <p:cNvPr id="15" name="Rounded Rectangle 14"/>
+          <p:cNvSpPr/>
+          <p:nvPr/>
+        </p:nvSpPr>
+        <p:spPr>
+          <a:xfrm>
+            <a:off x="8046720" y="1600200"/>
+            <a:ext cx="3657600" cy="2395728"/>
+          </a:xfrm>
+          <a:prstGeom prst="roundRect">
+            <a:avLst/>
+          </a:prstGeom>
+          <a:solidFill>
+            <a:srgbClr val="161B22"/>
+          </a:solidFill>
+          <a:ln w="9525">
+            <a:solidFill>
+              <a:srgbClr val="232A34"/>
+            </a:solidFill>
+          </a:ln>
+          <a:effectLst/>
+        </p:spPr>
+        <p:style>
+          <a:lnRef idx="1">
+            <a:schemeClr val="accent1"/>
+          </a:lnRef>
+          <a:fillRef idx="3">
+            <a:schemeClr val="accent1"/>
+          </a:fillRef>
+          <a:effectRef idx="2">
+            <a:schemeClr val="accent1"/>
+          </a:effectRef>
+          <a:fontRef idx="minor">
+            <a:schemeClr val="lt1"/>
+          </a:fontRef>
+        </p:style>
+        <p:txBody>
+          <a:bodyPr rtlCol="0" anchor="ctr"/>
+          <a:lstStyle/>
+          <a:p>
+            <a:pPr algn="ctr"/>
+          </a:p>
+        </p:txBody>
+      </p:sp>
+      <p:sp>
+        <p:nvSpPr>
+          <p:cNvPr id="16" name="TextBox 15"/>
+          <p:cNvSpPr txBox="1"/>
+          <p:nvPr/>
+        </p:nvSpPr>
+        <p:spPr>
+          <a:xfrm>
+            <a:off x="8156448" y="1655064"/>
+            <a:ext cx="3438144" cy="365760"/>
+          </a:xfrm>
+          <a:prstGeom prst="rect">
+            <a:avLst/>
+          </a:prstGeom>
+          <a:noFill/>
+        </p:spPr>
+        <p:txBody>
+          <a:bodyPr wrap="square">
+            <a:spAutoFit/>
+          </a:bodyPr>
+          <a:lstStyle/>
+          <a:p>
+            <a:pPr algn="l"/>
+            <a:r>
+              <a:rPr sz="1250" b="1">
+                <a:solidFill>
+                  <a:srgbClr val="5EE6C5"/>
+                </a:solidFill>
+                <a:latin typeface="맑은 고딕"/>
+              </a:rPr>
+              <a:t>3. 2해상도 잘림·넘침 없음</a:t>
+            </a:r>
+          </a:p>
+        </p:txBody>
+      </p:sp>
+      <p:pic>
+        <p:nvPicPr>
+          <p:cNvPr id="17" name="Picture 16" descr="resolution_1366x768.png"/>
+          <p:cNvPicPr>
+            <a:picLocks noChangeAspect="1"/>
+          </p:cNvPicPr>
+          <p:nvPr/>
+        </p:nvPicPr>
+        <p:blipFill>
+          <a:blip r:embed="rId6"/>
+          <a:stretch>
+            <a:fillRect/>
+          </a:stretch>
+        </p:blipFill>
+        <p:spPr>
+          <a:xfrm>
+            <a:off x="8156449" y="2057400"/>
+            <a:ext cx="1664613" cy="935888"/>
+          </a:xfrm>
+          <a:prstGeom prst="rect">
+            <a:avLst/>
+          </a:prstGeom>
+        </p:spPr>
+      </p:pic>
+      <p:pic>
+        <p:nvPicPr>
+          <p:cNvPr id="18" name="Picture 17" descr="resolution_1920x1080.png"/>
+          <p:cNvPicPr>
+            <a:picLocks noChangeAspect="1"/>
+          </p:cNvPicPr>
+          <p:nvPr/>
+        </p:nvPicPr>
+        <p:blipFill>
+          <a:blip r:embed="rId7"/>
+          <a:stretch>
+            <a:fillRect/>
+          </a:stretch>
+        </p:blipFill>
+        <p:spPr>
+          <a:xfrm>
+            <a:off x="9930790" y="2057400"/>
+            <a:ext cx="1663800" cy="935888"/>
+          </a:xfrm>
+          <a:prstGeom prst="rect">
+            <a:avLst/>
+          </a:prstGeom>
+        </p:spPr>
+      </p:pic>
+      <p:sp>
+        <p:nvSpPr>
+          <p:cNvPr id="19" name="Rounded Rectangle 18"/>
+          <p:cNvSpPr/>
+          <p:nvPr/>
+        </p:nvSpPr>
+        <p:spPr>
+          <a:xfrm>
+            <a:off x="457200" y="4133088"/>
+            <a:ext cx="3657600" cy="2395728"/>
+          </a:xfrm>
+          <a:prstGeom prst="roundRect">
+            <a:avLst/>
+          </a:prstGeom>
+          <a:solidFill>
+            <a:srgbClr val="161B22"/>
+          </a:solidFill>
+          <a:ln w="9525">
+            <a:solidFill>
+              <a:srgbClr val="232A34"/>
+            </a:solidFill>
+          </a:ln>
+          <a:effectLst/>
+        </p:spPr>
+        <p:style>
+          <a:lnRef idx="1">
+            <a:schemeClr val="accent1"/>
+          </a:lnRef>
+          <a:fillRef idx="3">
+            <a:schemeClr val="accent1"/>
+          </a:fillRef>
+          <a:effectRef idx="2">
+            <a:schemeClr val="accent1"/>
+          </a:effectRef>
+          <a:fontRef idx="minor">
+            <a:schemeClr val="lt1"/>
+          </a:fontRef>
+        </p:style>
+        <p:txBody>
+          <a:bodyPr rtlCol="0" anchor="ctr"/>
+          <a:lstStyle/>
+          <a:p>
+            <a:pPr algn="ctr"/>
+          </a:p>
+        </p:txBody>
+      </p:sp>
+      <p:sp>
+        <p:nvSpPr>
+          <p:cNvPr id="20" name="TextBox 19"/>
+          <p:cNvSpPr txBox="1"/>
+          <p:nvPr/>
+        </p:nvSpPr>
+        <p:spPr>
+          <a:xfrm>
+            <a:off x="566928" y="4187952"/>
+            <a:ext cx="3438144" cy="365760"/>
+          </a:xfrm>
+          <a:prstGeom prst="rect">
+            <a:avLst/>
+          </a:prstGeom>
+          <a:noFill/>
+        </p:spPr>
+        <p:txBody>
+          <a:bodyPr wrap="square">
+            <a:spAutoFit/>
+          </a:bodyPr>
+          <a:lstStyle/>
+          <a:p>
+            <a:pPr algn="l"/>
+            <a:r>
+              <a:rPr sz="1250" b="1">
+                <a:solidFill>
+                  <a:srgbClr val="5EE6C5"/>
+                </a:solidFill>
+                <a:latin typeface="맑은 고딕"/>
+              </a:rPr>
+              <a:t>4. 연속입력·포커스·10분</a:t>
+            </a:r>
+          </a:p>
+        </p:txBody>
+      </p:sp>
+      <p:pic>
+        <p:nvPicPr>
+          <p:cNvPr id="21" name="Picture 20" descr="04_pause_after.png"/>
+          <p:cNvPicPr>
+            <a:picLocks noChangeAspect="1"/>
+          </p:cNvPicPr>
+          <p:nvPr/>
+        </p:nvPicPr>
+        <p:blipFill>
+          <a:blip r:embed="rId8"/>
+          <a:stretch>
+            <a:fillRect/>
+          </a:stretch>
+        </p:blipFill>
+        <p:spPr>
+          <a:xfrm>
+            <a:off x="1386075" y="4590288"/>
+            <a:ext cx="845061" cy="1828800"/>
+          </a:xfrm>
+          <a:prstGeom prst="rect">
+            <a:avLst/>
+          </a:prstGeom>
+        </p:spPr>
+      </p:pic>
+      <p:pic>
+        <p:nvPicPr>
+          <p:cNvPr id="22" name="Picture 21" descr="t600_10min.png"/>
+          <p:cNvPicPr>
+            <a:picLocks noChangeAspect="1"/>
+          </p:cNvPicPr>
+          <p:nvPr/>
+        </p:nvPicPr>
+        <p:blipFill>
+          <a:blip r:embed="rId9"/>
+          <a:stretch>
+            <a:fillRect/>
+          </a:stretch>
+        </p:blipFill>
+        <p:spPr>
+          <a:xfrm>
+            <a:off x="2340864" y="4590288"/>
+            <a:ext cx="845061" cy="1828800"/>
+          </a:xfrm>
+          <a:prstGeom prst="rect">
+            <a:avLst/>
+          </a:prstGeom>
+        </p:spPr>
+      </p:pic>
+      <p:sp>
+        <p:nvSpPr>
+          <p:cNvPr id="23" name="Rounded Rectangle 22"/>
+          <p:cNvSpPr/>
+          <p:nvPr/>
+        </p:nvSpPr>
+        <p:spPr>
+          <a:xfrm>
+            <a:off x="4251960" y="4133088"/>
+            <a:ext cx="3657600" cy="2395728"/>
+          </a:xfrm>
+          <a:prstGeom prst="roundRect">
+            <a:avLst/>
+          </a:prstGeom>
+          <a:solidFill>
+            <a:srgbClr val="161B22"/>
+          </a:solidFill>
+          <a:ln w="9525">
+            <a:solidFill>
+              <a:srgbClr val="232A34"/>
+            </a:solidFill>
+          </a:ln>
+          <a:effectLst/>
+        </p:spPr>
+        <p:style>
+          <a:lnRef idx="1">
+            <a:schemeClr val="accent1"/>
+          </a:lnRef>
+          <a:fillRef idx="3">
+            <a:schemeClr val="accent1"/>
+          </a:fillRef>
+          <a:effectRef idx="2">
+            <a:schemeClr val="accent1"/>
+          </a:effectRef>
+          <a:fontRef idx="minor">
+            <a:schemeClr val="lt1"/>
+          </a:fontRef>
+        </p:style>
+        <p:txBody>
+          <a:bodyPr rtlCol="0" anchor="ctr"/>
+          <a:lstStyle/>
+          <a:p>
+            <a:pPr algn="ctr"/>
+          </a:p>
+        </p:txBody>
+      </p:sp>
+      <p:sp>
+        <p:nvSpPr>
+          <p:cNvPr id="24" name="TextBox 23"/>
+          <p:cNvSpPr txBox="1"/>
+          <p:nvPr/>
+        </p:nvSpPr>
+        <p:spPr>
+          <a:xfrm>
+            <a:off x="4361688" y="4187952"/>
+            <a:ext cx="3438144" cy="365760"/>
+          </a:xfrm>
+          <a:prstGeom prst="rect">
+            <a:avLst/>
+          </a:prstGeom>
+          <a:noFill/>
+        </p:spPr>
+        <p:txBody>
+          <a:bodyPr wrap="square">
+            <a:spAutoFit/>
+          </a:bodyPr>
+          <a:lstStyle/>
+          <a:p>
+            <a:pPr algn="l"/>
+            <a:r>
+              <a:rPr sz="1250" b="1">
+                <a:solidFill>
+                  <a:srgbClr val="5EE6C5"/>
+                </a:solidFill>
+                <a:latin typeface="맑은 고딕"/>
+              </a:rPr>
+              <a:t>5. 콘솔 빨간 오류 0건</a:t>
+            </a:r>
+          </a:p>
+        </p:txBody>
+      </p:sp>
+      <p:sp>
+        <p:nvSpPr>
+          <p:cNvPr id="25" name="TextBox 24"/>
+          <p:cNvSpPr txBox="1"/>
+          <p:nvPr/>
+        </p:nvSpPr>
+        <p:spPr>
+          <a:xfrm>
+            <a:off x="4361688" y="4636008"/>
+            <a:ext cx="3438144" cy="274320"/>
+          </a:xfrm>
+          <a:prstGeom prst="rect">
+            <a:avLst/>
+          </a:prstGeom>
+          <a:noFill/>
+        </p:spPr>
+        <p:txBody>
+          <a:bodyPr wrap="square">
+            <a:spAutoFit/>
+          </a:bodyPr>
+          <a:lstStyle/>
+          <a:p>
+            <a:pPr algn="ctr">
+              <a:spcAft>
+                <a:spcPts val="0"/>
+              </a:spcAft>
+            </a:pPr>
+            <a:r>
+              <a:rPr sz="1000" b="0">
+                <a:solidFill>
+                  <a:srgbClr val="8A94A6"/>
+                </a:solidFill>
+                <a:latin typeface="맑은 고딕"/>
+              </a:rPr>
+              <a:t>DevTools Console — 전 슬라이드 검증마다 0건 확인</a:t>
+            </a:r>
+          </a:p>
+        </p:txBody>
+      </p:sp>
+      <p:sp>
+        <p:nvSpPr>
+          <p:cNvPr id="26" name="Rounded Rectangle 25"/>
+          <p:cNvSpPr/>
+          <p:nvPr/>
+        </p:nvSpPr>
+        <p:spPr>
+          <a:xfrm>
+            <a:off x="8046720" y="4133088"/>
+            <a:ext cx="3657600" cy="2395728"/>
+          </a:xfrm>
+          <a:prstGeom prst="roundRect">
+            <a:avLst/>
+          </a:prstGeom>
+          <a:solidFill>
+            <a:srgbClr val="161B22"/>
+          </a:solidFill>
+          <a:ln w="9525">
+            <a:solidFill>
+              <a:srgbClr val="232A34"/>
+            </a:solidFill>
+          </a:ln>
+          <a:effectLst/>
+        </p:spPr>
+        <p:style>
+          <a:lnRef idx="1">
+            <a:schemeClr val="accent1"/>
+          </a:lnRef>
+          <a:fillRef idx="3">
+            <a:schemeClr val="accent1"/>
+          </a:fillRef>
+          <a:effectRef idx="2">
+            <a:schemeClr val="accent1"/>
+          </a:effectRef>
+          <a:fontRef idx="minor">
+            <a:schemeClr val="lt1"/>
+          </a:fontRef>
+        </p:style>
+        <p:txBody>
+          <a:bodyPr rtlCol="0" anchor="ctr"/>
+          <a:lstStyle/>
+          <a:p>
+            <a:pPr algn="ctr"/>
+          </a:p>
+        </p:txBody>
+      </p:sp>
+      <p:sp>
+        <p:nvSpPr>
+          <p:cNvPr id="27" name="TextBox 26"/>
+          <p:cNvSpPr txBox="1"/>
+          <p:nvPr/>
+        </p:nvSpPr>
+        <p:spPr>
+          <a:xfrm>
+            <a:off x="8156448" y="4187952"/>
+            <a:ext cx="3438144" cy="365760"/>
+          </a:xfrm>
+          <a:prstGeom prst="rect">
+            <a:avLst/>
+          </a:prstGeom>
+          <a:noFill/>
+        </p:spPr>
+        <p:txBody>
+          <a:bodyPr wrap="square">
+            <a:spAutoFit/>
+          </a:bodyPr>
+          <a:lstStyle/>
+          <a:p>
+            <a:pPr algn="l"/>
+            <a:r>
+              <a:rPr sz="1250" b="1">
+                <a:solidFill>
+                  <a:srgbClr val="5EE6C5"/>
+                </a:solidFill>
+                <a:latin typeface="맑은 고딕"/>
+              </a:rPr>
+              <a:t>6. 난이도 전/후 10+10</a:t>
+            </a:r>
+          </a:p>
+        </p:txBody>
+      </p:sp>
+      <p:pic>
+        <p:nvPicPr>
+          <p:cNvPr id="28" name="Picture 27" descr="result_T4_4.png"/>
+          <p:cNvPicPr>
+            <a:picLocks noChangeAspect="1"/>
+          </p:cNvPicPr>
+          <p:nvPr/>
+        </p:nvPicPr>
+        <p:blipFill>
+          <a:blip r:embed="rId10"/>
+          <a:stretch>
+            <a:fillRect/>
+          </a:stretch>
+        </p:blipFill>
+        <p:spPr>
+          <a:xfrm>
+            <a:off x="8975595" y="4590288"/>
+            <a:ext cx="845061" cy="1828800"/>
+          </a:xfrm>
+          <a:prstGeom prst="rect">
+            <a:avLst/>
+          </a:prstGeom>
+        </p:spPr>
+      </p:pic>
+      <p:pic>
+        <p:nvPicPr>
+          <p:cNvPr id="29" name="Picture 28" descr="result_T5_4.png"/>
+          <p:cNvPicPr>
+            <a:picLocks noChangeAspect="1"/>
+          </p:cNvPicPr>
+          <p:nvPr/>
+        </p:nvPicPr>
+        <p:blipFill>
+          <a:blip r:embed="rId11"/>
+          <a:stretch>
+            <a:fillRect/>
+          </a:stretch>
+        </p:blipFill>
+        <p:spPr>
+          <a:xfrm>
+            <a:off x="9930384" y="4590288"/>
+            <a:ext cx="845061" cy="1828800"/>
+          </a:xfrm>
+          <a:prstGeom prst="rect">
+            <a:avLst/>
+          </a:prstGeom>
+        </p:spPr>
+      </p:pic>
     </p:spTree>
   </p:cSld>
   <p:clrMapOvr>
@@ -9675,8 +9285,8 @@
         </p:nvSpPr>
         <p:spPr>
           <a:xfrm>
-            <a:off x="1371600" y="2468880"/>
-            <a:ext cx="9418320" cy="914400"/>
+            <a:off x="640080" y="320040"/>
+            <a:ext cx="10881360" cy="365760"/>
           </a:xfrm>
           <a:prstGeom prst="rect">
             <a:avLst/>
@@ -9689,19 +9299,19 @@
           </a:bodyPr>
           <a:lstStyle/>
           <a:p>
-            <a:pPr algn="ctr">
+            <a:pPr algn="l">
               <a:spcAft>
                 <a:spcPts val="600"/>
               </a:spcAft>
             </a:pPr>
             <a:r>
-              <a:rPr sz="4400" b="1">
-                <a:solidFill>
-                  <a:srgbClr val="E8EDF4"/>
-                </a:solidFill>
-                <a:latin typeface="맑은 고딕"/>
-              </a:rPr>
-              <a:t>감사합니다</a:t>
+              <a:rPr sz="1400" b="1">
+                <a:solidFill>
+                  <a:srgbClr val="5EE6C5"/>
+                </a:solidFill>
+                <a:latin typeface="맑은 고딕"/>
+              </a:rPr>
+              <a:t>필수 체크리스트 · 증거 2/2</a:t>
             </a:r>
           </a:p>
         </p:txBody>
@@ -9714,8 +9324,8 @@
         </p:nvSpPr>
         <p:spPr>
           <a:xfrm>
-            <a:off x="1371600" y="3566160"/>
-            <a:ext cx="9418320" cy="548640"/>
+            <a:off x="640080" y="658368"/>
+            <a:ext cx="10881360" cy="822960"/>
           </a:xfrm>
           <a:prstGeom prst="rect">
             <a:avLst/>
@@ -9728,33 +9338,123 @@
           </a:bodyPr>
           <a:lstStyle/>
           <a:p>
-            <a:pPr algn="ctr">
+            <a:pPr algn="l">
               <a:spcAft>
                 <a:spcPts val="600"/>
               </a:spcAft>
             </a:pPr>
             <a:r>
-              <a:rPr sz="1700" b="0">
-                <a:solidFill>
-                  <a:srgbClr val="5EE6C5"/>
-                </a:solidFill>
-                <a:latin typeface="맑은 고딕"/>
-              </a:rPr>
-              <a:t>▶ 플레이: https://stulss.github.io/odd-one-out/</a:t>
-            </a:r>
-          </a:p>
-        </p:txBody>
-      </p:sp>
-      <p:sp>
-        <p:nvSpPr>
-          <p:cNvPr id="6" name="TextBox 5"/>
+              <a:rPr sz="3200" b="1">
+                <a:solidFill>
+                  <a:srgbClr val="E8EDF4"/>
+                </a:solidFill>
+                <a:latin typeface="맑은 고딕"/>
+              </a:rPr>
+              <a:t>학생 자체 점검 — 스크린샷 증거 (7~11)</a:t>
+            </a:r>
+          </a:p>
+        </p:txBody>
+      </p:sp>
+      <p:sp>
+        <p:nvSpPr>
+          <p:cNvPr id="6" name="Rectangle 5"/>
+          <p:cNvSpPr/>
+          <p:nvPr/>
+        </p:nvSpPr>
+        <p:spPr>
+          <a:xfrm>
+            <a:off x="640080" y="1417320"/>
+            <a:ext cx="10881360" cy="25400"/>
+          </a:xfrm>
+          <a:prstGeom prst="rect">
+            <a:avLst/>
+          </a:prstGeom>
+          <a:solidFill>
+            <a:srgbClr val="232A34"/>
+          </a:solidFill>
+          <a:ln>
+            <a:noFill/>
+          </a:ln>
+          <a:effectLst/>
+        </p:spPr>
+        <p:style>
+          <a:lnRef idx="1">
+            <a:schemeClr val="accent1"/>
+          </a:lnRef>
+          <a:fillRef idx="3">
+            <a:schemeClr val="accent1"/>
+          </a:fillRef>
+          <a:effectRef idx="2">
+            <a:schemeClr val="accent1"/>
+          </a:effectRef>
+          <a:fontRef idx="minor">
+            <a:schemeClr val="lt1"/>
+          </a:fontRef>
+        </p:style>
+        <p:txBody>
+          <a:bodyPr rtlCol="0" anchor="ctr"/>
+          <a:lstStyle/>
+          <a:p>
+            <a:pPr algn="ctr"/>
+          </a:p>
+        </p:txBody>
+      </p:sp>
+      <p:sp>
+        <p:nvSpPr>
+          <p:cNvPr id="7" name="Rounded Rectangle 6"/>
+          <p:cNvSpPr/>
+          <p:nvPr/>
+        </p:nvSpPr>
+        <p:spPr>
+          <a:xfrm>
+            <a:off x="457200" y="1600200"/>
+            <a:ext cx="3657600" cy="2395728"/>
+          </a:xfrm>
+          <a:prstGeom prst="roundRect">
+            <a:avLst/>
+          </a:prstGeom>
+          <a:solidFill>
+            <a:srgbClr val="161B22"/>
+          </a:solidFill>
+          <a:ln w="9525">
+            <a:solidFill>
+              <a:srgbClr val="232A34"/>
+            </a:solidFill>
+          </a:ln>
+          <a:effectLst/>
+        </p:spPr>
+        <p:style>
+          <a:lnRef idx="1">
+            <a:schemeClr val="accent1"/>
+          </a:lnRef>
+          <a:fillRef idx="3">
+            <a:schemeClr val="accent1"/>
+          </a:fillRef>
+          <a:effectRef idx="2">
+            <a:schemeClr val="accent1"/>
+          </a:effectRef>
+          <a:fontRef idx="minor">
+            <a:schemeClr val="lt1"/>
+          </a:fontRef>
+        </p:style>
+        <p:txBody>
+          <a:bodyPr rtlCol="0" anchor="ctr"/>
+          <a:lstStyle/>
+          <a:p>
+            <a:pPr algn="ctr"/>
+          </a:p>
+        </p:txBody>
+      </p:sp>
+      <p:sp>
+        <p:nvSpPr>
+          <p:cNvPr id="8" name="TextBox 7"/>
           <p:cNvSpPr txBox="1"/>
           <p:nvPr/>
         </p:nvSpPr>
         <p:spPr>
           <a:xfrm>
-            <a:off x="1371600" y="4023360"/>
-            <a:ext cx="9418320" cy="457200"/>
+            <a:off x="566928" y="1655064"/>
+            <a:ext cx="3438144" cy="365760"/>
           </a:xfrm>
           <a:prstGeom prst="rect">
             <a:avLst/>
@@ -9767,19 +9467,561 @@
           </a:bodyPr>
           <a:lstStyle/>
           <a:p>
+            <a:pPr algn="l"/>
+            <a:r>
+              <a:rPr sz="1250" b="1">
+                <a:solidFill>
+                  <a:srgbClr val="5EE6C5"/>
+                </a:solidFill>
+                <a:latin typeface="맑은 고딕"/>
+              </a:rPr>
+              <a:t>7. 손상값 → 기본값 실행</a:t>
+            </a:r>
+          </a:p>
+        </p:txBody>
+      </p:sp>
+      <p:pic>
+        <p:nvPicPr>
+          <p:cNvPr id="9" name="Picture 8" descr="storage_before_normal.png"/>
+          <p:cNvPicPr>
+            <a:picLocks noChangeAspect="1"/>
+          </p:cNvPicPr>
+          <p:nvPr/>
+        </p:nvPicPr>
+        <p:blipFill>
+          <a:blip r:embed="rId2"/>
+          <a:stretch>
+            <a:fillRect/>
+          </a:stretch>
+        </p:blipFill>
+        <p:spPr>
+          <a:xfrm>
+            <a:off x="1386075" y="2057400"/>
+            <a:ext cx="845061" cy="1828800"/>
+          </a:xfrm>
+          <a:prstGeom prst="rect">
+            <a:avLst/>
+          </a:prstGeom>
+        </p:spPr>
+      </p:pic>
+      <p:pic>
+        <p:nvPicPr>
+          <p:cNvPr id="10" name="Picture 9" descr="storage_after_corrupted_still_works.png"/>
+          <p:cNvPicPr>
+            <a:picLocks noChangeAspect="1"/>
+          </p:cNvPicPr>
+          <p:nvPr/>
+        </p:nvPicPr>
+        <p:blipFill>
+          <a:blip r:embed="rId3"/>
+          <a:stretch>
+            <a:fillRect/>
+          </a:stretch>
+        </p:blipFill>
+        <p:spPr>
+          <a:xfrm>
+            <a:off x="2340864" y="2057400"/>
+            <a:ext cx="845061" cy="1828800"/>
+          </a:xfrm>
+          <a:prstGeom prst="rect">
+            <a:avLst/>
+          </a:prstGeom>
+        </p:spPr>
+      </p:pic>
+      <p:sp>
+        <p:nvSpPr>
+          <p:cNvPr id="11" name="Rounded Rectangle 10"/>
+          <p:cNvSpPr/>
+          <p:nvPr/>
+        </p:nvSpPr>
+        <p:spPr>
+          <a:xfrm>
+            <a:off x="4251960" y="1600200"/>
+            <a:ext cx="3657600" cy="2395728"/>
+          </a:xfrm>
+          <a:prstGeom prst="roundRect">
+            <a:avLst/>
+          </a:prstGeom>
+          <a:solidFill>
+            <a:srgbClr val="161B22"/>
+          </a:solidFill>
+          <a:ln w="9525">
+            <a:solidFill>
+              <a:srgbClr val="232A34"/>
+            </a:solidFill>
+          </a:ln>
+          <a:effectLst/>
+        </p:spPr>
+        <p:style>
+          <a:lnRef idx="1">
+            <a:schemeClr val="accent1"/>
+          </a:lnRef>
+          <a:fillRef idx="3">
+            <a:schemeClr val="accent1"/>
+          </a:fillRef>
+          <a:effectRef idx="2">
+            <a:schemeClr val="accent1"/>
+          </a:effectRef>
+          <a:fontRef idx="minor">
+            <a:schemeClr val="lt1"/>
+          </a:fontRef>
+        </p:style>
+        <p:txBody>
+          <a:bodyPr rtlCol="0" anchor="ctr"/>
+          <a:lstStyle/>
+          <a:p>
+            <a:pPr algn="ctr"/>
+          </a:p>
+        </p:txBody>
+      </p:sp>
+      <p:sp>
+        <p:nvSpPr>
+          <p:cNvPr id="12" name="TextBox 11"/>
+          <p:cNvSpPr txBox="1"/>
+          <p:nvPr/>
+        </p:nvSpPr>
+        <p:spPr>
+          <a:xfrm>
+            <a:off x="4361688" y="1655064"/>
+            <a:ext cx="3438144" cy="365760"/>
+          </a:xfrm>
+          <a:prstGeom prst="rect">
+            <a:avLst/>
+          </a:prstGeom>
+          <a:noFill/>
+        </p:spPr>
+        <p:txBody>
+          <a:bodyPr wrap="square">
+            <a:spAutoFit/>
+          </a:bodyPr>
+          <a:lstStyle/>
+          <a:p>
+            <a:pPr algn="l"/>
+            <a:r>
+              <a:rPr sz="1250" b="1">
+                <a:solidFill>
+                  <a:srgbClr val="5EE6C5"/>
+                </a:solidFill>
+                <a:latin typeface="맑은 고딕"/>
+              </a:rPr>
+              <a:t>8. 재시작=초기화, 기록 유지</a:t>
+            </a:r>
+          </a:p>
+        </p:txBody>
+      </p:sp>
+      <p:pic>
+        <p:nvPicPr>
+          <p:cNvPr id="13" name="Picture 12" descr="13_restart_before.png"/>
+          <p:cNvPicPr>
+            <a:picLocks noChangeAspect="1"/>
+          </p:cNvPicPr>
+          <p:nvPr/>
+        </p:nvPicPr>
+        <p:blipFill>
+          <a:blip r:embed="rId4"/>
+          <a:stretch>
+            <a:fillRect/>
+          </a:stretch>
+        </p:blipFill>
+        <p:spPr>
+          <a:xfrm>
+            <a:off x="5180835" y="2057400"/>
+            <a:ext cx="845061" cy="1828800"/>
+          </a:xfrm>
+          <a:prstGeom prst="rect">
+            <a:avLst/>
+          </a:prstGeom>
+        </p:spPr>
+      </p:pic>
+      <p:pic>
+        <p:nvPicPr>
+          <p:cNvPr id="14" name="Picture 13" descr="13_restart_after.png"/>
+          <p:cNvPicPr>
+            <a:picLocks noChangeAspect="1"/>
+          </p:cNvPicPr>
+          <p:nvPr/>
+        </p:nvPicPr>
+        <p:blipFill>
+          <a:blip r:embed="rId5"/>
+          <a:stretch>
+            <a:fillRect/>
+          </a:stretch>
+        </p:blipFill>
+        <p:spPr>
+          <a:xfrm>
+            <a:off x="6135624" y="2057400"/>
+            <a:ext cx="845061" cy="1828800"/>
+          </a:xfrm>
+          <a:prstGeom prst="rect">
+            <a:avLst/>
+          </a:prstGeom>
+        </p:spPr>
+      </p:pic>
+      <p:sp>
+        <p:nvSpPr>
+          <p:cNvPr id="15" name="Rounded Rectangle 14"/>
+          <p:cNvSpPr/>
+          <p:nvPr/>
+        </p:nvSpPr>
+        <p:spPr>
+          <a:xfrm>
+            <a:off x="8046720" y="1600200"/>
+            <a:ext cx="3657600" cy="2395728"/>
+          </a:xfrm>
+          <a:prstGeom prst="roundRect">
+            <a:avLst/>
+          </a:prstGeom>
+          <a:solidFill>
+            <a:srgbClr val="161B22"/>
+          </a:solidFill>
+          <a:ln w="9525">
+            <a:solidFill>
+              <a:srgbClr val="232A34"/>
+            </a:solidFill>
+          </a:ln>
+          <a:effectLst/>
+        </p:spPr>
+        <p:style>
+          <a:lnRef idx="1">
+            <a:schemeClr val="accent1"/>
+          </a:lnRef>
+          <a:fillRef idx="3">
+            <a:schemeClr val="accent1"/>
+          </a:fillRef>
+          <a:effectRef idx="2">
+            <a:schemeClr val="accent1"/>
+          </a:effectRef>
+          <a:fontRef idx="minor">
+            <a:schemeClr val="lt1"/>
+          </a:fontRef>
+        </p:style>
+        <p:txBody>
+          <a:bodyPr rtlCol="0" anchor="ctr"/>
+          <a:lstStyle/>
+          <a:p>
+            <a:pPr algn="ctr"/>
+          </a:p>
+        </p:txBody>
+      </p:sp>
+      <p:sp>
+        <p:nvSpPr>
+          <p:cNvPr id="16" name="TextBox 15"/>
+          <p:cNvSpPr txBox="1"/>
+          <p:nvPr/>
+        </p:nvSpPr>
+        <p:spPr>
+          <a:xfrm>
+            <a:off x="8156448" y="1655064"/>
+            <a:ext cx="3438144" cy="365760"/>
+          </a:xfrm>
+          <a:prstGeom prst="rect">
+            <a:avLst/>
+          </a:prstGeom>
+          <a:noFill/>
+        </p:spPr>
+        <p:txBody>
+          <a:bodyPr wrap="square">
+            <a:spAutoFit/>
+          </a:bodyPr>
+          <a:lstStyle/>
+          <a:p>
+            <a:pPr algn="l"/>
+            <a:r>
+              <a:rPr sz="1250" b="1">
+                <a:solidFill>
+                  <a:srgbClr val="5EE6C5"/>
+                </a:solidFill>
+                <a:latin typeface="맑은 고딕"/>
+              </a:rPr>
+              <a:t>9. 효과 줄이기·끄기 작동</a:t>
+            </a:r>
+          </a:p>
+        </p:txBody>
+      </p:sp>
+      <p:pic>
+        <p:nvPicPr>
+          <p:cNvPr id="17" name="Picture 16" descr="06_sound_after.png"/>
+          <p:cNvPicPr>
+            <a:picLocks noChangeAspect="1"/>
+          </p:cNvPicPr>
+          <p:nvPr/>
+        </p:nvPicPr>
+        <p:blipFill>
+          <a:blip r:embed="rId6"/>
+          <a:stretch>
+            <a:fillRect/>
+          </a:stretch>
+        </p:blipFill>
+        <p:spPr>
+          <a:xfrm>
+            <a:off x="8975595" y="2057400"/>
+            <a:ext cx="845061" cy="1828800"/>
+          </a:xfrm>
+          <a:prstGeom prst="rect">
+            <a:avLst/>
+          </a:prstGeom>
+        </p:spPr>
+      </p:pic>
+      <p:pic>
+        <p:nvPicPr>
+          <p:cNvPr id="18" name="Picture 17" descr="07_motion_after.png"/>
+          <p:cNvPicPr>
+            <a:picLocks noChangeAspect="1"/>
+          </p:cNvPicPr>
+          <p:nvPr/>
+        </p:nvPicPr>
+        <p:blipFill>
+          <a:blip r:embed="rId7"/>
+          <a:stretch>
+            <a:fillRect/>
+          </a:stretch>
+        </p:blipFill>
+        <p:spPr>
+          <a:xfrm>
+            <a:off x="9930384" y="2057400"/>
+            <a:ext cx="845061" cy="1828800"/>
+          </a:xfrm>
+          <a:prstGeom prst="rect">
+            <a:avLst/>
+          </a:prstGeom>
+        </p:spPr>
+      </p:pic>
+      <p:sp>
+        <p:nvSpPr>
+          <p:cNvPr id="19" name="Rounded Rectangle 18"/>
+          <p:cNvSpPr/>
+          <p:nvPr/>
+        </p:nvSpPr>
+        <p:spPr>
+          <a:xfrm>
+            <a:off x="457200" y="4133088"/>
+            <a:ext cx="3657600" cy="2395728"/>
+          </a:xfrm>
+          <a:prstGeom prst="roundRect">
+            <a:avLst/>
+          </a:prstGeom>
+          <a:solidFill>
+            <a:srgbClr val="161B22"/>
+          </a:solidFill>
+          <a:ln w="9525">
+            <a:solidFill>
+              <a:srgbClr val="232A34"/>
+            </a:solidFill>
+          </a:ln>
+          <a:effectLst/>
+        </p:spPr>
+        <p:style>
+          <a:lnRef idx="1">
+            <a:schemeClr val="accent1"/>
+          </a:lnRef>
+          <a:fillRef idx="3">
+            <a:schemeClr val="accent1"/>
+          </a:fillRef>
+          <a:effectRef idx="2">
+            <a:schemeClr val="accent1"/>
+          </a:effectRef>
+          <a:fontRef idx="minor">
+            <a:schemeClr val="lt1"/>
+          </a:fontRef>
+        </p:style>
+        <p:txBody>
+          <a:bodyPr rtlCol="0" anchor="ctr"/>
+          <a:lstStyle/>
+          <a:p>
+            <a:pPr algn="ctr"/>
+          </a:p>
+        </p:txBody>
+      </p:sp>
+      <p:sp>
+        <p:nvSpPr>
+          <p:cNvPr id="20" name="TextBox 19"/>
+          <p:cNvSpPr txBox="1"/>
+          <p:nvPr/>
+        </p:nvSpPr>
+        <p:spPr>
+          <a:xfrm>
+            <a:off x="566928" y="4187952"/>
+            <a:ext cx="3438144" cy="365760"/>
+          </a:xfrm>
+          <a:prstGeom prst="rect">
+            <a:avLst/>
+          </a:prstGeom>
+          <a:noFill/>
+        </p:spPr>
+        <p:txBody>
+          <a:bodyPr wrap="square">
+            <a:spAutoFit/>
+          </a:bodyPr>
+          <a:lstStyle/>
+          <a:p>
+            <a:pPr algn="l"/>
+            <a:r>
+              <a:rPr sz="1250" b="1">
+                <a:solidFill>
+                  <a:srgbClr val="5EE6C5"/>
+                </a:solidFill>
+                <a:latin typeface="맑은 고딕"/>
+              </a:rPr>
+              <a:t>10. 개인정보·비밀값 0건</a:t>
+            </a:r>
+          </a:p>
+        </p:txBody>
+      </p:sp>
+      <p:sp>
+        <p:nvSpPr>
+          <p:cNvPr id="21" name="TextBox 20"/>
+          <p:cNvSpPr txBox="1"/>
+          <p:nvPr/>
+        </p:nvSpPr>
+        <p:spPr>
+          <a:xfrm>
+            <a:off x="566928" y="4636008"/>
+            <a:ext cx="3438144" cy="274320"/>
+          </a:xfrm>
+          <a:prstGeom prst="rect">
+            <a:avLst/>
+          </a:prstGeom>
+          <a:noFill/>
+        </p:spPr>
+        <p:txBody>
+          <a:bodyPr wrap="square">
+            <a:spAutoFit/>
+          </a:bodyPr>
+          <a:lstStyle/>
+          <a:p>
             <a:pPr algn="ctr">
               <a:spcAft>
-                <a:spcPts val="600"/>
+                <a:spcPts val="0"/>
               </a:spcAft>
             </a:pPr>
             <a:r>
-              <a:rPr sz="1300" b="0">
+              <a:rPr sz="1000" b="0">
                 <a:solidFill>
                   <a:srgbClr val="8A94A6"/>
                 </a:solidFill>
                 <a:latin typeface="맑은 고딕"/>
               </a:rPr>
-              <a:t>소스: https://github.com/stulss/odd-one-out</a:t>
+              <a:t>저장소 전수 grep 검사 — stulss(공개 계정명) 외 유출 0건</a:t>
+            </a:r>
+          </a:p>
+        </p:txBody>
+      </p:sp>
+      <p:sp>
+        <p:nvSpPr>
+          <p:cNvPr id="22" name="Rounded Rectangle 21"/>
+          <p:cNvSpPr/>
+          <p:nvPr/>
+        </p:nvSpPr>
+        <p:spPr>
+          <a:xfrm>
+            <a:off x="4251960" y="4133088"/>
+            <a:ext cx="3657600" cy="2395728"/>
+          </a:xfrm>
+          <a:prstGeom prst="roundRect">
+            <a:avLst/>
+          </a:prstGeom>
+          <a:solidFill>
+            <a:srgbClr val="161B22"/>
+          </a:solidFill>
+          <a:ln w="9525">
+            <a:solidFill>
+              <a:srgbClr val="232A34"/>
+            </a:solidFill>
+          </a:ln>
+          <a:effectLst/>
+        </p:spPr>
+        <p:style>
+          <a:lnRef idx="1">
+            <a:schemeClr val="accent1"/>
+          </a:lnRef>
+          <a:fillRef idx="3">
+            <a:schemeClr val="accent1"/>
+          </a:fillRef>
+          <a:effectRef idx="2">
+            <a:schemeClr val="accent1"/>
+          </a:effectRef>
+          <a:fontRef idx="minor">
+            <a:schemeClr val="lt1"/>
+          </a:fontRef>
+        </p:style>
+        <p:txBody>
+          <a:bodyPr rtlCol="0" anchor="ctr"/>
+          <a:lstStyle/>
+          <a:p>
+            <a:pPr algn="ctr"/>
+          </a:p>
+        </p:txBody>
+      </p:sp>
+      <p:sp>
+        <p:nvSpPr>
+          <p:cNvPr id="23" name="TextBox 22"/>
+          <p:cNvSpPr txBox="1"/>
+          <p:nvPr/>
+        </p:nvSpPr>
+        <p:spPr>
+          <a:xfrm>
+            <a:off x="4361688" y="4187952"/>
+            <a:ext cx="3438144" cy="365760"/>
+          </a:xfrm>
+          <a:prstGeom prst="rect">
+            <a:avLst/>
+          </a:prstGeom>
+          <a:noFill/>
+        </p:spPr>
+        <p:txBody>
+          <a:bodyPr wrap="square">
+            <a:spAutoFit/>
+          </a:bodyPr>
+          <a:lstStyle/>
+          <a:p>
+            <a:pPr algn="l"/>
+            <a:r>
+              <a:rPr sz="1250" b="1">
+                <a:solidFill>
+                  <a:srgbClr val="5EE6C5"/>
+                </a:solidFill>
+                <a:latin typeface="맑은 고딕"/>
+              </a:rPr>
+              <a:t>11. 위 1~10 모두 완료</a:t>
+            </a:r>
+          </a:p>
+        </p:txBody>
+      </p:sp>
+      <p:sp>
+        <p:nvSpPr>
+          <p:cNvPr id="24" name="TextBox 23"/>
+          <p:cNvSpPr txBox="1"/>
+          <p:nvPr/>
+        </p:nvSpPr>
+        <p:spPr>
+          <a:xfrm>
+            <a:off x="4361688" y="4636008"/>
+            <a:ext cx="3438144" cy="274320"/>
+          </a:xfrm>
+          <a:prstGeom prst="rect">
+            <a:avLst/>
+          </a:prstGeom>
+          <a:noFill/>
+        </p:spPr>
+        <p:txBody>
+          <a:bodyPr wrap="square">
+            <a:spAutoFit/>
+          </a:bodyPr>
+          <a:lstStyle/>
+          <a:p>
+            <a:pPr algn="ctr">
+              <a:spcAft>
+                <a:spcPts val="0"/>
+              </a:spcAft>
+            </a:pPr>
+            <a:r>
+              <a:rPr sz="1000" b="0">
+                <a:solidFill>
+                  <a:srgbClr val="8A94A6"/>
+                </a:solidFill>
+                <a:latin typeface="맑은 고딕"/>
+              </a:rPr>
+              <a:t>카드 1~5 통과기준 5/5 · 학생 자체 점검 11/11</a:t>
             </a:r>
           </a:p>
         </p:txBody>
@@ -10385,6 +10627,224 @@
                 <a:latin typeface="맑은 고딕"/>
               </a:rPr>
               <a:t>과제 완료기준 4항목 — 전부 충족</a:t>
+            </a:r>
+          </a:p>
+        </p:txBody>
+      </p:sp>
+    </p:spTree>
+  </p:cSld>
+  <p:clrMapOvr>
+    <a:masterClrMapping/>
+  </p:clrMapOvr>
+</p:sld>
+</file>
+
+<file path=ppt/slides/slide20.xml><?xml version="1.0" encoding="utf-8"?>
+<p:sld xmlns:a="http://schemas.openxmlformats.org/drawingml/2006/main" xmlns:p="http://schemas.openxmlformats.org/presentationml/2006/main" xmlns:r="http://schemas.openxmlformats.org/officeDocument/2006/relationships">
+  <p:cSld>
+    <p:spTree>
+      <p:nvGrpSpPr>
+        <p:cNvPr id="1" name=""/>
+        <p:cNvGrpSpPr/>
+        <p:nvPr/>
+      </p:nvGrpSpPr>
+      <p:grpSpPr/>
+      <p:sp>
+        <p:nvSpPr>
+          <p:cNvPr id="2" name="Rectangle 1"/>
+          <p:cNvSpPr/>
+          <p:nvPr/>
+        </p:nvSpPr>
+        <p:spPr>
+          <a:xfrm>
+            <a:off x="0" y="0"/>
+            <a:ext cx="12191695" cy="6858000"/>
+          </a:xfrm>
+          <a:prstGeom prst="rect">
+            <a:avLst/>
+          </a:prstGeom>
+          <a:solidFill>
+            <a:srgbClr val="0E1116"/>
+          </a:solidFill>
+          <a:ln>
+            <a:noFill/>
+          </a:ln>
+          <a:effectLst/>
+        </p:spPr>
+        <p:style>
+          <a:lnRef idx="1">
+            <a:schemeClr val="accent1"/>
+          </a:lnRef>
+          <a:fillRef idx="3">
+            <a:schemeClr val="accent1"/>
+          </a:fillRef>
+          <a:effectRef idx="2">
+            <a:schemeClr val="accent1"/>
+          </a:effectRef>
+          <a:fontRef idx="minor">
+            <a:schemeClr val="lt1"/>
+          </a:fontRef>
+        </p:style>
+        <p:txBody>
+          <a:bodyPr rtlCol="0" anchor="ctr"/>
+          <a:lstStyle/>
+          <a:p>
+            <a:pPr algn="ctr"/>
+          </a:p>
+        </p:txBody>
+      </p:sp>
+      <p:sp>
+        <p:nvSpPr>
+          <p:cNvPr id="3" name="TextBox 2"/>
+          <p:cNvSpPr txBox="1"/>
+          <p:nvPr/>
+        </p:nvSpPr>
+        <p:spPr>
+          <a:xfrm>
+            <a:off x="11430000" y="6492240"/>
+            <a:ext cx="640080" cy="274320"/>
+          </a:xfrm>
+          <a:prstGeom prst="rect">
+            <a:avLst/>
+          </a:prstGeom>
+          <a:noFill/>
+        </p:spPr>
+        <p:txBody>
+          <a:bodyPr wrap="square">
+            <a:spAutoFit/>
+          </a:bodyPr>
+          <a:lstStyle/>
+          <a:p>
+            <a:pPr algn="r">
+              <a:spcAft>
+                <a:spcPts val="600"/>
+              </a:spcAft>
+            </a:pPr>
+            <a:r>
+              <a:rPr sz="1100" b="0">
+                <a:solidFill>
+                  <a:srgbClr val="8A94A6"/>
+                </a:solidFill>
+                <a:latin typeface="맑은 고딕"/>
+              </a:rPr>
+              <a:t>20</a:t>
+            </a:r>
+          </a:p>
+        </p:txBody>
+      </p:sp>
+      <p:sp>
+        <p:nvSpPr>
+          <p:cNvPr id="4" name="TextBox 3"/>
+          <p:cNvSpPr txBox="1"/>
+          <p:nvPr/>
+        </p:nvSpPr>
+        <p:spPr>
+          <a:xfrm>
+            <a:off x="1371600" y="2468880"/>
+            <a:ext cx="9418320" cy="914400"/>
+          </a:xfrm>
+          <a:prstGeom prst="rect">
+            <a:avLst/>
+          </a:prstGeom>
+          <a:noFill/>
+        </p:spPr>
+        <p:txBody>
+          <a:bodyPr wrap="square">
+            <a:spAutoFit/>
+          </a:bodyPr>
+          <a:lstStyle/>
+          <a:p>
+            <a:pPr algn="ctr">
+              <a:spcAft>
+                <a:spcPts val="600"/>
+              </a:spcAft>
+            </a:pPr>
+            <a:r>
+              <a:rPr sz="4400" b="1">
+                <a:solidFill>
+                  <a:srgbClr val="E8EDF4"/>
+                </a:solidFill>
+                <a:latin typeface="맑은 고딕"/>
+              </a:rPr>
+              <a:t>감사합니다</a:t>
+            </a:r>
+          </a:p>
+        </p:txBody>
+      </p:sp>
+      <p:sp>
+        <p:nvSpPr>
+          <p:cNvPr id="5" name="TextBox 4"/>
+          <p:cNvSpPr txBox="1"/>
+          <p:nvPr/>
+        </p:nvSpPr>
+        <p:spPr>
+          <a:xfrm>
+            <a:off x="1371600" y="3566160"/>
+            <a:ext cx="9418320" cy="548640"/>
+          </a:xfrm>
+          <a:prstGeom prst="rect">
+            <a:avLst/>
+          </a:prstGeom>
+          <a:noFill/>
+        </p:spPr>
+        <p:txBody>
+          <a:bodyPr wrap="square">
+            <a:spAutoFit/>
+          </a:bodyPr>
+          <a:lstStyle/>
+          <a:p>
+            <a:pPr algn="ctr">
+              <a:spcAft>
+                <a:spcPts val="600"/>
+              </a:spcAft>
+            </a:pPr>
+            <a:r>
+              <a:rPr sz="1700" b="0">
+                <a:solidFill>
+                  <a:srgbClr val="5EE6C5"/>
+                </a:solidFill>
+                <a:latin typeface="맑은 고딕"/>
+              </a:rPr>
+              <a:t>▶ 플레이: https://stulss.github.io/odd-one-out/</a:t>
+            </a:r>
+          </a:p>
+        </p:txBody>
+      </p:sp>
+      <p:sp>
+        <p:nvSpPr>
+          <p:cNvPr id="6" name="TextBox 5"/>
+          <p:cNvSpPr txBox="1"/>
+          <p:nvPr/>
+        </p:nvSpPr>
+        <p:spPr>
+          <a:xfrm>
+            <a:off x="1371600" y="4023360"/>
+            <a:ext cx="9418320" cy="457200"/>
+          </a:xfrm>
+          <a:prstGeom prst="rect">
+            <a:avLst/>
+          </a:prstGeom>
+          <a:noFill/>
+        </p:spPr>
+        <p:txBody>
+          <a:bodyPr wrap="square">
+            <a:spAutoFit/>
+          </a:bodyPr>
+          <a:lstStyle/>
+          <a:p>
+            <a:pPr algn="ctr">
+              <a:spcAft>
+                <a:spcPts val="600"/>
+              </a:spcAft>
+            </a:pPr>
+            <a:r>
+              <a:rPr sz="1300" b="0">
+                <a:solidFill>
+                  <a:srgbClr val="8A94A6"/>
+                </a:solidFill>
+                <a:latin typeface="맑은 고딕"/>
+              </a:rPr>
+              <a:t>소스: https://github.com/stulss/odd-one-out</a:t>
             </a:r>
           </a:p>
         </p:txBody>

--- a/발표자료.pptx
+++ b/발표자료.pptx
@@ -9008,15 +9008,39 @@
           </a:p>
         </p:txBody>
       </p:sp>
-      <p:sp>
-        <p:nvSpPr>
-          <p:cNvPr id="25" name="TextBox 24"/>
+      <p:pic>
+        <p:nvPicPr>
+          <p:cNvPr id="25" name="Picture 24" descr="콘솔오류확인.png"/>
+          <p:cNvPicPr>
+            <a:picLocks noChangeAspect="1"/>
+          </p:cNvPicPr>
+          <p:nvPr/>
+        </p:nvPicPr>
+        <p:blipFill>
+          <a:blip r:embed="rId10"/>
+          <a:stretch>
+            <a:fillRect/>
+          </a:stretch>
+        </p:blipFill>
+        <p:spPr>
+          <a:xfrm>
+            <a:off x="4549672" y="4590288"/>
+            <a:ext cx="3062176" cy="1645920"/>
+          </a:xfrm>
+          <a:prstGeom prst="rect">
+            <a:avLst/>
+          </a:prstGeom>
+        </p:spPr>
+      </p:pic>
+      <p:sp>
+        <p:nvSpPr>
+          <p:cNvPr id="26" name="TextBox 25"/>
           <p:cNvSpPr txBox="1"/>
           <p:nvPr/>
         </p:nvSpPr>
         <p:spPr>
           <a:xfrm>
-            <a:off x="4361688" y="4636008"/>
+            <a:off x="4361688" y="6263640"/>
             <a:ext cx="3438144" cy="274320"/>
           </a:xfrm>
           <a:prstGeom prst="rect">
@@ -9042,14 +9066,14 @@
                 </a:solidFill>
                 <a:latin typeface="맑은 고딕"/>
               </a:rPr>
-              <a:t>DevTools Console — 전 슬라이드 검증마다 0건 확인</a:t>
-            </a:r>
-          </a:p>
-        </p:txBody>
-      </p:sp>
-      <p:sp>
-        <p:nvSpPr>
-          <p:cNvPr id="26" name="Rounded Rectangle 25"/>
+              <a:t>사용자 직접 확인 · 최고 16단계·3,242점</a:t>
+            </a:r>
+          </a:p>
+        </p:txBody>
+      </p:sp>
+      <p:sp>
+        <p:nvSpPr>
+          <p:cNvPr id="27" name="Rounded Rectangle 26"/>
           <p:cNvSpPr/>
           <p:nvPr/>
         </p:nvSpPr>
@@ -9095,7 +9119,7 @@
       </p:sp>
       <p:sp>
         <p:nvSpPr>
-          <p:cNvPr id="27" name="TextBox 26"/>
+          <p:cNvPr id="28" name="TextBox 27"/>
           <p:cNvSpPr txBox="1"/>
           <p:nvPr/>
         </p:nvSpPr>
@@ -9130,14 +9154,14 @@
       </p:sp>
       <p:pic>
         <p:nvPicPr>
-          <p:cNvPr id="28" name="Picture 27" descr="result_T4_4.png"/>
+          <p:cNvPr id="29" name="Picture 28" descr="result_T4_4.png"/>
           <p:cNvPicPr>
             <a:picLocks noChangeAspect="1"/>
           </p:cNvPicPr>
           <p:nvPr/>
         </p:nvPicPr>
         <p:blipFill>
-          <a:blip r:embed="rId10"/>
+          <a:blip r:embed="rId11"/>
           <a:stretch>
             <a:fillRect/>
           </a:stretch>
@@ -9154,14 +9178,14 @@
       </p:pic>
       <p:pic>
         <p:nvPicPr>
-          <p:cNvPr id="29" name="Picture 28" descr="result_T5_4.png"/>
+          <p:cNvPr id="30" name="Picture 29" descr="result_T5_4.png"/>
           <p:cNvPicPr>
             <a:picLocks noChangeAspect="1"/>
           </p:cNvPicPr>
           <p:nvPr/>
         </p:nvPicPr>
         <p:blipFill>
-          <a:blip r:embed="rId11"/>
+          <a:blip r:embed="rId12"/>
           <a:stretch>
             <a:fillRect/>
           </a:stretch>

--- a/발표자료.pptx
+++ b/발표자료.pptx
@@ -26,6 +26,10 @@
     <p:sldId id="274" r:id="rId25"/>
     <p:sldId id="275" r:id="rId26"/>
     <p:sldId id="276" r:id="rId27"/>
+    <p:sldId id="277" r:id="rId28"/>
+    <p:sldId id="278" r:id="rId29"/>
+    <p:sldId id="279" r:id="rId30"/>
+    <p:sldId id="280" r:id="rId31"/>
   </p:sldIdLst>
   <p:sldSz cx="12191695" cy="6858000" type="screen4x3"/>
   <p:notesSz cx="6858000" cy="9144000"/>
@@ -9142,7 +9146,7 @@
                 </a:solidFill>
                 <a:latin typeface="맑은 고딕"/>
               </a:rPr>
-              <a:t>필수 체크리스트 · 증거 1/2</a:t>
+              <a:t>VERIFICATION GUIDE</a:t>
             </a:r>
           </a:p>
         </p:txBody>
@@ -9181,7 +9185,7 @@
                 </a:solidFill>
                 <a:latin typeface="맑은 고딕"/>
               </a:rPr>
-              <a:t>학생 자체 점검 — 스크린샷 증거 (1~6)</a:t>
+              <a:t>검증 안내서 — 직접 확인하는 방법</a:t>
             </a:r>
           </a:p>
         </p:txBody>
@@ -9232,60 +9236,14 @@
       </p:sp>
       <p:sp>
         <p:nvSpPr>
-          <p:cNvPr id="7" name="Rounded Rectangle 6"/>
-          <p:cNvSpPr/>
-          <p:nvPr/>
-        </p:nvSpPr>
-        <p:spPr>
-          <a:xfrm>
-            <a:off x="457200" y="1600200"/>
-            <a:ext cx="3657600" cy="2395728"/>
-          </a:xfrm>
-          <a:prstGeom prst="roundRect">
-            <a:avLst/>
-          </a:prstGeom>
-          <a:solidFill>
-            <a:srgbClr val="161B22"/>
-          </a:solidFill>
-          <a:ln w="9525">
-            <a:solidFill>
-              <a:srgbClr val="232A34"/>
-            </a:solidFill>
-          </a:ln>
-          <a:effectLst/>
-        </p:spPr>
-        <p:style>
-          <a:lnRef idx="1">
-            <a:schemeClr val="accent1"/>
-          </a:lnRef>
-          <a:fillRef idx="3">
-            <a:schemeClr val="accent1"/>
-          </a:fillRef>
-          <a:effectRef idx="2">
-            <a:schemeClr val="accent1"/>
-          </a:effectRef>
-          <a:fontRef idx="minor">
-            <a:schemeClr val="lt1"/>
-          </a:fontRef>
-        </p:style>
-        <p:txBody>
-          <a:bodyPr rtlCol="0" anchor="ctr"/>
-          <a:lstStyle/>
-          <a:p>
-            <a:pPr algn="ctr"/>
-          </a:p>
-        </p:txBody>
-      </p:sp>
-      <p:sp>
-        <p:nvSpPr>
-          <p:cNvPr id="8" name="TextBox 7"/>
+          <p:cNvPr id="7" name="TextBox 6"/>
           <p:cNvSpPr txBox="1"/>
           <p:nvPr/>
         </p:nvSpPr>
         <p:spPr>
           <a:xfrm>
-            <a:off x="566928" y="1655064"/>
-            <a:ext cx="3438144" cy="365760"/>
+            <a:off x="640080" y="1691640"/>
+            <a:ext cx="10881360" cy="822960"/>
           </a:xfrm>
           <a:prstGeom prst="rect">
             <a:avLst/>
@@ -9298,123 +9256,49 @@
           </a:bodyPr>
           <a:lstStyle/>
           <a:p>
-            <a:pPr algn="l"/>
-            <a:r>
-              <a:rPr sz="1250" b="1">
+            <a:pPr algn="l">
+              <a:spcAft>
+                <a:spcPts val="200"/>
+              </a:spcAft>
+            </a:pPr>
+            <a:r>
+              <a:rPr sz="1400" b="0">
+                <a:solidFill>
+                  <a:srgbClr val="8A94A6"/>
+                </a:solidFill>
+                <a:latin typeface="맑은 고딕"/>
+              </a:rPr>
+              <a:t>배포 주소</a:t>
+            </a:r>
+          </a:p>
+          <a:p>
+            <a:pPr algn="l">
+              <a:spcAft>
+                <a:spcPts val="600"/>
+              </a:spcAft>
+            </a:pPr>
+            <a:r>
+              <a:rPr sz="2400" b="1">
                 <a:solidFill>
                   <a:srgbClr val="5EE6C5"/>
                 </a:solidFill>
                 <a:latin typeface="맑은 고딕"/>
               </a:rPr>
-              <a:t>1. 시작→종료→재시작</a:t>
-            </a:r>
-          </a:p>
-        </p:txBody>
-      </p:sp>
-      <p:pic>
-        <p:nvPicPr>
-          <p:cNvPr id="9" name="Picture 8" descr="01_start_after.png"/>
-          <p:cNvPicPr>
-            <a:picLocks noChangeAspect="1"/>
-          </p:cNvPicPr>
-          <p:nvPr/>
-        </p:nvPicPr>
-        <p:blipFill>
-          <a:blip r:embed="rId2"/>
-          <a:stretch>
-            <a:fillRect/>
-          </a:stretch>
-        </p:blipFill>
-        <p:spPr>
-          <a:xfrm>
-            <a:off x="1386075" y="2057400"/>
-            <a:ext cx="845061" cy="1828800"/>
-          </a:xfrm>
-          <a:prstGeom prst="rect">
-            <a:avLst/>
-          </a:prstGeom>
-        </p:spPr>
-      </p:pic>
-      <p:pic>
-        <p:nvPicPr>
-          <p:cNvPr id="10" name="Picture 9" descr="08_gameover_after.png"/>
-          <p:cNvPicPr>
-            <a:picLocks noChangeAspect="1"/>
-          </p:cNvPicPr>
-          <p:nvPr/>
-        </p:nvPicPr>
-        <p:blipFill>
-          <a:blip r:embed="rId3"/>
-          <a:stretch>
-            <a:fillRect/>
-          </a:stretch>
-        </p:blipFill>
-        <p:spPr>
-          <a:xfrm>
-            <a:off x="2340864" y="2057400"/>
-            <a:ext cx="845061" cy="1828800"/>
-          </a:xfrm>
-          <a:prstGeom prst="rect">
-            <a:avLst/>
-          </a:prstGeom>
-        </p:spPr>
-      </p:pic>
-      <p:sp>
-        <p:nvSpPr>
-          <p:cNvPr id="11" name="Rounded Rectangle 10"/>
-          <p:cNvSpPr/>
-          <p:nvPr/>
-        </p:nvSpPr>
-        <p:spPr>
-          <a:xfrm>
-            <a:off x="4251960" y="1600200"/>
-            <a:ext cx="3657600" cy="2395728"/>
-          </a:xfrm>
-          <a:prstGeom prst="roundRect">
-            <a:avLst/>
-          </a:prstGeom>
-          <a:solidFill>
-            <a:srgbClr val="161B22"/>
-          </a:solidFill>
-          <a:ln w="9525">
-            <a:solidFill>
-              <a:srgbClr val="232A34"/>
-            </a:solidFill>
-          </a:ln>
-          <a:effectLst/>
-        </p:spPr>
-        <p:style>
-          <a:lnRef idx="1">
-            <a:schemeClr val="accent1"/>
-          </a:lnRef>
-          <a:fillRef idx="3">
-            <a:schemeClr val="accent1"/>
-          </a:fillRef>
-          <a:effectRef idx="2">
-            <a:schemeClr val="accent1"/>
-          </a:effectRef>
-          <a:fontRef idx="minor">
-            <a:schemeClr val="lt1"/>
-          </a:fontRef>
-        </p:style>
-        <p:txBody>
-          <a:bodyPr rtlCol="0" anchor="ctr"/>
-          <a:lstStyle/>
-          <a:p>
-            <a:pPr algn="ctr"/>
-          </a:p>
-        </p:txBody>
-      </p:sp>
-      <p:sp>
-        <p:nvSpPr>
-          <p:cNvPr id="12" name="TextBox 11"/>
+              <a:t>https://stulss.github.io/odd-one-out/</a:t>
+            </a:r>
+          </a:p>
+        </p:txBody>
+      </p:sp>
+      <p:sp>
+        <p:nvSpPr>
+          <p:cNvPr id="8" name="TextBox 7"/>
           <p:cNvSpPr txBox="1"/>
           <p:nvPr/>
         </p:nvSpPr>
         <p:spPr>
           <a:xfrm>
-            <a:off x="4361688" y="1655064"/>
-            <a:ext cx="3438144" cy="365760"/>
+            <a:off x="640080" y="2743200"/>
+            <a:ext cx="10881360" cy="3108960"/>
           </a:xfrm>
           <a:prstGeom prst="rect">
             <a:avLst/>
@@ -9427,123 +9311,81 @@
           </a:bodyPr>
           <a:lstStyle/>
           <a:p>
-            <a:pPr algn="l"/>
-            <a:r>
-              <a:rPr sz="1250" b="1">
-                <a:solidFill>
-                  <a:srgbClr val="5EE6C5"/>
-                </a:solidFill>
-                <a:latin typeface="맑은 고딕"/>
-              </a:rPr>
-              <a:t>2. 성공·실패 상태 구분</a:t>
-            </a:r>
-          </a:p>
-        </p:txBody>
-      </p:sp>
-      <p:pic>
-        <p:nvPicPr>
-          <p:cNvPr id="13" name="Picture 12" descr="02_correct_after.png"/>
-          <p:cNvPicPr>
-            <a:picLocks noChangeAspect="1"/>
-          </p:cNvPicPr>
-          <p:nvPr/>
-        </p:nvPicPr>
-        <p:blipFill>
-          <a:blip r:embed="rId4"/>
-          <a:stretch>
-            <a:fillRect/>
-          </a:stretch>
-        </p:blipFill>
-        <p:spPr>
-          <a:xfrm>
-            <a:off x="5180835" y="2057400"/>
-            <a:ext cx="845061" cy="1828800"/>
-          </a:xfrm>
-          <a:prstGeom prst="rect">
-            <a:avLst/>
-          </a:prstGeom>
-        </p:spPr>
-      </p:pic>
-      <p:pic>
-        <p:nvPicPr>
-          <p:cNvPr id="14" name="Picture 13" descr="03_wrong_after.png"/>
-          <p:cNvPicPr>
-            <a:picLocks noChangeAspect="1"/>
-          </p:cNvPicPr>
-          <p:nvPr/>
-        </p:nvPicPr>
-        <p:blipFill>
-          <a:blip r:embed="rId5"/>
-          <a:stretch>
-            <a:fillRect/>
-          </a:stretch>
-        </p:blipFill>
-        <p:spPr>
-          <a:xfrm>
-            <a:off x="6135624" y="2057400"/>
-            <a:ext cx="845061" cy="1828800"/>
-          </a:xfrm>
-          <a:prstGeom prst="rect">
-            <a:avLst/>
-          </a:prstGeom>
-        </p:spPr>
-      </p:pic>
-      <p:sp>
-        <p:nvSpPr>
-          <p:cNvPr id="15" name="Rounded Rectangle 14"/>
-          <p:cNvSpPr/>
-          <p:nvPr/>
-        </p:nvSpPr>
-        <p:spPr>
-          <a:xfrm>
-            <a:off x="8046720" y="1600200"/>
-            <a:ext cx="3657600" cy="2395728"/>
-          </a:xfrm>
-          <a:prstGeom prst="roundRect">
-            <a:avLst/>
-          </a:prstGeom>
-          <a:solidFill>
-            <a:srgbClr val="161B22"/>
-          </a:solidFill>
-          <a:ln w="9525">
-            <a:solidFill>
-              <a:srgbClr val="232A34"/>
-            </a:solidFill>
-          </a:ln>
-          <a:effectLst/>
-        </p:spPr>
-        <p:style>
-          <a:lnRef idx="1">
-            <a:schemeClr val="accent1"/>
-          </a:lnRef>
-          <a:fillRef idx="3">
-            <a:schemeClr val="accent1"/>
-          </a:fillRef>
-          <a:effectRef idx="2">
-            <a:schemeClr val="accent1"/>
-          </a:effectRef>
-          <a:fontRef idx="minor">
-            <a:schemeClr val="lt1"/>
-          </a:fontRef>
-        </p:style>
-        <p:txBody>
-          <a:bodyPr rtlCol="0" anchor="ctr"/>
-          <a:lstStyle/>
-          <a:p>
-            <a:pPr algn="ctr"/>
-          </a:p>
-        </p:txBody>
-      </p:sp>
-      <p:sp>
-        <p:nvSpPr>
-          <p:cNvPr id="16" name="TextBox 15"/>
+            <a:pPr>
+              <a:spcAft>
+                <a:spcPts val="1800"/>
+              </a:spcAft>
+            </a:pPr>
+            <a:r>
+              <a:rPr sz="2100">
+                <a:solidFill>
+                  <a:srgbClr val="E8EDF4"/>
+                </a:solidFill>
+                <a:latin typeface="맑은 고딕"/>
+              </a:rPr>
+              <a:t>▸ 1단계 — 위 주소로 접속해 [▶ 시작하기]를 누른다</a:t>
+            </a:r>
+          </a:p>
+          <a:p>
+            <a:pPr>
+              <a:spcAft>
+                <a:spcPts val="1800"/>
+              </a:spcAft>
+            </a:pPr>
+            <a:r>
+              <a:rPr sz="2100">
+                <a:solidFill>
+                  <a:srgbClr val="E8EDF4"/>
+                </a:solidFill>
+                <a:latin typeface="맑은 고딕"/>
+              </a:rPr>
+              <a:t>▸ 2단계 — 격자에서 딱 하나 다른 칸을 클릭(터치)한다</a:t>
+            </a:r>
+          </a:p>
+          <a:p>
+            <a:pPr lvl="1">
+              <a:spcAft>
+                <a:spcPts val="1800"/>
+              </a:spcAft>
+            </a:pPr>
+            <a:r>
+              <a:rPr sz="1900">
+                <a:solidFill>
+                  <a:srgbClr val="8A94A6"/>
+                </a:solidFill>
+                <a:latin typeface="맑은 고딕"/>
+              </a:rPr>
+              <a:t>· 키보드로 하려면 방향키로 이동한 뒤 Enter</a:t>
+            </a:r>
+          </a:p>
+          <a:p>
+            <a:pPr>
+              <a:spcAft>
+                <a:spcPts val="1800"/>
+              </a:spcAft>
+            </a:pPr>
+            <a:r>
+              <a:rPr sz="2100">
+                <a:solidFill>
+                  <a:srgbClr val="E8EDF4"/>
+                </a:solidFill>
+                <a:latin typeface="맑은 고딕"/>
+              </a:rPr>
+              <a:t>▸ 3단계 — 시간이 0이 되어 결과 화면이 뜨면 [다시 하기]를 누른다</a:t>
+            </a:r>
+          </a:p>
+        </p:txBody>
+      </p:sp>
+      <p:sp>
+        <p:nvSpPr>
+          <p:cNvPr id="9" name="TextBox 8"/>
           <p:cNvSpPr txBox="1"/>
           <p:nvPr/>
         </p:nvSpPr>
         <p:spPr>
           <a:xfrm>
-            <a:off x="8156448" y="1655064"/>
-            <a:ext cx="3438144" cy="365760"/>
+            <a:off x="640080" y="5806440"/>
+            <a:ext cx="10881360" cy="548640"/>
           </a:xfrm>
           <a:prstGeom prst="rect">
             <a:avLst/>
@@ -9556,469 +9398,23 @@
           </a:bodyPr>
           <a:lstStyle/>
           <a:p>
-            <a:pPr algn="l"/>
-            <a:r>
-              <a:rPr sz="1250" b="1">
-                <a:solidFill>
-                  <a:srgbClr val="5EE6C5"/>
-                </a:solidFill>
-                <a:latin typeface="맑은 고딕"/>
-              </a:rPr>
-              <a:t>3. 2해상도 잘림·넘침 없음</a:t>
-            </a:r>
-          </a:p>
-        </p:txBody>
-      </p:sp>
-      <p:pic>
-        <p:nvPicPr>
-          <p:cNvPr id="17" name="Picture 16" descr="resolution_1366x768.png"/>
-          <p:cNvPicPr>
-            <a:picLocks noChangeAspect="1"/>
-          </p:cNvPicPr>
-          <p:nvPr/>
-        </p:nvPicPr>
-        <p:blipFill>
-          <a:blip r:embed="rId6"/>
-          <a:stretch>
-            <a:fillRect/>
-          </a:stretch>
-        </p:blipFill>
-        <p:spPr>
-          <a:xfrm>
-            <a:off x="8156449" y="2057400"/>
-            <a:ext cx="1664613" cy="935888"/>
-          </a:xfrm>
-          <a:prstGeom prst="rect">
-            <a:avLst/>
-          </a:prstGeom>
-        </p:spPr>
-      </p:pic>
-      <p:pic>
-        <p:nvPicPr>
-          <p:cNvPr id="18" name="Picture 17" descr="resolution_1920x1080.png"/>
-          <p:cNvPicPr>
-            <a:picLocks noChangeAspect="1"/>
-          </p:cNvPicPr>
-          <p:nvPr/>
-        </p:nvPicPr>
-        <p:blipFill>
-          <a:blip r:embed="rId7"/>
-          <a:stretch>
-            <a:fillRect/>
-          </a:stretch>
-        </p:blipFill>
-        <p:spPr>
-          <a:xfrm>
-            <a:off x="9930790" y="2057400"/>
-            <a:ext cx="1663800" cy="935888"/>
-          </a:xfrm>
-          <a:prstGeom prst="rect">
-            <a:avLst/>
-          </a:prstGeom>
-        </p:spPr>
-      </p:pic>
-      <p:sp>
-        <p:nvSpPr>
-          <p:cNvPr id="19" name="Rounded Rectangle 18"/>
-          <p:cNvSpPr/>
-          <p:nvPr/>
-        </p:nvSpPr>
-        <p:spPr>
-          <a:xfrm>
-            <a:off x="457200" y="4133088"/>
-            <a:ext cx="3657600" cy="2395728"/>
-          </a:xfrm>
-          <a:prstGeom prst="roundRect">
-            <a:avLst/>
-          </a:prstGeom>
-          <a:solidFill>
-            <a:srgbClr val="161B22"/>
-          </a:solidFill>
-          <a:ln w="9525">
-            <a:solidFill>
-              <a:srgbClr val="232A34"/>
-            </a:solidFill>
-          </a:ln>
-          <a:effectLst/>
-        </p:spPr>
-        <p:style>
-          <a:lnRef idx="1">
-            <a:schemeClr val="accent1"/>
-          </a:lnRef>
-          <a:fillRef idx="3">
-            <a:schemeClr val="accent1"/>
-          </a:fillRef>
-          <a:effectRef idx="2">
-            <a:schemeClr val="accent1"/>
-          </a:effectRef>
-          <a:fontRef idx="minor">
-            <a:schemeClr val="lt1"/>
-          </a:fontRef>
-        </p:style>
-        <p:txBody>
-          <a:bodyPr rtlCol="0" anchor="ctr"/>
-          <a:lstStyle/>
-          <a:p>
-            <a:pPr algn="ctr"/>
-          </a:p>
-        </p:txBody>
-      </p:sp>
-      <p:sp>
-        <p:nvSpPr>
-          <p:cNvPr id="20" name="TextBox 19"/>
-          <p:cNvSpPr txBox="1"/>
-          <p:nvPr/>
-        </p:nvSpPr>
-        <p:spPr>
-          <a:xfrm>
-            <a:off x="566928" y="4187952"/>
-            <a:ext cx="3438144" cy="365760"/>
-          </a:xfrm>
-          <a:prstGeom prst="rect">
-            <a:avLst/>
-          </a:prstGeom>
-          <a:noFill/>
-        </p:spPr>
-        <p:txBody>
-          <a:bodyPr wrap="square">
-            <a:spAutoFit/>
-          </a:bodyPr>
-          <a:lstStyle/>
-          <a:p>
-            <a:pPr algn="l"/>
-            <a:r>
-              <a:rPr sz="1250" b="1">
-                <a:solidFill>
-                  <a:srgbClr val="5EE6C5"/>
-                </a:solidFill>
-                <a:latin typeface="맑은 고딕"/>
-              </a:rPr>
-              <a:t>4. 연속입력·포커스·10분</a:t>
-            </a:r>
-          </a:p>
-        </p:txBody>
-      </p:sp>
-      <p:pic>
-        <p:nvPicPr>
-          <p:cNvPr id="21" name="Picture 20" descr="04_pause_after.png"/>
-          <p:cNvPicPr>
-            <a:picLocks noChangeAspect="1"/>
-          </p:cNvPicPr>
-          <p:nvPr/>
-        </p:nvPicPr>
-        <p:blipFill>
-          <a:blip r:embed="rId8"/>
-          <a:stretch>
-            <a:fillRect/>
-          </a:stretch>
-        </p:blipFill>
-        <p:spPr>
-          <a:xfrm>
-            <a:off x="1386075" y="4590288"/>
-            <a:ext cx="845061" cy="1828800"/>
-          </a:xfrm>
-          <a:prstGeom prst="rect">
-            <a:avLst/>
-          </a:prstGeom>
-        </p:spPr>
-      </p:pic>
-      <p:pic>
-        <p:nvPicPr>
-          <p:cNvPr id="22" name="Picture 21" descr="t600_10min.png"/>
-          <p:cNvPicPr>
-            <a:picLocks noChangeAspect="1"/>
-          </p:cNvPicPr>
-          <p:nvPr/>
-        </p:nvPicPr>
-        <p:blipFill>
-          <a:blip r:embed="rId9"/>
-          <a:stretch>
-            <a:fillRect/>
-          </a:stretch>
-        </p:blipFill>
-        <p:spPr>
-          <a:xfrm>
-            <a:off x="2340864" y="4590288"/>
-            <a:ext cx="845061" cy="1828800"/>
-          </a:xfrm>
-          <a:prstGeom prst="rect">
-            <a:avLst/>
-          </a:prstGeom>
-        </p:spPr>
-      </p:pic>
-      <p:sp>
-        <p:nvSpPr>
-          <p:cNvPr id="23" name="Rounded Rectangle 22"/>
-          <p:cNvSpPr/>
-          <p:nvPr/>
-        </p:nvSpPr>
-        <p:spPr>
-          <a:xfrm>
-            <a:off x="4251960" y="4133088"/>
-            <a:ext cx="3657600" cy="2395728"/>
-          </a:xfrm>
-          <a:prstGeom prst="roundRect">
-            <a:avLst/>
-          </a:prstGeom>
-          <a:solidFill>
-            <a:srgbClr val="161B22"/>
-          </a:solidFill>
-          <a:ln w="9525">
-            <a:solidFill>
-              <a:srgbClr val="232A34"/>
-            </a:solidFill>
-          </a:ln>
-          <a:effectLst/>
-        </p:spPr>
-        <p:style>
-          <a:lnRef idx="1">
-            <a:schemeClr val="accent1"/>
-          </a:lnRef>
-          <a:fillRef idx="3">
-            <a:schemeClr val="accent1"/>
-          </a:fillRef>
-          <a:effectRef idx="2">
-            <a:schemeClr val="accent1"/>
-          </a:effectRef>
-          <a:fontRef idx="minor">
-            <a:schemeClr val="lt1"/>
-          </a:fontRef>
-        </p:style>
-        <p:txBody>
-          <a:bodyPr rtlCol="0" anchor="ctr"/>
-          <a:lstStyle/>
-          <a:p>
-            <a:pPr algn="ctr"/>
-          </a:p>
-        </p:txBody>
-      </p:sp>
-      <p:sp>
-        <p:nvSpPr>
-          <p:cNvPr id="24" name="TextBox 23"/>
-          <p:cNvSpPr txBox="1"/>
-          <p:nvPr/>
-        </p:nvSpPr>
-        <p:spPr>
-          <a:xfrm>
-            <a:off x="4361688" y="4187952"/>
-            <a:ext cx="3438144" cy="365760"/>
-          </a:xfrm>
-          <a:prstGeom prst="rect">
-            <a:avLst/>
-          </a:prstGeom>
-          <a:noFill/>
-        </p:spPr>
-        <p:txBody>
-          <a:bodyPr wrap="square">
-            <a:spAutoFit/>
-          </a:bodyPr>
-          <a:lstStyle/>
-          <a:p>
-            <a:pPr algn="l"/>
-            <a:r>
-              <a:rPr sz="1250" b="1">
-                <a:solidFill>
-                  <a:srgbClr val="5EE6C5"/>
-                </a:solidFill>
-                <a:latin typeface="맑은 고딕"/>
-              </a:rPr>
-              <a:t>5. 콘솔 빨간 오류 0건</a:t>
-            </a:r>
-          </a:p>
-        </p:txBody>
-      </p:sp>
-      <p:pic>
-        <p:nvPicPr>
-          <p:cNvPr id="25" name="Picture 24" descr="콘솔오류확인.png"/>
-          <p:cNvPicPr>
-            <a:picLocks noChangeAspect="1"/>
-          </p:cNvPicPr>
-          <p:nvPr/>
-        </p:nvPicPr>
-        <p:blipFill>
-          <a:blip r:embed="rId10"/>
-          <a:stretch>
-            <a:fillRect/>
-          </a:stretch>
-        </p:blipFill>
-        <p:spPr>
-          <a:xfrm>
-            <a:off x="4549672" y="4590288"/>
-            <a:ext cx="3062176" cy="1645920"/>
-          </a:xfrm>
-          <a:prstGeom prst="rect">
-            <a:avLst/>
-          </a:prstGeom>
-        </p:spPr>
-      </p:pic>
-      <p:sp>
-        <p:nvSpPr>
-          <p:cNvPr id="26" name="TextBox 25"/>
-          <p:cNvSpPr txBox="1"/>
-          <p:nvPr/>
-        </p:nvSpPr>
-        <p:spPr>
-          <a:xfrm>
-            <a:off x="4361688" y="6263640"/>
-            <a:ext cx="3438144" cy="274320"/>
-          </a:xfrm>
-          <a:prstGeom prst="rect">
-            <a:avLst/>
-          </a:prstGeom>
-          <a:noFill/>
-        </p:spPr>
-        <p:txBody>
-          <a:bodyPr wrap="square">
-            <a:spAutoFit/>
-          </a:bodyPr>
-          <a:lstStyle/>
-          <a:p>
-            <a:pPr algn="ctr">
+            <a:pPr algn="l">
               <a:spcAft>
-                <a:spcPts val="0"/>
+                <a:spcPts val="600"/>
               </a:spcAft>
             </a:pPr>
             <a:r>
-              <a:rPr sz="1000" b="0">
+              <a:rPr sz="1500" b="0">
                 <a:solidFill>
                   <a:srgbClr val="8A94A6"/>
                 </a:solidFill>
                 <a:latin typeface="맑은 고딕"/>
               </a:rPr>
-              <a:t>사용자 직접 확인 · 최고 16단계·3,242점</a:t>
-            </a:r>
-          </a:p>
-        </p:txBody>
-      </p:sp>
-      <p:sp>
-        <p:nvSpPr>
-          <p:cNvPr id="27" name="Rounded Rectangle 26"/>
-          <p:cNvSpPr/>
-          <p:nvPr/>
-        </p:nvSpPr>
-        <p:spPr>
-          <a:xfrm>
-            <a:off x="8046720" y="4133088"/>
-            <a:ext cx="3657600" cy="2395728"/>
-          </a:xfrm>
-          <a:prstGeom prst="roundRect">
-            <a:avLst/>
-          </a:prstGeom>
-          <a:solidFill>
-            <a:srgbClr val="161B22"/>
-          </a:solidFill>
-          <a:ln w="9525">
-            <a:solidFill>
-              <a:srgbClr val="232A34"/>
-            </a:solidFill>
-          </a:ln>
-          <a:effectLst/>
-        </p:spPr>
-        <p:style>
-          <a:lnRef idx="1">
-            <a:schemeClr val="accent1"/>
-          </a:lnRef>
-          <a:fillRef idx="3">
-            <a:schemeClr val="accent1"/>
-          </a:fillRef>
-          <a:effectRef idx="2">
-            <a:schemeClr val="accent1"/>
-          </a:effectRef>
-          <a:fontRef idx="minor">
-            <a:schemeClr val="lt1"/>
-          </a:fontRef>
-        </p:style>
-        <p:txBody>
-          <a:bodyPr rtlCol="0" anchor="ctr"/>
-          <a:lstStyle/>
-          <a:p>
-            <a:pPr algn="ctr"/>
-          </a:p>
-        </p:txBody>
-      </p:sp>
-      <p:sp>
-        <p:nvSpPr>
-          <p:cNvPr id="28" name="TextBox 27"/>
-          <p:cNvSpPr txBox="1"/>
-          <p:nvPr/>
-        </p:nvSpPr>
-        <p:spPr>
-          <a:xfrm>
-            <a:off x="8156448" y="4187952"/>
-            <a:ext cx="3438144" cy="365760"/>
-          </a:xfrm>
-          <a:prstGeom prst="rect">
-            <a:avLst/>
-          </a:prstGeom>
-          <a:noFill/>
-        </p:spPr>
-        <p:txBody>
-          <a:bodyPr wrap="square">
-            <a:spAutoFit/>
-          </a:bodyPr>
-          <a:lstStyle/>
-          <a:p>
-            <a:pPr algn="l"/>
-            <a:r>
-              <a:rPr sz="1250" b="1">
-                <a:solidFill>
-                  <a:srgbClr val="5EE6C5"/>
-                </a:solidFill>
-                <a:latin typeface="맑은 고딕"/>
-              </a:rPr>
-              <a:t>6. 난이도 전/후 10+10</a:t>
-            </a:r>
-          </a:p>
-        </p:txBody>
-      </p:sp>
-      <p:pic>
-        <p:nvPicPr>
-          <p:cNvPr id="29" name="Picture 28" descr="result_T4_4.png"/>
-          <p:cNvPicPr>
-            <a:picLocks noChangeAspect="1"/>
-          </p:cNvPicPr>
-          <p:nvPr/>
-        </p:nvPicPr>
-        <p:blipFill>
-          <a:blip r:embed="rId11"/>
-          <a:stretch>
-            <a:fillRect/>
-          </a:stretch>
-        </p:blipFill>
-        <p:spPr>
-          <a:xfrm>
-            <a:off x="8975595" y="4590288"/>
-            <a:ext cx="845061" cy="1828800"/>
-          </a:xfrm>
-          <a:prstGeom prst="rect">
-            <a:avLst/>
-          </a:prstGeom>
-        </p:spPr>
-      </p:pic>
-      <p:pic>
-        <p:nvPicPr>
-          <p:cNvPr id="30" name="Picture 29" descr="result_T5_4.png"/>
-          <p:cNvPicPr>
-            <a:picLocks noChangeAspect="1"/>
-          </p:cNvPicPr>
-          <p:nvPr/>
-        </p:nvPicPr>
-        <p:blipFill>
-          <a:blip r:embed="rId12"/>
-          <a:stretch>
-            <a:fillRect/>
-          </a:stretch>
-        </p:blipFill>
-        <p:spPr>
-          <a:xfrm>
-            <a:off x="9930384" y="4590288"/>
-            <a:ext cx="845061" cy="1828800"/>
-          </a:xfrm>
-          <a:prstGeom prst="rect">
-            <a:avLst/>
-          </a:prstGeom>
-        </p:spPr>
-      </p:pic>
+              <a:t>3단계 · 30초 이내 — 설치·로그인 없이 링크만으로 확인 가능</a:t>
+            </a:r>
+          </a:p>
+        </p:txBody>
+      </p:sp>
     </p:spTree>
   </p:cSld>
   <p:clrMapOvr>
@@ -10759,7 +10155,7 @@
                 </a:solidFill>
                 <a:latin typeface="맑은 고딕"/>
               </a:rPr>
-              <a:t>필수 체크리스트 · 증거 2/2</a:t>
+              <a:t>VERIFICATION GUIDE</a:t>
             </a:r>
           </a:p>
         </p:txBody>
@@ -10798,7 +10194,7 @@
                 </a:solidFill>
                 <a:latin typeface="맑은 고딕"/>
               </a:rPr>
-              <a:t>학생 자체 점검 — 스크린샷 증거 (7~11)</a:t>
+              <a:t>통과 기준 — 이렇게 보이면 정상입니다 (1~5)</a:t>
             </a:r>
           </a:p>
         </p:txBody>
@@ -10847,633 +10243,320 @@
           </a:p>
         </p:txBody>
       </p:sp>
-      <p:sp>
-        <p:nvSpPr>
-          <p:cNvPr id="7" name="Rounded Rectangle 6"/>
-          <p:cNvSpPr/>
-          <p:nvPr/>
-        </p:nvSpPr>
-        <p:spPr>
-          <a:xfrm>
-            <a:off x="457200" y="1600200"/>
-            <a:ext cx="3657600" cy="2395728"/>
-          </a:xfrm>
-          <a:prstGeom prst="roundRect">
-            <a:avLst/>
-          </a:prstGeom>
-          <a:solidFill>
-            <a:srgbClr val="161B22"/>
-          </a:solidFill>
-          <a:ln w="9525">
-            <a:solidFill>
-              <a:srgbClr val="232A34"/>
-            </a:solidFill>
-          </a:ln>
-          <a:effectLst/>
-        </p:spPr>
-        <p:style>
-          <a:lnRef idx="1">
-            <a:schemeClr val="accent1"/>
-          </a:lnRef>
-          <a:fillRef idx="3">
-            <a:schemeClr val="accent1"/>
-          </a:fillRef>
-          <a:effectRef idx="2">
-            <a:schemeClr val="accent1"/>
-          </a:effectRef>
-          <a:fontRef idx="minor">
-            <a:schemeClr val="lt1"/>
-          </a:fontRef>
-        </p:style>
-        <p:txBody>
-          <a:bodyPr rtlCol="0" anchor="ctr"/>
-          <a:lstStyle/>
-          <a:p>
-            <a:pPr algn="ctr"/>
-          </a:p>
-        </p:txBody>
-      </p:sp>
-      <p:sp>
-        <p:nvSpPr>
-          <p:cNvPr id="8" name="TextBox 7"/>
-          <p:cNvSpPr txBox="1"/>
-          <p:nvPr/>
-        </p:nvSpPr>
-        <p:spPr>
-          <a:xfrm>
-            <a:off x="566928" y="1655064"/>
-            <a:ext cx="3438144" cy="365760"/>
-          </a:xfrm>
-          <a:prstGeom prst="rect">
-            <a:avLst/>
-          </a:prstGeom>
-          <a:noFill/>
-        </p:spPr>
-        <p:txBody>
-          <a:bodyPr wrap="square">
-            <a:spAutoFit/>
-          </a:bodyPr>
-          <a:lstStyle/>
-          <a:p>
-            <a:pPr algn="l"/>
-            <a:r>
-              <a:rPr sz="1250" b="1">
-                <a:solidFill>
-                  <a:srgbClr val="5EE6C5"/>
-                </a:solidFill>
-                <a:latin typeface="맑은 고딕"/>
-              </a:rPr>
-              <a:t>7. 손상값 → 기본값 실행</a:t>
-            </a:r>
-          </a:p>
-        </p:txBody>
-      </p:sp>
-      <p:pic>
-        <p:nvPicPr>
-          <p:cNvPr id="9" name="Picture 8" descr="storage_before_normal.png"/>
-          <p:cNvPicPr>
-            <a:picLocks noChangeAspect="1"/>
-          </p:cNvPicPr>
-          <p:nvPr/>
-        </p:nvPicPr>
-        <p:blipFill>
-          <a:blip r:embed="rId2"/>
-          <a:stretch>
-            <a:fillRect/>
-          </a:stretch>
-        </p:blipFill>
-        <p:spPr>
-          <a:xfrm>
-            <a:off x="1386075" y="2057400"/>
-            <a:ext cx="845061" cy="1828800"/>
-          </a:xfrm>
-          <a:prstGeom prst="rect">
-            <a:avLst/>
-          </a:prstGeom>
-        </p:spPr>
-      </p:pic>
-      <p:pic>
-        <p:nvPicPr>
-          <p:cNvPr id="10" name="Picture 9" descr="storage_after_corrupted_still_works.png"/>
-          <p:cNvPicPr>
-            <a:picLocks noChangeAspect="1"/>
-          </p:cNvPicPr>
-          <p:nvPr/>
-        </p:nvPicPr>
-        <p:blipFill>
-          <a:blip r:embed="rId3"/>
-          <a:stretch>
-            <a:fillRect/>
-          </a:stretch>
-        </p:blipFill>
-        <p:spPr>
-          <a:xfrm>
-            <a:off x="2340864" y="2057400"/>
-            <a:ext cx="845061" cy="1828800"/>
-          </a:xfrm>
-          <a:prstGeom prst="rect">
-            <a:avLst/>
-          </a:prstGeom>
-        </p:spPr>
-      </p:pic>
-      <p:sp>
-        <p:nvSpPr>
-          <p:cNvPr id="11" name="Rounded Rectangle 10"/>
-          <p:cNvSpPr/>
-          <p:nvPr/>
-        </p:nvSpPr>
-        <p:spPr>
-          <a:xfrm>
-            <a:off x="4251960" y="1600200"/>
-            <a:ext cx="3657600" cy="2395728"/>
-          </a:xfrm>
-          <a:prstGeom prst="roundRect">
-            <a:avLst/>
-          </a:prstGeom>
-          <a:solidFill>
-            <a:srgbClr val="161B22"/>
-          </a:solidFill>
-          <a:ln w="9525">
-            <a:solidFill>
-              <a:srgbClr val="232A34"/>
-            </a:solidFill>
-          </a:ln>
-          <a:effectLst/>
-        </p:spPr>
-        <p:style>
-          <a:lnRef idx="1">
-            <a:schemeClr val="accent1"/>
-          </a:lnRef>
-          <a:fillRef idx="3">
-            <a:schemeClr val="accent1"/>
-          </a:fillRef>
-          <a:effectRef idx="2">
-            <a:schemeClr val="accent1"/>
-          </a:effectRef>
-          <a:fontRef idx="minor">
-            <a:schemeClr val="lt1"/>
-          </a:fontRef>
-        </p:style>
-        <p:txBody>
-          <a:bodyPr rtlCol="0" anchor="ctr"/>
-          <a:lstStyle/>
-          <a:p>
-            <a:pPr algn="ctr"/>
-          </a:p>
-        </p:txBody>
-      </p:sp>
-      <p:sp>
-        <p:nvSpPr>
-          <p:cNvPr id="12" name="TextBox 11"/>
-          <p:cNvSpPr txBox="1"/>
-          <p:nvPr/>
-        </p:nvSpPr>
-        <p:spPr>
-          <a:xfrm>
-            <a:off x="4361688" y="1655064"/>
-            <a:ext cx="3438144" cy="365760"/>
-          </a:xfrm>
-          <a:prstGeom prst="rect">
-            <a:avLst/>
-          </a:prstGeom>
-          <a:noFill/>
-        </p:spPr>
-        <p:txBody>
-          <a:bodyPr wrap="square">
-            <a:spAutoFit/>
-          </a:bodyPr>
-          <a:lstStyle/>
-          <a:p>
-            <a:pPr algn="l"/>
-            <a:r>
-              <a:rPr sz="1250" b="1">
-                <a:solidFill>
-                  <a:srgbClr val="5EE6C5"/>
-                </a:solidFill>
-                <a:latin typeface="맑은 고딕"/>
-              </a:rPr>
-              <a:t>8. 재시작=초기화, 기록 유지</a:t>
-            </a:r>
-          </a:p>
-        </p:txBody>
-      </p:sp>
-      <p:pic>
-        <p:nvPicPr>
-          <p:cNvPr id="13" name="Picture 12" descr="13_restart_before.png"/>
-          <p:cNvPicPr>
-            <a:picLocks noChangeAspect="1"/>
-          </p:cNvPicPr>
-          <p:nvPr/>
-        </p:nvPicPr>
-        <p:blipFill>
-          <a:blip r:embed="rId4"/>
-          <a:stretch>
-            <a:fillRect/>
-          </a:stretch>
-        </p:blipFill>
-        <p:spPr>
-          <a:xfrm>
-            <a:off x="5180835" y="2057400"/>
-            <a:ext cx="845061" cy="1828800"/>
-          </a:xfrm>
-          <a:prstGeom prst="rect">
-            <a:avLst/>
-          </a:prstGeom>
-        </p:spPr>
-      </p:pic>
-      <p:pic>
-        <p:nvPicPr>
-          <p:cNvPr id="14" name="Picture 13" descr="13_restart_after.png"/>
-          <p:cNvPicPr>
-            <a:picLocks noChangeAspect="1"/>
-          </p:cNvPicPr>
-          <p:nvPr/>
-        </p:nvPicPr>
-        <p:blipFill>
-          <a:blip r:embed="rId5"/>
-          <a:stretch>
-            <a:fillRect/>
-          </a:stretch>
-        </p:blipFill>
-        <p:spPr>
-          <a:xfrm>
-            <a:off x="6135624" y="2057400"/>
-            <a:ext cx="845061" cy="1828800"/>
-          </a:xfrm>
-          <a:prstGeom prst="rect">
-            <a:avLst/>
-          </a:prstGeom>
-        </p:spPr>
-      </p:pic>
-      <p:sp>
-        <p:nvSpPr>
-          <p:cNvPr id="15" name="Rounded Rectangle 14"/>
-          <p:cNvSpPr/>
-          <p:nvPr/>
-        </p:nvSpPr>
-        <p:spPr>
-          <a:xfrm>
-            <a:off x="8046720" y="1600200"/>
-            <a:ext cx="3657600" cy="2395728"/>
-          </a:xfrm>
-          <a:prstGeom prst="roundRect">
-            <a:avLst/>
-          </a:prstGeom>
-          <a:solidFill>
-            <a:srgbClr val="161B22"/>
-          </a:solidFill>
-          <a:ln w="9525">
-            <a:solidFill>
-              <a:srgbClr val="232A34"/>
-            </a:solidFill>
-          </a:ln>
-          <a:effectLst/>
-        </p:spPr>
-        <p:style>
-          <a:lnRef idx="1">
-            <a:schemeClr val="accent1"/>
-          </a:lnRef>
-          <a:fillRef idx="3">
-            <a:schemeClr val="accent1"/>
-          </a:fillRef>
-          <a:effectRef idx="2">
-            <a:schemeClr val="accent1"/>
-          </a:effectRef>
-          <a:fontRef idx="minor">
-            <a:schemeClr val="lt1"/>
-          </a:fontRef>
-        </p:style>
-        <p:txBody>
-          <a:bodyPr rtlCol="0" anchor="ctr"/>
-          <a:lstStyle/>
-          <a:p>
-            <a:pPr algn="ctr"/>
-          </a:p>
-        </p:txBody>
-      </p:sp>
-      <p:sp>
-        <p:nvSpPr>
-          <p:cNvPr id="16" name="TextBox 15"/>
-          <p:cNvSpPr txBox="1"/>
-          <p:nvPr/>
-        </p:nvSpPr>
-        <p:spPr>
-          <a:xfrm>
-            <a:off x="8156448" y="1655064"/>
-            <a:ext cx="3438144" cy="365760"/>
-          </a:xfrm>
-          <a:prstGeom prst="rect">
-            <a:avLst/>
-          </a:prstGeom>
-          <a:noFill/>
-        </p:spPr>
-        <p:txBody>
-          <a:bodyPr wrap="square">
-            <a:spAutoFit/>
-          </a:bodyPr>
-          <a:lstStyle/>
-          <a:p>
-            <a:pPr algn="l"/>
-            <a:r>
-              <a:rPr sz="1250" b="1">
-                <a:solidFill>
-                  <a:srgbClr val="5EE6C5"/>
-                </a:solidFill>
-                <a:latin typeface="맑은 고딕"/>
-              </a:rPr>
-              <a:t>9. 효과 줄이기·끄기 작동</a:t>
-            </a:r>
-          </a:p>
-        </p:txBody>
-      </p:sp>
-      <p:pic>
-        <p:nvPicPr>
-          <p:cNvPr id="17" name="Picture 16" descr="06_sound_after.png"/>
-          <p:cNvPicPr>
-            <a:picLocks noChangeAspect="1"/>
-          </p:cNvPicPr>
-          <p:nvPr/>
-        </p:nvPicPr>
-        <p:blipFill>
-          <a:blip r:embed="rId6"/>
-          <a:stretch>
-            <a:fillRect/>
-          </a:stretch>
-        </p:blipFill>
-        <p:spPr>
-          <a:xfrm>
-            <a:off x="8975595" y="2057400"/>
-            <a:ext cx="845061" cy="1828800"/>
-          </a:xfrm>
-          <a:prstGeom prst="rect">
-            <a:avLst/>
-          </a:prstGeom>
-        </p:spPr>
-      </p:pic>
-      <p:pic>
-        <p:nvPicPr>
-          <p:cNvPr id="18" name="Picture 17" descr="07_motion_after.png"/>
-          <p:cNvPicPr>
-            <a:picLocks noChangeAspect="1"/>
-          </p:cNvPicPr>
-          <p:nvPr/>
-        </p:nvPicPr>
-        <p:blipFill>
-          <a:blip r:embed="rId7"/>
-          <a:stretch>
-            <a:fillRect/>
-          </a:stretch>
-        </p:blipFill>
-        <p:spPr>
-          <a:xfrm>
-            <a:off x="9930384" y="2057400"/>
-            <a:ext cx="845061" cy="1828800"/>
-          </a:xfrm>
-          <a:prstGeom prst="rect">
-            <a:avLst/>
-          </a:prstGeom>
-        </p:spPr>
-      </p:pic>
-      <p:sp>
-        <p:nvSpPr>
-          <p:cNvPr id="19" name="Rounded Rectangle 18"/>
-          <p:cNvSpPr/>
-          <p:nvPr/>
-        </p:nvSpPr>
-        <p:spPr>
-          <a:xfrm>
-            <a:off x="457200" y="4133088"/>
-            <a:ext cx="3657600" cy="2395728"/>
-          </a:xfrm>
-          <a:prstGeom prst="roundRect">
-            <a:avLst/>
-          </a:prstGeom>
-          <a:solidFill>
-            <a:srgbClr val="161B22"/>
-          </a:solidFill>
-          <a:ln w="9525">
-            <a:solidFill>
-              <a:srgbClr val="232A34"/>
-            </a:solidFill>
-          </a:ln>
-          <a:effectLst/>
-        </p:spPr>
-        <p:style>
-          <a:lnRef idx="1">
-            <a:schemeClr val="accent1"/>
-          </a:lnRef>
-          <a:fillRef idx="3">
-            <a:schemeClr val="accent1"/>
-          </a:fillRef>
-          <a:effectRef idx="2">
-            <a:schemeClr val="accent1"/>
-          </a:effectRef>
-          <a:fontRef idx="minor">
-            <a:schemeClr val="lt1"/>
-          </a:fontRef>
-        </p:style>
-        <p:txBody>
-          <a:bodyPr rtlCol="0" anchor="ctr"/>
-          <a:lstStyle/>
-          <a:p>
-            <a:pPr algn="ctr"/>
-          </a:p>
-        </p:txBody>
-      </p:sp>
-      <p:sp>
-        <p:nvSpPr>
-          <p:cNvPr id="20" name="TextBox 19"/>
-          <p:cNvSpPr txBox="1"/>
-          <p:nvPr/>
-        </p:nvSpPr>
-        <p:spPr>
-          <a:xfrm>
-            <a:off x="566928" y="4187952"/>
-            <a:ext cx="3438144" cy="365760"/>
-          </a:xfrm>
-          <a:prstGeom prst="rect">
-            <a:avLst/>
-          </a:prstGeom>
-          <a:noFill/>
-        </p:spPr>
-        <p:txBody>
-          <a:bodyPr wrap="square">
-            <a:spAutoFit/>
-          </a:bodyPr>
-          <a:lstStyle/>
-          <a:p>
-            <a:pPr algn="l"/>
-            <a:r>
-              <a:rPr sz="1250" b="1">
-                <a:solidFill>
-                  <a:srgbClr val="5EE6C5"/>
-                </a:solidFill>
-                <a:latin typeface="맑은 고딕"/>
-              </a:rPr>
-              <a:t>10. 개인정보·비밀값 0건</a:t>
-            </a:r>
-          </a:p>
-        </p:txBody>
-      </p:sp>
-      <p:sp>
-        <p:nvSpPr>
-          <p:cNvPr id="21" name="TextBox 20"/>
-          <p:cNvSpPr txBox="1"/>
-          <p:nvPr/>
-        </p:nvSpPr>
-        <p:spPr>
-          <a:xfrm>
-            <a:off x="566928" y="4636008"/>
-            <a:ext cx="3438144" cy="274320"/>
-          </a:xfrm>
-          <a:prstGeom prst="rect">
-            <a:avLst/>
-          </a:prstGeom>
-          <a:noFill/>
-        </p:spPr>
-        <p:txBody>
-          <a:bodyPr wrap="square">
-            <a:spAutoFit/>
-          </a:bodyPr>
-          <a:lstStyle/>
-          <a:p>
-            <a:pPr algn="ctr">
-              <a:spcAft>
-                <a:spcPts val="0"/>
-              </a:spcAft>
-            </a:pPr>
-            <a:r>
-              <a:rPr sz="1000" b="0">
-                <a:solidFill>
-                  <a:srgbClr val="8A94A6"/>
-                </a:solidFill>
-                <a:latin typeface="맑은 고딕"/>
-              </a:rPr>
-              <a:t>저장소 전수 grep 검사 — stulss(공개 계정명) 외 유출 0건</a:t>
-            </a:r>
-          </a:p>
-        </p:txBody>
-      </p:sp>
-      <p:sp>
-        <p:nvSpPr>
-          <p:cNvPr id="22" name="Rounded Rectangle 21"/>
-          <p:cNvSpPr/>
-          <p:nvPr/>
-        </p:nvSpPr>
-        <p:spPr>
-          <a:xfrm>
-            <a:off x="4251960" y="4133088"/>
-            <a:ext cx="3657600" cy="2395728"/>
-          </a:xfrm>
-          <a:prstGeom prst="roundRect">
-            <a:avLst/>
-          </a:prstGeom>
-          <a:solidFill>
-            <a:srgbClr val="161B22"/>
-          </a:solidFill>
-          <a:ln w="9525">
-            <a:solidFill>
-              <a:srgbClr val="232A34"/>
-            </a:solidFill>
-          </a:ln>
-          <a:effectLst/>
-        </p:spPr>
-        <p:style>
-          <a:lnRef idx="1">
-            <a:schemeClr val="accent1"/>
-          </a:lnRef>
-          <a:fillRef idx="3">
-            <a:schemeClr val="accent1"/>
-          </a:fillRef>
-          <a:effectRef idx="2">
-            <a:schemeClr val="accent1"/>
-          </a:effectRef>
-          <a:fontRef idx="minor">
-            <a:schemeClr val="lt1"/>
-          </a:fontRef>
-        </p:style>
-        <p:txBody>
-          <a:bodyPr rtlCol="0" anchor="ctr"/>
-          <a:lstStyle/>
-          <a:p>
-            <a:pPr algn="ctr"/>
-          </a:p>
-        </p:txBody>
-      </p:sp>
-      <p:sp>
-        <p:nvSpPr>
-          <p:cNvPr id="23" name="TextBox 22"/>
-          <p:cNvSpPr txBox="1"/>
-          <p:nvPr/>
-        </p:nvSpPr>
-        <p:spPr>
-          <a:xfrm>
-            <a:off x="4361688" y="4187952"/>
-            <a:ext cx="3438144" cy="365760"/>
-          </a:xfrm>
-          <a:prstGeom prst="rect">
-            <a:avLst/>
-          </a:prstGeom>
-          <a:noFill/>
-        </p:spPr>
-        <p:txBody>
-          <a:bodyPr wrap="square">
-            <a:spAutoFit/>
-          </a:bodyPr>
-          <a:lstStyle/>
-          <a:p>
-            <a:pPr algn="l"/>
-            <a:r>
-              <a:rPr sz="1250" b="1">
-                <a:solidFill>
-                  <a:srgbClr val="5EE6C5"/>
-                </a:solidFill>
-                <a:latin typeface="맑은 고딕"/>
-              </a:rPr>
-              <a:t>11. 위 1~10 모두 완료</a:t>
-            </a:r>
-          </a:p>
-        </p:txBody>
-      </p:sp>
-      <p:sp>
-        <p:nvSpPr>
-          <p:cNvPr id="24" name="TextBox 23"/>
-          <p:cNvSpPr txBox="1"/>
-          <p:nvPr/>
-        </p:nvSpPr>
-        <p:spPr>
-          <a:xfrm>
-            <a:off x="4361688" y="4636008"/>
-            <a:ext cx="3438144" cy="274320"/>
-          </a:xfrm>
-          <a:prstGeom prst="rect">
-            <a:avLst/>
-          </a:prstGeom>
-          <a:noFill/>
-        </p:spPr>
-        <p:txBody>
-          <a:bodyPr wrap="square">
-            <a:spAutoFit/>
-          </a:bodyPr>
-          <a:lstStyle/>
-          <a:p>
-            <a:pPr algn="ctr">
-              <a:spcAft>
-                <a:spcPts val="0"/>
-              </a:spcAft>
-            </a:pPr>
-            <a:r>
-              <a:rPr sz="1000" b="0">
-                <a:solidFill>
-                  <a:srgbClr val="8A94A6"/>
-                </a:solidFill>
-                <a:latin typeface="맑은 고딕"/>
-              </a:rPr>
-              <a:t>카드 1~5 통과기준 5/5 · 학생 자체 점검 11/11</a:t>
-            </a:r>
-          </a:p>
-        </p:txBody>
-      </p:sp>
+      <p:graphicFrame>
+        <p:nvGraphicFramePr>
+          <p:cNvPr id="7" name="Table 6"/>
+          <p:cNvGraphicFramePr>
+            <a:graphicFrameLocks noGrp="1"/>
+          </p:cNvGraphicFramePr>
+          <p:nvPr/>
+        </p:nvGraphicFramePr>
+        <p:xfrm>
+          <a:off x="640080" y="1691640"/>
+          <a:ext cx="10881359" cy="4480560"/>
+        </p:xfrm>
+        <a:graphic>
+          <a:graphicData uri="http://schemas.openxmlformats.org/drawingml/2006/table">
+            <a:tbl>
+              <a:tblPr firstRow="1" bandRow="1">
+                <a:tableStyleId>{5C22544A-7EE6-4342-B048-85BDC9FD1C3A}</a:tableStyleId>
+              </a:tblPr>
+              <a:tblGrid>
+                <a:gridCol w="2926080"/>
+                <a:gridCol w="7955279"/>
+              </a:tblGrid>
+              <a:tr h="746760">
+                <a:tc>
+                  <a:txBody>
+                    <a:bodyPr/>
+                    <a:lstStyle/>
+                    <a:p>
+                      <a:pPr algn="l"/>
+                      <a:r>
+                        <a:rPr b="1" sz="1400">
+                          <a:solidFill>
+                            <a:srgbClr val="E8EDF4"/>
+                          </a:solidFill>
+                          <a:latin typeface="맑은 고딕"/>
+                        </a:rPr>
+                        <a:t>확인 항목</a:t>
+                      </a:r>
+                    </a:p>
+                  </a:txBody>
+                  <a:tcPr>
+                    <a:solidFill>
+                      <a:srgbClr val="232A34"/>
+                    </a:solidFill>
+                  </a:tcPr>
+                </a:tc>
+                <a:tc>
+                  <a:txBody>
+                    <a:bodyPr/>
+                    <a:lstStyle/>
+                    <a:p>
+                      <a:pPr algn="l"/>
+                      <a:r>
+                        <a:rPr b="1" sz="1400">
+                          <a:solidFill>
+                            <a:srgbClr val="E8EDF4"/>
+                          </a:solidFill>
+                          <a:latin typeface="맑은 고딕"/>
+                        </a:rPr>
+                        <a:t>이렇게 보이면 통과</a:t>
+                      </a:r>
+                    </a:p>
+                  </a:txBody>
+                  <a:tcPr>
+                    <a:solidFill>
+                      <a:srgbClr val="232A34"/>
+                    </a:solidFill>
+                  </a:tcPr>
+                </a:tc>
+              </a:tr>
+              <a:tr h="746760">
+                <a:tc>
+                  <a:txBody>
+                    <a:bodyPr/>
+                    <a:lstStyle/>
+                    <a:p>
+                      <a:pPr algn="l"/>
+                      <a:r>
+                        <a:rPr sz="1400">
+                          <a:solidFill>
+                            <a:srgbClr val="8A94A6"/>
+                          </a:solidFill>
+                          <a:latin typeface="맑은 고딕"/>
+                        </a:rPr>
+                        <a:t>규칙·조작·상태 상시 표시</a:t>
+                      </a:r>
+                    </a:p>
+                  </a:txBody>
+                  <a:tcPr marL="101600">
+                    <a:solidFill>
+                      <a:srgbClr val="161B22"/>
+                    </a:solidFill>
+                  </a:tcPr>
+                </a:tc>
+                <a:tc>
+                  <a:txBody>
+                    <a:bodyPr/>
+                    <a:lstStyle/>
+                    <a:p>
+                      <a:pPr algn="l"/>
+                      <a:r>
+                        <a:rPr sz="1400">
+                          <a:solidFill>
+                            <a:srgbClr val="8A94A6"/>
+                          </a:solidFill>
+                          <a:latin typeface="맑은 고딕"/>
+                        </a:rPr>
+                        <a:t>화면 하단 3줄이 항상 보임 — 규칙 · 조작 · 현재 상태(단계·난이도), 진행에 따라 갱신</a:t>
+                      </a:r>
+                    </a:p>
+                  </a:txBody>
+                  <a:tcPr marL="101600">
+                    <a:solidFill>
+                      <a:srgbClr val="161B22"/>
+                    </a:solidFill>
+                  </a:tcPr>
+                </a:tc>
+              </a:tr>
+              <a:tr h="746760">
+                <a:tc>
+                  <a:txBody>
+                    <a:bodyPr/>
+                    <a:lstStyle/>
+                    <a:p>
+                      <a:pPr algn="l"/>
+                      <a:r>
+                        <a:rPr sz="1400">
+                          <a:solidFill>
+                            <a:srgbClr val="8A94A6"/>
+                          </a:solidFill>
+                          <a:latin typeface="맑은 고딕"/>
+                        </a:rPr>
+                        <a:t>조작 1회 = 결과 1회</a:t>
+                      </a:r>
+                    </a:p>
+                  </a:txBody>
+                  <a:tcPr marL="101600">
+                    <a:solidFill>
+                      <a:srgbClr val="161B22"/>
+                    </a:solidFill>
+                  </a:tcPr>
+                </a:tc>
+                <a:tc>
+                  <a:txBody>
+                    <a:bodyPr/>
+                    <a:lstStyle/>
+                    <a:p>
+                      <a:pPr algn="l"/>
+                      <a:r>
+                        <a:rPr sz="1400">
+                          <a:solidFill>
+                            <a:srgbClr val="8A94A6"/>
+                          </a:solidFill>
+                          <a:latin typeface="맑은 고딕"/>
+                        </a:rPr>
+                        <a:t>정답 → 즉시 다음 격자 + STAGE·SCORE 상승 · 오답 → 칸이 흔들리고 시간 1초 차감(게임 계속) · 시간 초과 → 정답 위치가 민트 테두리로 공개</a:t>
+                      </a:r>
+                    </a:p>
+                  </a:txBody>
+                  <a:tcPr marL="101600">
+                    <a:solidFill>
+                      <a:srgbClr val="161B22"/>
+                    </a:solidFill>
+                  </a:tcPr>
+                </a:tc>
+              </a:tr>
+              <a:tr h="746760">
+                <a:tc>
+                  <a:txBody>
+                    <a:bodyPr/>
+                    <a:lstStyle/>
+                    <a:p>
+                      <a:pPr algn="l"/>
+                      <a:r>
+                        <a:rPr sz="1400">
+                          <a:solidFill>
+                            <a:srgbClr val="8A94A6"/>
+                          </a:solidFill>
+                          <a:latin typeface="맑은 고딕"/>
+                        </a:rPr>
+                        <a:t>다시 시작 = 초기화</a:t>
+                      </a:r>
+                    </a:p>
+                  </a:txBody>
+                  <a:tcPr marL="101600">
+                    <a:solidFill>
+                      <a:srgbClr val="161B22"/>
+                    </a:solidFill>
+                  </a:tcPr>
+                </a:tc>
+                <a:tc>
+                  <a:txBody>
+                    <a:bodyPr/>
+                    <a:lstStyle/>
+                    <a:p>
+                      <a:pPr algn="l"/>
+                      <a:r>
+                        <a:rPr sz="1400">
+                          <a:solidFill>
+                            <a:srgbClr val="8A94A6"/>
+                          </a:solidFill>
+                          <a:latin typeface="맑은 고딕"/>
+                        </a:rPr>
+                        <a:t>[다시 하기] 시 STAGE 1 · SCORE 0으로 복귀, 단 최고 기록은 그대로 보존</a:t>
+                      </a:r>
+                    </a:p>
+                  </a:txBody>
+                  <a:tcPr marL="101600">
+                    <a:solidFill>
+                      <a:srgbClr val="161B22"/>
+                    </a:solidFill>
+                  </a:tcPr>
+                </a:tc>
+              </a:tr>
+              <a:tr h="746760">
+                <a:tc>
+                  <a:txBody>
+                    <a:bodyPr/>
+                    <a:lstStyle/>
+                    <a:p>
+                      <a:pPr algn="l"/>
+                      <a:r>
+                        <a:rPr sz="1400">
+                          <a:solidFill>
+                            <a:srgbClr val="8A94A6"/>
+                          </a:solidFill>
+                          <a:latin typeface="맑은 고딕"/>
+                        </a:rPr>
+                        <a:t>음소거 작동</a:t>
+                      </a:r>
+                    </a:p>
+                  </a:txBody>
+                  <a:tcPr marL="101600">
+                    <a:solidFill>
+                      <a:srgbClr val="161B22"/>
+                    </a:solidFill>
+                  </a:tcPr>
+                </a:tc>
+                <a:tc>
+                  <a:txBody>
+                    <a:bodyPr/>
+                    <a:lstStyle/>
+                    <a:p>
+                      <a:pPr algn="l"/>
+                      <a:r>
+                        <a:rPr sz="1400">
+                          <a:solidFill>
+                            <a:srgbClr val="8A94A6"/>
+                          </a:solidFill>
+                          <a:latin typeface="맑은 고딕"/>
+                        </a:rPr>
+                        <a:t>⚙ → 소리 끄면 즉시 무음, 다시 켜면 즉시 복원</a:t>
+                      </a:r>
+                    </a:p>
+                  </a:txBody>
+                  <a:tcPr marL="101600">
+                    <a:solidFill>
+                      <a:srgbClr val="161B22"/>
+                    </a:solidFill>
+                  </a:tcPr>
+                </a:tc>
+              </a:tr>
+              <a:tr h="746760">
+                <a:tc>
+                  <a:txBody>
+                    <a:bodyPr/>
+                    <a:lstStyle/>
+                    <a:p>
+                      <a:pPr algn="l"/>
+                      <a:r>
+                        <a:rPr sz="1400">
+                          <a:solidFill>
+                            <a:srgbClr val="8A94A6"/>
+                          </a:solidFill>
+                          <a:latin typeface="맑은 고딕"/>
+                        </a:rPr>
+                        <a:t>움직임 줄이기 작동</a:t>
+                      </a:r>
+                    </a:p>
+                  </a:txBody>
+                  <a:tcPr marL="101600">
+                    <a:solidFill>
+                      <a:srgbClr val="161B22"/>
+                    </a:solidFill>
+                  </a:tcPr>
+                </a:tc>
+                <a:tc>
+                  <a:txBody>
+                    <a:bodyPr/>
+                    <a:lstStyle/>
+                    <a:p>
+                      <a:pPr algn="l"/>
+                      <a:r>
+                        <a:rPr sz="1400">
+                          <a:solidFill>
+                            <a:srgbClr val="8A94A6"/>
+                          </a:solidFill>
+                          <a:latin typeface="맑은 고딕"/>
+                        </a:rPr>
+                        <a:t>⚙ → 켜면 확대·흔들림 대신 색 점멸로 대체 (성공/실패 인지는 그대로 유지)</a:t>
+                      </a:r>
+                    </a:p>
+                  </a:txBody>
+                  <a:tcPr marL="101600">
+                    <a:solidFill>
+                      <a:srgbClr val="161B22"/>
+                    </a:solidFill>
+                  </a:tcPr>
+                </a:tc>
+              </a:tr>
+            </a:tbl>
+          </a:graphicData>
+        </a:graphic>
+      </p:graphicFrame>
     </p:spTree>
   </p:cSld>
   <p:clrMapOvr>
@@ -11571,6 +10654,3052 @@
                 <a:latin typeface="맑은 고딕"/>
               </a:rPr>
               <a:t>21</a:t>
+            </a:r>
+          </a:p>
+        </p:txBody>
+      </p:sp>
+      <p:sp>
+        <p:nvSpPr>
+          <p:cNvPr id="4" name="TextBox 3"/>
+          <p:cNvSpPr txBox="1"/>
+          <p:nvPr/>
+        </p:nvSpPr>
+        <p:spPr>
+          <a:xfrm>
+            <a:off x="640080" y="320040"/>
+            <a:ext cx="10881360" cy="365760"/>
+          </a:xfrm>
+          <a:prstGeom prst="rect">
+            <a:avLst/>
+          </a:prstGeom>
+          <a:noFill/>
+        </p:spPr>
+        <p:txBody>
+          <a:bodyPr wrap="square">
+            <a:spAutoFit/>
+          </a:bodyPr>
+          <a:lstStyle/>
+          <a:p>
+            <a:pPr algn="l">
+              <a:spcAft>
+                <a:spcPts val="600"/>
+              </a:spcAft>
+            </a:pPr>
+            <a:r>
+              <a:rPr sz="1400" b="1">
+                <a:solidFill>
+                  <a:srgbClr val="5EE6C5"/>
+                </a:solidFill>
+                <a:latin typeface="맑은 고딕"/>
+              </a:rPr>
+              <a:t>VERIFICATION GUIDE</a:t>
+            </a:r>
+          </a:p>
+        </p:txBody>
+      </p:sp>
+      <p:sp>
+        <p:nvSpPr>
+          <p:cNvPr id="5" name="TextBox 4"/>
+          <p:cNvSpPr txBox="1"/>
+          <p:nvPr/>
+        </p:nvSpPr>
+        <p:spPr>
+          <a:xfrm>
+            <a:off x="640080" y="658368"/>
+            <a:ext cx="10881360" cy="822960"/>
+          </a:xfrm>
+          <a:prstGeom prst="rect">
+            <a:avLst/>
+          </a:prstGeom>
+          <a:noFill/>
+        </p:spPr>
+        <p:txBody>
+          <a:bodyPr wrap="square">
+            <a:spAutoFit/>
+          </a:bodyPr>
+          <a:lstStyle/>
+          <a:p>
+            <a:pPr algn="l">
+              <a:spcAft>
+                <a:spcPts val="600"/>
+              </a:spcAft>
+            </a:pPr>
+            <a:r>
+              <a:rPr sz="3200" b="1">
+                <a:solidFill>
+                  <a:srgbClr val="E8EDF4"/>
+                </a:solidFill>
+                <a:latin typeface="맑은 고딕"/>
+              </a:rPr>
+              <a:t>통과 기준 — 이렇게 보이면 정상입니다 (6~9)</a:t>
+            </a:r>
+          </a:p>
+        </p:txBody>
+      </p:sp>
+      <p:sp>
+        <p:nvSpPr>
+          <p:cNvPr id="6" name="Rectangle 5"/>
+          <p:cNvSpPr/>
+          <p:nvPr/>
+        </p:nvSpPr>
+        <p:spPr>
+          <a:xfrm>
+            <a:off x="640080" y="1417320"/>
+            <a:ext cx="10881360" cy="25400"/>
+          </a:xfrm>
+          <a:prstGeom prst="rect">
+            <a:avLst/>
+          </a:prstGeom>
+          <a:solidFill>
+            <a:srgbClr val="232A34"/>
+          </a:solidFill>
+          <a:ln>
+            <a:noFill/>
+          </a:ln>
+          <a:effectLst/>
+        </p:spPr>
+        <p:style>
+          <a:lnRef idx="1">
+            <a:schemeClr val="accent1"/>
+          </a:lnRef>
+          <a:fillRef idx="3">
+            <a:schemeClr val="accent1"/>
+          </a:fillRef>
+          <a:effectRef idx="2">
+            <a:schemeClr val="accent1"/>
+          </a:effectRef>
+          <a:fontRef idx="minor">
+            <a:schemeClr val="lt1"/>
+          </a:fontRef>
+        </p:style>
+        <p:txBody>
+          <a:bodyPr rtlCol="0" anchor="ctr"/>
+          <a:lstStyle/>
+          <a:p>
+            <a:pPr algn="ctr"/>
+          </a:p>
+        </p:txBody>
+      </p:sp>
+      <p:graphicFrame>
+        <p:nvGraphicFramePr>
+          <p:cNvPr id="7" name="Table 6"/>
+          <p:cNvGraphicFramePr>
+            <a:graphicFrameLocks noGrp="1"/>
+          </p:cNvGraphicFramePr>
+          <p:nvPr/>
+        </p:nvGraphicFramePr>
+        <p:xfrm>
+          <a:off x="640080" y="1691640"/>
+          <a:ext cx="10881359" cy="2286000"/>
+        </p:xfrm>
+        <a:graphic>
+          <a:graphicData uri="http://schemas.openxmlformats.org/drawingml/2006/table">
+            <a:tbl>
+              <a:tblPr firstRow="1" bandRow="1">
+                <a:tableStyleId>{5C22544A-7EE6-4342-B048-85BDC9FD1C3A}</a:tableStyleId>
+              </a:tblPr>
+              <a:tblGrid>
+                <a:gridCol w="2926080"/>
+                <a:gridCol w="7955279"/>
+              </a:tblGrid>
+              <a:tr h="457200">
+                <a:tc>
+                  <a:txBody>
+                    <a:bodyPr/>
+                    <a:lstStyle/>
+                    <a:p>
+                      <a:pPr algn="l"/>
+                      <a:r>
+                        <a:rPr b="1" sz="1400">
+                          <a:solidFill>
+                            <a:srgbClr val="E8EDF4"/>
+                          </a:solidFill>
+                          <a:latin typeface="맑은 고딕"/>
+                        </a:rPr>
+                        <a:t>확인 항목</a:t>
+                      </a:r>
+                    </a:p>
+                  </a:txBody>
+                  <a:tcPr>
+                    <a:solidFill>
+                      <a:srgbClr val="232A34"/>
+                    </a:solidFill>
+                  </a:tcPr>
+                </a:tc>
+                <a:tc>
+                  <a:txBody>
+                    <a:bodyPr/>
+                    <a:lstStyle/>
+                    <a:p>
+                      <a:pPr algn="l"/>
+                      <a:r>
+                        <a:rPr b="1" sz="1400">
+                          <a:solidFill>
+                            <a:srgbClr val="E8EDF4"/>
+                          </a:solidFill>
+                          <a:latin typeface="맑은 고딕"/>
+                        </a:rPr>
+                        <a:t>이렇게 보이면 통과</a:t>
+                      </a:r>
+                    </a:p>
+                  </a:txBody>
+                  <a:tcPr>
+                    <a:solidFill>
+                      <a:srgbClr val="232A34"/>
+                    </a:solidFill>
+                  </a:tcPr>
+                </a:tc>
+              </a:tr>
+              <a:tr h="457200">
+                <a:tc>
+                  <a:txBody>
+                    <a:bodyPr/>
+                    <a:lstStyle/>
+                    <a:p>
+                      <a:pPr algn="l"/>
+                      <a:r>
+                        <a:rPr sz="1400">
+                          <a:solidFill>
+                            <a:srgbClr val="8A94A6"/>
+                          </a:solidFill>
+                          <a:latin typeface="맑은 고딕"/>
+                        </a:rPr>
+                        <a:t>일시정지 작동</a:t>
+                      </a:r>
+                    </a:p>
+                  </a:txBody>
+                  <a:tcPr marL="101600">
+                    <a:solidFill>
+                      <a:srgbClr val="161B22"/>
+                    </a:solidFill>
+                  </a:tcPr>
+                </a:tc>
+                <a:tc>
+                  <a:txBody>
+                    <a:bodyPr/>
+                    <a:lstStyle/>
+                    <a:p>
+                      <a:pPr algn="l"/>
+                      <a:r>
+                        <a:rPr sz="1400">
+                          <a:solidFill>
+                            <a:srgbClr val="8A94A6"/>
+                          </a:solidFill>
+                          <a:latin typeface="맑은 고딕"/>
+                        </a:rPr>
+                        <a:t>P·Esc·❙❙ 클릭 시 타이머 정지, 정지 중 칸 클릭 무반응 · [계속하기] 시 남은 시간 그대로 이어짐</a:t>
+                      </a:r>
+                    </a:p>
+                  </a:txBody>
+                  <a:tcPr marL="101600">
+                    <a:solidFill>
+                      <a:srgbClr val="161B22"/>
+                    </a:solidFill>
+                  </a:tcPr>
+                </a:tc>
+              </a:tr>
+              <a:tr h="457200">
+                <a:tc>
+                  <a:txBody>
+                    <a:bodyPr/>
+                    <a:lstStyle/>
+                    <a:p>
+                      <a:pPr algn="l"/>
+                      <a:r>
+                        <a:rPr sz="1400">
+                          <a:solidFill>
+                            <a:srgbClr val="8A94A6"/>
+                          </a:solidFill>
+                          <a:latin typeface="맑은 고딕"/>
+                        </a:rPr>
+                        <a:t>같은 링크 = 같은 문제</a:t>
+                      </a:r>
+                    </a:p>
+                  </a:txBody>
+                  <a:tcPr marL="101600">
+                    <a:solidFill>
+                      <a:srgbClr val="161B22"/>
+                    </a:solidFill>
+                  </a:tcPr>
+                </a:tc>
+                <a:tc>
+                  <a:txBody>
+                    <a:bodyPr/>
+                    <a:lstStyle/>
+                    <a:p>
+                      <a:pPr algn="l"/>
+                      <a:r>
+                        <a:rPr sz="1400">
+                          <a:solidFill>
+                            <a:srgbClr val="8A94A6"/>
+                          </a:solidFill>
+                          <a:latin typeface="맑은 고딕"/>
+                        </a:rPr>
+                        <a:t>[결과 공유]로 나온 ?c=코드 링크를 다른 기기·브라우저에서 열어도 1단계부터 완전히 동일</a:t>
+                      </a:r>
+                    </a:p>
+                  </a:txBody>
+                  <a:tcPr marL="101600">
+                    <a:solidFill>
+                      <a:srgbClr val="161B22"/>
+                    </a:solidFill>
+                  </a:tcPr>
+                </a:tc>
+              </a:tr>
+              <a:tr h="457200">
+                <a:tc>
+                  <a:txBody>
+                    <a:bodyPr/>
+                    <a:lstStyle/>
+                    <a:p>
+                      <a:pPr algn="l"/>
+                      <a:r>
+                        <a:rPr sz="1400">
+                          <a:solidFill>
+                            <a:srgbClr val="8A94A6"/>
+                          </a:solidFill>
+                          <a:latin typeface="맑은 고딕"/>
+                        </a:rPr>
+                        <a:t>콘솔 오류 없음</a:t>
+                      </a:r>
+                    </a:p>
+                  </a:txBody>
+                  <a:tcPr marL="101600">
+                    <a:solidFill>
+                      <a:srgbClr val="161B22"/>
+                    </a:solidFill>
+                  </a:tcPr>
+                </a:tc>
+                <a:tc>
+                  <a:txBody>
+                    <a:bodyPr/>
+                    <a:lstStyle/>
+                    <a:p>
+                      <a:pPr algn="l"/>
+                      <a:r>
+                        <a:rPr sz="1400">
+                          <a:solidFill>
+                            <a:srgbClr val="8A94A6"/>
+                          </a:solidFill>
+                          <a:latin typeface="맑은 고딕"/>
+                        </a:rPr>
+                        <a:t>F12 → Console 탭에 빨간 오류 0건</a:t>
+                      </a:r>
+                    </a:p>
+                  </a:txBody>
+                  <a:tcPr marL="101600">
+                    <a:solidFill>
+                      <a:srgbClr val="161B22"/>
+                    </a:solidFill>
+                  </a:tcPr>
+                </a:tc>
+              </a:tr>
+              <a:tr h="457200">
+                <a:tc>
+                  <a:txBody>
+                    <a:bodyPr/>
+                    <a:lstStyle/>
+                    <a:p>
+                      <a:pPr algn="l"/>
+                      <a:r>
+                        <a:rPr sz="1400">
+                          <a:solidFill>
+                            <a:srgbClr val="8A94A6"/>
+                          </a:solidFill>
+                          <a:latin typeface="맑은 고딕"/>
+                        </a:rPr>
+                        <a:t>두 해상도에서 안 잘림</a:t>
+                      </a:r>
+                    </a:p>
+                  </a:txBody>
+                  <a:tcPr marL="101600">
+                    <a:solidFill>
+                      <a:srgbClr val="161B22"/>
+                    </a:solidFill>
+                  </a:tcPr>
+                </a:tc>
+                <a:tc>
+                  <a:txBody>
+                    <a:bodyPr/>
+                    <a:lstStyle/>
+                    <a:p>
+                      <a:pPr algn="l"/>
+                      <a:r>
+                        <a:rPr sz="1400">
+                          <a:solidFill>
+                            <a:srgbClr val="8A94A6"/>
+                          </a:solidFill>
+                          <a:latin typeface="맑은 고딕"/>
+                        </a:rPr>
+                        <a:t>1366×768 / 1920×1080 모두 가로 스크롤 없이 격자·하단 3줄이 화면 안에 들어옴</a:t>
+                      </a:r>
+                    </a:p>
+                  </a:txBody>
+                  <a:tcPr marL="101600">
+                    <a:solidFill>
+                      <a:srgbClr val="161B22"/>
+                    </a:solidFill>
+                  </a:tcPr>
+                </a:tc>
+              </a:tr>
+            </a:tbl>
+          </a:graphicData>
+        </a:graphic>
+      </p:graphicFrame>
+      <p:sp>
+        <p:nvSpPr>
+          <p:cNvPr id="8" name="TextBox 7"/>
+          <p:cNvSpPr txBox="1"/>
+          <p:nvPr/>
+        </p:nvSpPr>
+        <p:spPr>
+          <a:xfrm>
+            <a:off x="640080" y="4343400"/>
+            <a:ext cx="10881360" cy="320040"/>
+          </a:xfrm>
+          <a:prstGeom prst="rect">
+            <a:avLst/>
+          </a:prstGeom>
+          <a:noFill/>
+        </p:spPr>
+        <p:txBody>
+          <a:bodyPr wrap="square">
+            <a:spAutoFit/>
+          </a:bodyPr>
+          <a:lstStyle/>
+          <a:p>
+            <a:pPr algn="l">
+              <a:spcAft>
+                <a:spcPts val="600"/>
+              </a:spcAft>
+            </a:pPr>
+            <a:r>
+              <a:rPr sz="1500" b="1">
+                <a:solidFill>
+                  <a:srgbClr val="5EE6C5"/>
+                </a:solidFill>
+                <a:latin typeface="맑은 고딕"/>
+              </a:rPr>
+              <a:t>추가로 볼 수 있는 것 (선택)</a:t>
+            </a:r>
+          </a:p>
+        </p:txBody>
+      </p:sp>
+      <p:sp>
+        <p:nvSpPr>
+          <p:cNvPr id="9" name="TextBox 8"/>
+          <p:cNvSpPr txBox="1"/>
+          <p:nvPr/>
+        </p:nvSpPr>
+        <p:spPr>
+          <a:xfrm>
+            <a:off x="640080" y="4709160"/>
+            <a:ext cx="10881360" cy="1828800"/>
+          </a:xfrm>
+          <a:prstGeom prst="rect">
+            <a:avLst/>
+          </a:prstGeom>
+          <a:noFill/>
+        </p:spPr>
+        <p:txBody>
+          <a:bodyPr wrap="square">
+            <a:spAutoFit/>
+          </a:bodyPr>
+          <a:lstStyle/>
+          <a:p>
+            <a:pPr>
+              <a:spcAft>
+                <a:spcPts val="1000"/>
+              </a:spcAft>
+            </a:pPr>
+            <a:r>
+              <a:rPr sz="1500">
+                <a:solidFill>
+                  <a:srgbClr val="E8EDF4"/>
+                </a:solidFill>
+                <a:latin typeface="맑은 고딕"/>
+              </a:rPr>
+              <a:t>▸ 오늘의 문제 — [오늘의 문제] 클릭 시 그날 날짜(KST 기준)로 고정된 문제, 같은 날이면 누구나 동일</a:t>
+            </a:r>
+          </a:p>
+          <a:p>
+            <a:pPr>
+              <a:spcAft>
+                <a:spcPts val="1000"/>
+              </a:spcAft>
+            </a:pPr>
+            <a:r>
+              <a:rPr sz="1500">
+                <a:solidFill>
+                  <a:srgbClr val="E8EDF4"/>
+                </a:solidFill>
+                <a:latin typeface="맑은 고딕"/>
+              </a:rPr>
+              <a:t>▸ 결과 카드 — 점수 + 마지막 문제 격자를 정답 표시 없이 포함해 보는 사람이 직접 풀어볼 수 있음</a:t>
+            </a:r>
+          </a:p>
+          <a:p>
+            <a:pPr>
+              <a:spcAft>
+                <a:spcPts val="1000"/>
+              </a:spcAft>
+            </a:pPr>
+            <a:r>
+              <a:rPr sz="1500">
+                <a:solidFill>
+                  <a:srgbClr val="E8EDF4"/>
+                </a:solidFill>
+                <a:latin typeface="맑은 고딕"/>
+              </a:rPr>
+              <a:t>▸ 차이의 종류 — 정답 시 화면 가운데에 `회전 · 0.42초`처럼 어떤 차이였는지 표시 (10종)</a:t>
+            </a:r>
+          </a:p>
+        </p:txBody>
+      </p:sp>
+    </p:spTree>
+  </p:cSld>
+  <p:clrMapOvr>
+    <a:masterClrMapping/>
+  </p:clrMapOvr>
+</p:sld>
+</file>
+
+<file path=ppt/slides/slide22.xml><?xml version="1.0" encoding="utf-8"?>
+<p:sld xmlns:a="http://schemas.openxmlformats.org/drawingml/2006/main" xmlns:p="http://schemas.openxmlformats.org/presentationml/2006/main" xmlns:r="http://schemas.openxmlformats.org/officeDocument/2006/relationships">
+  <p:cSld>
+    <p:spTree>
+      <p:nvGrpSpPr>
+        <p:cNvPr id="1" name=""/>
+        <p:cNvGrpSpPr/>
+        <p:nvPr/>
+      </p:nvGrpSpPr>
+      <p:grpSpPr/>
+      <p:sp>
+        <p:nvSpPr>
+          <p:cNvPr id="2" name="Rectangle 1"/>
+          <p:cNvSpPr/>
+          <p:nvPr/>
+        </p:nvSpPr>
+        <p:spPr>
+          <a:xfrm>
+            <a:off x="0" y="0"/>
+            <a:ext cx="12191695" cy="6858000"/>
+          </a:xfrm>
+          <a:prstGeom prst="rect">
+            <a:avLst/>
+          </a:prstGeom>
+          <a:solidFill>
+            <a:srgbClr val="0E1116"/>
+          </a:solidFill>
+          <a:ln>
+            <a:noFill/>
+          </a:ln>
+          <a:effectLst/>
+        </p:spPr>
+        <p:style>
+          <a:lnRef idx="1">
+            <a:schemeClr val="accent1"/>
+          </a:lnRef>
+          <a:fillRef idx="3">
+            <a:schemeClr val="accent1"/>
+          </a:fillRef>
+          <a:effectRef idx="2">
+            <a:schemeClr val="accent1"/>
+          </a:effectRef>
+          <a:fontRef idx="minor">
+            <a:schemeClr val="lt1"/>
+          </a:fontRef>
+        </p:style>
+        <p:txBody>
+          <a:bodyPr rtlCol="0" anchor="ctr"/>
+          <a:lstStyle/>
+          <a:p>
+            <a:pPr algn="ctr"/>
+          </a:p>
+        </p:txBody>
+      </p:sp>
+      <p:sp>
+        <p:nvSpPr>
+          <p:cNvPr id="3" name="TextBox 2"/>
+          <p:cNvSpPr txBox="1"/>
+          <p:nvPr/>
+        </p:nvSpPr>
+        <p:spPr>
+          <a:xfrm>
+            <a:off x="11430000" y="6492240"/>
+            <a:ext cx="640080" cy="274320"/>
+          </a:xfrm>
+          <a:prstGeom prst="rect">
+            <a:avLst/>
+          </a:prstGeom>
+          <a:noFill/>
+        </p:spPr>
+        <p:txBody>
+          <a:bodyPr wrap="square">
+            <a:spAutoFit/>
+          </a:bodyPr>
+          <a:lstStyle/>
+          <a:p>
+            <a:pPr algn="r">
+              <a:spcAft>
+                <a:spcPts val="600"/>
+              </a:spcAft>
+            </a:pPr>
+            <a:r>
+              <a:rPr sz="1100" b="0">
+                <a:solidFill>
+                  <a:srgbClr val="8A94A6"/>
+                </a:solidFill>
+                <a:latin typeface="맑은 고딕"/>
+              </a:rPr>
+              <a:t>22</a:t>
+            </a:r>
+          </a:p>
+        </p:txBody>
+      </p:sp>
+      <p:sp>
+        <p:nvSpPr>
+          <p:cNvPr id="4" name="TextBox 3"/>
+          <p:cNvSpPr txBox="1"/>
+          <p:nvPr/>
+        </p:nvSpPr>
+        <p:spPr>
+          <a:xfrm>
+            <a:off x="640080" y="320040"/>
+            <a:ext cx="10881360" cy="365760"/>
+          </a:xfrm>
+          <a:prstGeom prst="rect">
+            <a:avLst/>
+          </a:prstGeom>
+          <a:noFill/>
+        </p:spPr>
+        <p:txBody>
+          <a:bodyPr wrap="square">
+            <a:spAutoFit/>
+          </a:bodyPr>
+          <a:lstStyle/>
+          <a:p>
+            <a:pPr algn="l">
+              <a:spcAft>
+                <a:spcPts val="600"/>
+              </a:spcAft>
+            </a:pPr>
+            <a:r>
+              <a:rPr sz="1400" b="1">
+                <a:solidFill>
+                  <a:srgbClr val="5EE6C5"/>
+                </a:solidFill>
+                <a:latin typeface="맑은 고딕"/>
+              </a:rPr>
+              <a:t>VERIFICATION GUIDE</a:t>
+            </a:r>
+          </a:p>
+        </p:txBody>
+      </p:sp>
+      <p:sp>
+        <p:nvSpPr>
+          <p:cNvPr id="5" name="TextBox 4"/>
+          <p:cNvSpPr txBox="1"/>
+          <p:nvPr/>
+        </p:nvSpPr>
+        <p:spPr>
+          <a:xfrm>
+            <a:off x="640080" y="658368"/>
+            <a:ext cx="10881360" cy="822960"/>
+          </a:xfrm>
+          <a:prstGeom prst="rect">
+            <a:avLst/>
+          </a:prstGeom>
+          <a:noFill/>
+        </p:spPr>
+        <p:txBody>
+          <a:bodyPr wrap="square">
+            <a:spAutoFit/>
+          </a:bodyPr>
+          <a:lstStyle/>
+          <a:p>
+            <a:pPr algn="l">
+              <a:spcAft>
+                <a:spcPts val="600"/>
+              </a:spcAft>
+            </a:pPr>
+            <a:r>
+              <a:rPr sz="3200" b="1">
+                <a:solidFill>
+                  <a:srgbClr val="E8EDF4"/>
+                </a:solidFill>
+                <a:latin typeface="맑은 고딕"/>
+              </a:rPr>
+              <a:t>안 될 때 — 자주 묻는 질문</a:t>
+            </a:r>
+          </a:p>
+        </p:txBody>
+      </p:sp>
+      <p:sp>
+        <p:nvSpPr>
+          <p:cNvPr id="6" name="Rectangle 5"/>
+          <p:cNvSpPr/>
+          <p:nvPr/>
+        </p:nvSpPr>
+        <p:spPr>
+          <a:xfrm>
+            <a:off x="640080" y="1417320"/>
+            <a:ext cx="10881360" cy="25400"/>
+          </a:xfrm>
+          <a:prstGeom prst="rect">
+            <a:avLst/>
+          </a:prstGeom>
+          <a:solidFill>
+            <a:srgbClr val="232A34"/>
+          </a:solidFill>
+          <a:ln>
+            <a:noFill/>
+          </a:ln>
+          <a:effectLst/>
+        </p:spPr>
+        <p:style>
+          <a:lnRef idx="1">
+            <a:schemeClr val="accent1"/>
+          </a:lnRef>
+          <a:fillRef idx="3">
+            <a:schemeClr val="accent1"/>
+          </a:fillRef>
+          <a:effectRef idx="2">
+            <a:schemeClr val="accent1"/>
+          </a:effectRef>
+          <a:fontRef idx="minor">
+            <a:schemeClr val="lt1"/>
+          </a:fontRef>
+        </p:style>
+        <p:txBody>
+          <a:bodyPr rtlCol="0" anchor="ctr"/>
+          <a:lstStyle/>
+          <a:p>
+            <a:pPr algn="ctr"/>
+          </a:p>
+        </p:txBody>
+      </p:sp>
+      <p:graphicFrame>
+        <p:nvGraphicFramePr>
+          <p:cNvPr id="7" name="Table 6"/>
+          <p:cNvGraphicFramePr>
+            <a:graphicFrameLocks noGrp="1"/>
+          </p:cNvGraphicFramePr>
+          <p:nvPr/>
+        </p:nvGraphicFramePr>
+        <p:xfrm>
+          <a:off x="640080" y="1691640"/>
+          <a:ext cx="10881360" cy="4480560"/>
+        </p:xfrm>
+        <a:graphic>
+          <a:graphicData uri="http://schemas.openxmlformats.org/drawingml/2006/table">
+            <a:tbl>
+              <a:tblPr firstRow="1" bandRow="1">
+                <a:tableStyleId>{5C22544A-7EE6-4342-B048-85BDC9FD1C3A}</a:tableStyleId>
+              </a:tblPr>
+              <a:tblGrid>
+                <a:gridCol w="3108960"/>
+                <a:gridCol w="7772400"/>
+              </a:tblGrid>
+              <a:tr h="640080">
+                <a:tc>
+                  <a:txBody>
+                    <a:bodyPr/>
+                    <a:lstStyle/>
+                    <a:p>
+                      <a:pPr algn="l"/>
+                      <a:r>
+                        <a:rPr b="1" sz="1350">
+                          <a:solidFill>
+                            <a:srgbClr val="E8EDF4"/>
+                          </a:solidFill>
+                          <a:latin typeface="맑은 고딕"/>
+                        </a:rPr>
+                        <a:t>증상</a:t>
+                      </a:r>
+                    </a:p>
+                  </a:txBody>
+                  <a:tcPr>
+                    <a:solidFill>
+                      <a:srgbClr val="232A34"/>
+                    </a:solidFill>
+                  </a:tcPr>
+                </a:tc>
+                <a:tc>
+                  <a:txBody>
+                    <a:bodyPr/>
+                    <a:lstStyle/>
+                    <a:p>
+                      <a:pPr algn="l"/>
+                      <a:r>
+                        <a:rPr b="1" sz="1350">
+                          <a:solidFill>
+                            <a:srgbClr val="E8EDF4"/>
+                          </a:solidFill>
+                          <a:latin typeface="맑은 고딕"/>
+                        </a:rPr>
+                        <a:t>해결 방법</a:t>
+                      </a:r>
+                    </a:p>
+                  </a:txBody>
+                  <a:tcPr>
+                    <a:solidFill>
+                      <a:srgbClr val="232A34"/>
+                    </a:solidFill>
+                  </a:tcPr>
+                </a:tc>
+              </a:tr>
+              <a:tr h="640080">
+                <a:tc>
+                  <a:txBody>
+                    <a:bodyPr/>
+                    <a:lstStyle/>
+                    <a:p>
+                      <a:pPr algn="l"/>
+                      <a:r>
+                        <a:rPr sz="1350">
+                          <a:solidFill>
+                            <a:srgbClr val="8A94A6"/>
+                          </a:solidFill>
+                          <a:latin typeface="맑은 고딕"/>
+                        </a:rPr>
+                        <a:t>화면이 비어 있다</a:t>
+                      </a:r>
+                    </a:p>
+                  </a:txBody>
+                  <a:tcPr marL="101600">
+                    <a:solidFill>
+                      <a:srgbClr val="161B22"/>
+                    </a:solidFill>
+                  </a:tcPr>
+                </a:tc>
+                <a:tc>
+                  <a:txBody>
+                    <a:bodyPr/>
+                    <a:lstStyle/>
+                    <a:p>
+                      <a:pPr algn="l"/>
+                      <a:r>
+                        <a:rPr sz="1350">
+                          <a:solidFill>
+                            <a:srgbClr val="8A94A6"/>
+                          </a:solidFill>
+                          <a:latin typeface="맑은 고딕"/>
+                        </a:rPr>
+                        <a:t>Ctrl+F5로 강력 새로고침</a:t>
+                      </a:r>
+                    </a:p>
+                  </a:txBody>
+                  <a:tcPr marL="101600">
+                    <a:solidFill>
+                      <a:srgbClr val="161B22"/>
+                    </a:solidFill>
+                  </a:tcPr>
+                </a:tc>
+              </a:tr>
+              <a:tr h="640080">
+                <a:tc>
+                  <a:txBody>
+                    <a:bodyPr/>
+                    <a:lstStyle/>
+                    <a:p>
+                      <a:pPr algn="l"/>
+                      <a:r>
+                        <a:rPr sz="1350">
+                          <a:solidFill>
+                            <a:srgbClr val="8A94A6"/>
+                          </a:solidFill>
+                          <a:latin typeface="맑은 고딕"/>
+                        </a:rPr>
+                        <a:t>로컬에서 열었더니 안 나온다</a:t>
+                      </a:r>
+                    </a:p>
+                  </a:txBody>
+                  <a:tcPr marL="101600">
+                    <a:solidFill>
+                      <a:srgbClr val="161B22"/>
+                    </a:solidFill>
+                  </a:tcPr>
+                </a:tc>
+                <a:tc>
+                  <a:txBody>
+                    <a:bodyPr/>
+                    <a:lstStyle/>
+                    <a:p>
+                      <a:pPr algn="l"/>
+                      <a:r>
+                        <a:rPr sz="1350">
+                          <a:solidFill>
+                            <a:srgbClr val="8A94A6"/>
+                          </a:solidFill>
+                          <a:latin typeface="맑은 고딕"/>
+                        </a:rPr>
+                        <a:t>index.html 더블클릭은 동작 안 함 — ES 모듈은 file://에서 차단되므로 서버로 열 것</a:t>
+                      </a:r>
+                    </a:p>
+                  </a:txBody>
+                  <a:tcPr marL="101600">
+                    <a:solidFill>
+                      <a:srgbClr val="161B22"/>
+                    </a:solidFill>
+                  </a:tcPr>
+                </a:tc>
+              </a:tr>
+              <a:tr h="640080">
+                <a:tc>
+                  <a:txBody>
+                    <a:bodyPr/>
+                    <a:lstStyle/>
+                    <a:p>
+                      <a:pPr algn="l"/>
+                      <a:r>
+                        <a:rPr sz="1350">
+                          <a:solidFill>
+                            <a:srgbClr val="8A94A6"/>
+                          </a:solidFill>
+                          <a:latin typeface="맑은 고딕"/>
+                        </a:rPr>
+                        <a:t>소리가 안 난다</a:t>
+                      </a:r>
+                    </a:p>
+                  </a:txBody>
+                  <a:tcPr marL="101600">
+                    <a:solidFill>
+                      <a:srgbClr val="161B22"/>
+                    </a:solidFill>
+                  </a:tcPr>
+                </a:tc>
+                <a:tc>
+                  <a:txBody>
+                    <a:bodyPr/>
+                    <a:lstStyle/>
+                    <a:p>
+                      <a:pPr algn="l"/>
+                      <a:r>
+                        <a:rPr sz="1350">
+                          <a:solidFill>
+                            <a:srgbClr val="8A94A6"/>
+                          </a:solidFill>
+                          <a:latin typeface="맑은 고딕"/>
+                        </a:rPr>
+                        <a:t>브라우저는 사용자 입력 전엔 소리를 못 냄 — [시작하기] 클릭 후에도 안 나면 ⚙ 소리 설정·시스템 볼륨 확인</a:t>
+                      </a:r>
+                    </a:p>
+                  </a:txBody>
+                  <a:tcPr marL="101600">
+                    <a:solidFill>
+                      <a:srgbClr val="161B22"/>
+                    </a:solidFill>
+                  </a:tcPr>
+                </a:tc>
+              </a:tr>
+              <a:tr h="640080">
+                <a:tc>
+                  <a:txBody>
+                    <a:bodyPr/>
+                    <a:lstStyle/>
+                    <a:p>
+                      <a:pPr algn="l"/>
+                      <a:r>
+                        <a:rPr sz="1350">
+                          <a:solidFill>
+                            <a:srgbClr val="8A94A6"/>
+                          </a:solidFill>
+                          <a:latin typeface="맑은 고딕"/>
+                        </a:rPr>
+                        <a:t>키보드를 눌러도 반응이 없다</a:t>
+                      </a:r>
+                    </a:p>
+                  </a:txBody>
+                  <a:tcPr marL="101600">
+                    <a:solidFill>
+                      <a:srgbClr val="161B22"/>
+                    </a:solidFill>
+                  </a:tcPr>
+                </a:tc>
+                <a:tc>
+                  <a:txBody>
+                    <a:bodyPr/>
+                    <a:lstStyle/>
+                    <a:p>
+                      <a:pPr algn="l"/>
+                      <a:r>
+                        <a:rPr sz="1350">
+                          <a:solidFill>
+                            <a:srgbClr val="8A94A6"/>
+                          </a:solidFill>
+                          <a:latin typeface="맑은 고딕"/>
+                        </a:rPr>
+                        <a:t>포커스가 버튼에 남아있을 수 있음 — 격자 칸을 한 번 클릭한 뒤 방향키 사용</a:t>
+                      </a:r>
+                    </a:p>
+                  </a:txBody>
+                  <a:tcPr marL="101600">
+                    <a:solidFill>
+                      <a:srgbClr val="161B22"/>
+                    </a:solidFill>
+                  </a:tcPr>
+                </a:tc>
+              </a:tr>
+              <a:tr h="640080">
+                <a:tc>
+                  <a:txBody>
+                    <a:bodyPr/>
+                    <a:lstStyle/>
+                    <a:p>
+                      <a:pPr algn="l"/>
+                      <a:r>
+                        <a:rPr sz="1350">
+                          <a:solidFill>
+                            <a:srgbClr val="8A94A6"/>
+                          </a:solidFill>
+                          <a:latin typeface="맑은 고딕"/>
+                        </a:rPr>
+                        <a:t>게임이 저절로 멈춘 것 같다</a:t>
+                      </a:r>
+                    </a:p>
+                  </a:txBody>
+                  <a:tcPr marL="101600">
+                    <a:solidFill>
+                      <a:srgbClr val="161B22"/>
+                    </a:solidFill>
+                  </a:tcPr>
+                </a:tc>
+                <a:tc>
+                  <a:txBody>
+                    <a:bodyPr/>
+                    <a:lstStyle/>
+                    <a:p>
+                      <a:pPr algn="l"/>
+                      <a:r>
+                        <a:rPr sz="1350">
+                          <a:solidFill>
+                            <a:srgbClr val="8A94A6"/>
+                          </a:solidFill>
+                          <a:latin typeface="맑은 고딕"/>
+                        </a:rPr>
+                        <a:t>P나 Esc를 눌렀는지 확인 — 일시정지 화면에서 [계속하기] 클릭</a:t>
+                      </a:r>
+                    </a:p>
+                  </a:txBody>
+                  <a:tcPr marL="101600">
+                    <a:solidFill>
+                      <a:srgbClr val="161B22"/>
+                    </a:solidFill>
+                  </a:tcPr>
+                </a:tc>
+              </a:tr>
+              <a:tr h="640080">
+                <a:tc>
+                  <a:txBody>
+                    <a:bodyPr/>
+                    <a:lstStyle/>
+                    <a:p>
+                      <a:pPr algn="l"/>
+                      <a:r>
+                        <a:rPr sz="1350">
+                          <a:solidFill>
+                            <a:srgbClr val="8A94A6"/>
+                          </a:solidFill>
+                          <a:latin typeface="맑은 고딕"/>
+                        </a:rPr>
+                        <a:t>기록이 이상하다</a:t>
+                      </a:r>
+                    </a:p>
+                  </a:txBody>
+                  <a:tcPr marL="101600">
+                    <a:solidFill>
+                      <a:srgbClr val="161B22"/>
+                    </a:solidFill>
+                  </a:tcPr>
+                </a:tc>
+                <a:tc>
+                  <a:txBody>
+                    <a:bodyPr/>
+                    <a:lstStyle/>
+                    <a:p>
+                      <a:pPr algn="l"/>
+                      <a:r>
+                        <a:rPr sz="1350">
+                          <a:solidFill>
+                            <a:srgbClr val="8A94A6"/>
+                          </a:solidFill>
+                          <a:latin typeface="맑은 고딕"/>
+                        </a:rPr>
+                        <a:t>⚙ → [기록 초기화] — 저장값이 깨져도 게임은 기본값으로 정상 실행됨</a:t>
+                      </a:r>
+                    </a:p>
+                  </a:txBody>
+                  <a:tcPr marL="101600">
+                    <a:solidFill>
+                      <a:srgbClr val="161B22"/>
+                    </a:solidFill>
+                  </a:tcPr>
+                </a:tc>
+              </a:tr>
+            </a:tbl>
+          </a:graphicData>
+        </a:graphic>
+      </p:graphicFrame>
+    </p:spTree>
+  </p:cSld>
+  <p:clrMapOvr>
+    <a:masterClrMapping/>
+  </p:clrMapOvr>
+</p:sld>
+</file>
+
+<file path=ppt/slides/slide23.xml><?xml version="1.0" encoding="utf-8"?>
+<p:sld xmlns:a="http://schemas.openxmlformats.org/drawingml/2006/main" xmlns:p="http://schemas.openxmlformats.org/presentationml/2006/main" xmlns:r="http://schemas.openxmlformats.org/officeDocument/2006/relationships">
+  <p:cSld>
+    <p:spTree>
+      <p:nvGrpSpPr>
+        <p:cNvPr id="1" name=""/>
+        <p:cNvGrpSpPr/>
+        <p:nvPr/>
+      </p:nvGrpSpPr>
+      <p:grpSpPr/>
+      <p:sp>
+        <p:nvSpPr>
+          <p:cNvPr id="2" name="Rectangle 1"/>
+          <p:cNvSpPr/>
+          <p:nvPr/>
+        </p:nvSpPr>
+        <p:spPr>
+          <a:xfrm>
+            <a:off x="0" y="0"/>
+            <a:ext cx="12191695" cy="6858000"/>
+          </a:xfrm>
+          <a:prstGeom prst="rect">
+            <a:avLst/>
+          </a:prstGeom>
+          <a:solidFill>
+            <a:srgbClr val="0E1116"/>
+          </a:solidFill>
+          <a:ln>
+            <a:noFill/>
+          </a:ln>
+          <a:effectLst/>
+        </p:spPr>
+        <p:style>
+          <a:lnRef idx="1">
+            <a:schemeClr val="accent1"/>
+          </a:lnRef>
+          <a:fillRef idx="3">
+            <a:schemeClr val="accent1"/>
+          </a:fillRef>
+          <a:effectRef idx="2">
+            <a:schemeClr val="accent1"/>
+          </a:effectRef>
+          <a:fontRef idx="minor">
+            <a:schemeClr val="lt1"/>
+          </a:fontRef>
+        </p:style>
+        <p:txBody>
+          <a:bodyPr rtlCol="0" anchor="ctr"/>
+          <a:lstStyle/>
+          <a:p>
+            <a:pPr algn="ctr"/>
+          </a:p>
+        </p:txBody>
+      </p:sp>
+      <p:sp>
+        <p:nvSpPr>
+          <p:cNvPr id="3" name="TextBox 2"/>
+          <p:cNvSpPr txBox="1"/>
+          <p:nvPr/>
+        </p:nvSpPr>
+        <p:spPr>
+          <a:xfrm>
+            <a:off x="11430000" y="6492240"/>
+            <a:ext cx="640080" cy="274320"/>
+          </a:xfrm>
+          <a:prstGeom prst="rect">
+            <a:avLst/>
+          </a:prstGeom>
+          <a:noFill/>
+        </p:spPr>
+        <p:txBody>
+          <a:bodyPr wrap="square">
+            <a:spAutoFit/>
+          </a:bodyPr>
+          <a:lstStyle/>
+          <a:p>
+            <a:pPr algn="r">
+              <a:spcAft>
+                <a:spcPts val="600"/>
+              </a:spcAft>
+            </a:pPr>
+            <a:r>
+              <a:rPr sz="1100" b="0">
+                <a:solidFill>
+                  <a:srgbClr val="8A94A6"/>
+                </a:solidFill>
+                <a:latin typeface="맑은 고딕"/>
+              </a:rPr>
+              <a:t>23</a:t>
+            </a:r>
+          </a:p>
+        </p:txBody>
+      </p:sp>
+      <p:sp>
+        <p:nvSpPr>
+          <p:cNvPr id="4" name="TextBox 3"/>
+          <p:cNvSpPr txBox="1"/>
+          <p:nvPr/>
+        </p:nvSpPr>
+        <p:spPr>
+          <a:xfrm>
+            <a:off x="640080" y="320040"/>
+            <a:ext cx="10881360" cy="365760"/>
+          </a:xfrm>
+          <a:prstGeom prst="rect">
+            <a:avLst/>
+          </a:prstGeom>
+          <a:noFill/>
+        </p:spPr>
+        <p:txBody>
+          <a:bodyPr wrap="square">
+            <a:spAutoFit/>
+          </a:bodyPr>
+          <a:lstStyle/>
+          <a:p>
+            <a:pPr algn="l">
+              <a:spcAft>
+                <a:spcPts val="600"/>
+              </a:spcAft>
+            </a:pPr>
+            <a:r>
+              <a:rPr sz="1400" b="1">
+                <a:solidFill>
+                  <a:srgbClr val="5EE6C5"/>
+                </a:solidFill>
+                <a:latin typeface="맑은 고딕"/>
+              </a:rPr>
+              <a:t>필수 체크리스트 · 증거 1/2</a:t>
+            </a:r>
+          </a:p>
+        </p:txBody>
+      </p:sp>
+      <p:sp>
+        <p:nvSpPr>
+          <p:cNvPr id="5" name="TextBox 4"/>
+          <p:cNvSpPr txBox="1"/>
+          <p:nvPr/>
+        </p:nvSpPr>
+        <p:spPr>
+          <a:xfrm>
+            <a:off x="640080" y="658368"/>
+            <a:ext cx="10881360" cy="822960"/>
+          </a:xfrm>
+          <a:prstGeom prst="rect">
+            <a:avLst/>
+          </a:prstGeom>
+          <a:noFill/>
+        </p:spPr>
+        <p:txBody>
+          <a:bodyPr wrap="square">
+            <a:spAutoFit/>
+          </a:bodyPr>
+          <a:lstStyle/>
+          <a:p>
+            <a:pPr algn="l">
+              <a:spcAft>
+                <a:spcPts val="600"/>
+              </a:spcAft>
+            </a:pPr>
+            <a:r>
+              <a:rPr sz="3200" b="1">
+                <a:solidFill>
+                  <a:srgbClr val="E8EDF4"/>
+                </a:solidFill>
+                <a:latin typeface="맑은 고딕"/>
+              </a:rPr>
+              <a:t>학생 자체 점검 — 스크린샷 증거 (1~6)</a:t>
+            </a:r>
+          </a:p>
+        </p:txBody>
+      </p:sp>
+      <p:sp>
+        <p:nvSpPr>
+          <p:cNvPr id="6" name="Rectangle 5"/>
+          <p:cNvSpPr/>
+          <p:nvPr/>
+        </p:nvSpPr>
+        <p:spPr>
+          <a:xfrm>
+            <a:off x="640080" y="1417320"/>
+            <a:ext cx="10881360" cy="25400"/>
+          </a:xfrm>
+          <a:prstGeom prst="rect">
+            <a:avLst/>
+          </a:prstGeom>
+          <a:solidFill>
+            <a:srgbClr val="232A34"/>
+          </a:solidFill>
+          <a:ln>
+            <a:noFill/>
+          </a:ln>
+          <a:effectLst/>
+        </p:spPr>
+        <p:style>
+          <a:lnRef idx="1">
+            <a:schemeClr val="accent1"/>
+          </a:lnRef>
+          <a:fillRef idx="3">
+            <a:schemeClr val="accent1"/>
+          </a:fillRef>
+          <a:effectRef idx="2">
+            <a:schemeClr val="accent1"/>
+          </a:effectRef>
+          <a:fontRef idx="minor">
+            <a:schemeClr val="lt1"/>
+          </a:fontRef>
+        </p:style>
+        <p:txBody>
+          <a:bodyPr rtlCol="0" anchor="ctr"/>
+          <a:lstStyle/>
+          <a:p>
+            <a:pPr algn="ctr"/>
+          </a:p>
+        </p:txBody>
+      </p:sp>
+      <p:sp>
+        <p:nvSpPr>
+          <p:cNvPr id="7" name="Rounded Rectangle 6"/>
+          <p:cNvSpPr/>
+          <p:nvPr/>
+        </p:nvSpPr>
+        <p:spPr>
+          <a:xfrm>
+            <a:off x="457200" y="1600200"/>
+            <a:ext cx="3657600" cy="2395728"/>
+          </a:xfrm>
+          <a:prstGeom prst="roundRect">
+            <a:avLst/>
+          </a:prstGeom>
+          <a:solidFill>
+            <a:srgbClr val="161B22"/>
+          </a:solidFill>
+          <a:ln w="9525">
+            <a:solidFill>
+              <a:srgbClr val="232A34"/>
+            </a:solidFill>
+          </a:ln>
+          <a:effectLst/>
+        </p:spPr>
+        <p:style>
+          <a:lnRef idx="1">
+            <a:schemeClr val="accent1"/>
+          </a:lnRef>
+          <a:fillRef idx="3">
+            <a:schemeClr val="accent1"/>
+          </a:fillRef>
+          <a:effectRef idx="2">
+            <a:schemeClr val="accent1"/>
+          </a:effectRef>
+          <a:fontRef idx="minor">
+            <a:schemeClr val="lt1"/>
+          </a:fontRef>
+        </p:style>
+        <p:txBody>
+          <a:bodyPr rtlCol="0" anchor="ctr"/>
+          <a:lstStyle/>
+          <a:p>
+            <a:pPr algn="ctr"/>
+          </a:p>
+        </p:txBody>
+      </p:sp>
+      <p:sp>
+        <p:nvSpPr>
+          <p:cNvPr id="8" name="TextBox 7"/>
+          <p:cNvSpPr txBox="1"/>
+          <p:nvPr/>
+        </p:nvSpPr>
+        <p:spPr>
+          <a:xfrm>
+            <a:off x="566928" y="1655064"/>
+            <a:ext cx="3438144" cy="365760"/>
+          </a:xfrm>
+          <a:prstGeom prst="rect">
+            <a:avLst/>
+          </a:prstGeom>
+          <a:noFill/>
+        </p:spPr>
+        <p:txBody>
+          <a:bodyPr wrap="square">
+            <a:spAutoFit/>
+          </a:bodyPr>
+          <a:lstStyle/>
+          <a:p>
+            <a:pPr algn="l"/>
+            <a:r>
+              <a:rPr sz="1250" b="1">
+                <a:solidFill>
+                  <a:srgbClr val="5EE6C5"/>
+                </a:solidFill>
+                <a:latin typeface="맑은 고딕"/>
+              </a:rPr>
+              <a:t>1. 시작→종료→재시작</a:t>
+            </a:r>
+          </a:p>
+        </p:txBody>
+      </p:sp>
+      <p:pic>
+        <p:nvPicPr>
+          <p:cNvPr id="9" name="Picture 8" descr="01_start_after.png"/>
+          <p:cNvPicPr>
+            <a:picLocks noChangeAspect="1"/>
+          </p:cNvPicPr>
+          <p:nvPr/>
+        </p:nvPicPr>
+        <p:blipFill>
+          <a:blip r:embed="rId2"/>
+          <a:stretch>
+            <a:fillRect/>
+          </a:stretch>
+        </p:blipFill>
+        <p:spPr>
+          <a:xfrm>
+            <a:off x="1386075" y="2057400"/>
+            <a:ext cx="845061" cy="1828800"/>
+          </a:xfrm>
+          <a:prstGeom prst="rect">
+            <a:avLst/>
+          </a:prstGeom>
+        </p:spPr>
+      </p:pic>
+      <p:pic>
+        <p:nvPicPr>
+          <p:cNvPr id="10" name="Picture 9" descr="08_gameover_after.png"/>
+          <p:cNvPicPr>
+            <a:picLocks noChangeAspect="1"/>
+          </p:cNvPicPr>
+          <p:nvPr/>
+        </p:nvPicPr>
+        <p:blipFill>
+          <a:blip r:embed="rId3"/>
+          <a:stretch>
+            <a:fillRect/>
+          </a:stretch>
+        </p:blipFill>
+        <p:spPr>
+          <a:xfrm>
+            <a:off x="2340864" y="2057400"/>
+            <a:ext cx="845061" cy="1828800"/>
+          </a:xfrm>
+          <a:prstGeom prst="rect">
+            <a:avLst/>
+          </a:prstGeom>
+        </p:spPr>
+      </p:pic>
+      <p:sp>
+        <p:nvSpPr>
+          <p:cNvPr id="11" name="Rounded Rectangle 10"/>
+          <p:cNvSpPr/>
+          <p:nvPr/>
+        </p:nvSpPr>
+        <p:spPr>
+          <a:xfrm>
+            <a:off x="4251960" y="1600200"/>
+            <a:ext cx="3657600" cy="2395728"/>
+          </a:xfrm>
+          <a:prstGeom prst="roundRect">
+            <a:avLst/>
+          </a:prstGeom>
+          <a:solidFill>
+            <a:srgbClr val="161B22"/>
+          </a:solidFill>
+          <a:ln w="9525">
+            <a:solidFill>
+              <a:srgbClr val="232A34"/>
+            </a:solidFill>
+          </a:ln>
+          <a:effectLst/>
+        </p:spPr>
+        <p:style>
+          <a:lnRef idx="1">
+            <a:schemeClr val="accent1"/>
+          </a:lnRef>
+          <a:fillRef idx="3">
+            <a:schemeClr val="accent1"/>
+          </a:fillRef>
+          <a:effectRef idx="2">
+            <a:schemeClr val="accent1"/>
+          </a:effectRef>
+          <a:fontRef idx="minor">
+            <a:schemeClr val="lt1"/>
+          </a:fontRef>
+        </p:style>
+        <p:txBody>
+          <a:bodyPr rtlCol="0" anchor="ctr"/>
+          <a:lstStyle/>
+          <a:p>
+            <a:pPr algn="ctr"/>
+          </a:p>
+        </p:txBody>
+      </p:sp>
+      <p:sp>
+        <p:nvSpPr>
+          <p:cNvPr id="12" name="TextBox 11"/>
+          <p:cNvSpPr txBox="1"/>
+          <p:nvPr/>
+        </p:nvSpPr>
+        <p:spPr>
+          <a:xfrm>
+            <a:off x="4361688" y="1655064"/>
+            <a:ext cx="3438144" cy="365760"/>
+          </a:xfrm>
+          <a:prstGeom prst="rect">
+            <a:avLst/>
+          </a:prstGeom>
+          <a:noFill/>
+        </p:spPr>
+        <p:txBody>
+          <a:bodyPr wrap="square">
+            <a:spAutoFit/>
+          </a:bodyPr>
+          <a:lstStyle/>
+          <a:p>
+            <a:pPr algn="l"/>
+            <a:r>
+              <a:rPr sz="1250" b="1">
+                <a:solidFill>
+                  <a:srgbClr val="5EE6C5"/>
+                </a:solidFill>
+                <a:latin typeface="맑은 고딕"/>
+              </a:rPr>
+              <a:t>2. 성공·실패 상태 구분</a:t>
+            </a:r>
+          </a:p>
+        </p:txBody>
+      </p:sp>
+      <p:pic>
+        <p:nvPicPr>
+          <p:cNvPr id="13" name="Picture 12" descr="02_correct_after.png"/>
+          <p:cNvPicPr>
+            <a:picLocks noChangeAspect="1"/>
+          </p:cNvPicPr>
+          <p:nvPr/>
+        </p:nvPicPr>
+        <p:blipFill>
+          <a:blip r:embed="rId4"/>
+          <a:stretch>
+            <a:fillRect/>
+          </a:stretch>
+        </p:blipFill>
+        <p:spPr>
+          <a:xfrm>
+            <a:off x="5180835" y="2057400"/>
+            <a:ext cx="845061" cy="1828800"/>
+          </a:xfrm>
+          <a:prstGeom prst="rect">
+            <a:avLst/>
+          </a:prstGeom>
+        </p:spPr>
+      </p:pic>
+      <p:pic>
+        <p:nvPicPr>
+          <p:cNvPr id="14" name="Picture 13" descr="03_wrong_after.png"/>
+          <p:cNvPicPr>
+            <a:picLocks noChangeAspect="1"/>
+          </p:cNvPicPr>
+          <p:nvPr/>
+        </p:nvPicPr>
+        <p:blipFill>
+          <a:blip r:embed="rId5"/>
+          <a:stretch>
+            <a:fillRect/>
+          </a:stretch>
+        </p:blipFill>
+        <p:spPr>
+          <a:xfrm>
+            <a:off x="6135624" y="2057400"/>
+            <a:ext cx="845061" cy="1828800"/>
+          </a:xfrm>
+          <a:prstGeom prst="rect">
+            <a:avLst/>
+          </a:prstGeom>
+        </p:spPr>
+      </p:pic>
+      <p:sp>
+        <p:nvSpPr>
+          <p:cNvPr id="15" name="Rounded Rectangle 14"/>
+          <p:cNvSpPr/>
+          <p:nvPr/>
+        </p:nvSpPr>
+        <p:spPr>
+          <a:xfrm>
+            <a:off x="8046720" y="1600200"/>
+            <a:ext cx="3657600" cy="2395728"/>
+          </a:xfrm>
+          <a:prstGeom prst="roundRect">
+            <a:avLst/>
+          </a:prstGeom>
+          <a:solidFill>
+            <a:srgbClr val="161B22"/>
+          </a:solidFill>
+          <a:ln w="9525">
+            <a:solidFill>
+              <a:srgbClr val="232A34"/>
+            </a:solidFill>
+          </a:ln>
+          <a:effectLst/>
+        </p:spPr>
+        <p:style>
+          <a:lnRef idx="1">
+            <a:schemeClr val="accent1"/>
+          </a:lnRef>
+          <a:fillRef idx="3">
+            <a:schemeClr val="accent1"/>
+          </a:fillRef>
+          <a:effectRef idx="2">
+            <a:schemeClr val="accent1"/>
+          </a:effectRef>
+          <a:fontRef idx="minor">
+            <a:schemeClr val="lt1"/>
+          </a:fontRef>
+        </p:style>
+        <p:txBody>
+          <a:bodyPr rtlCol="0" anchor="ctr"/>
+          <a:lstStyle/>
+          <a:p>
+            <a:pPr algn="ctr"/>
+          </a:p>
+        </p:txBody>
+      </p:sp>
+      <p:sp>
+        <p:nvSpPr>
+          <p:cNvPr id="16" name="TextBox 15"/>
+          <p:cNvSpPr txBox="1"/>
+          <p:nvPr/>
+        </p:nvSpPr>
+        <p:spPr>
+          <a:xfrm>
+            <a:off x="8156448" y="1655064"/>
+            <a:ext cx="3438144" cy="365760"/>
+          </a:xfrm>
+          <a:prstGeom prst="rect">
+            <a:avLst/>
+          </a:prstGeom>
+          <a:noFill/>
+        </p:spPr>
+        <p:txBody>
+          <a:bodyPr wrap="square">
+            <a:spAutoFit/>
+          </a:bodyPr>
+          <a:lstStyle/>
+          <a:p>
+            <a:pPr algn="l"/>
+            <a:r>
+              <a:rPr sz="1250" b="1">
+                <a:solidFill>
+                  <a:srgbClr val="5EE6C5"/>
+                </a:solidFill>
+                <a:latin typeface="맑은 고딕"/>
+              </a:rPr>
+              <a:t>3. 2해상도 잘림·넘침 없음</a:t>
+            </a:r>
+          </a:p>
+        </p:txBody>
+      </p:sp>
+      <p:pic>
+        <p:nvPicPr>
+          <p:cNvPr id="17" name="Picture 16" descr="resolution_1366x768.png"/>
+          <p:cNvPicPr>
+            <a:picLocks noChangeAspect="1"/>
+          </p:cNvPicPr>
+          <p:nvPr/>
+        </p:nvPicPr>
+        <p:blipFill>
+          <a:blip r:embed="rId6"/>
+          <a:stretch>
+            <a:fillRect/>
+          </a:stretch>
+        </p:blipFill>
+        <p:spPr>
+          <a:xfrm>
+            <a:off x="8156449" y="2057400"/>
+            <a:ext cx="1664613" cy="935888"/>
+          </a:xfrm>
+          <a:prstGeom prst="rect">
+            <a:avLst/>
+          </a:prstGeom>
+        </p:spPr>
+      </p:pic>
+      <p:pic>
+        <p:nvPicPr>
+          <p:cNvPr id="18" name="Picture 17" descr="resolution_1920x1080.png"/>
+          <p:cNvPicPr>
+            <a:picLocks noChangeAspect="1"/>
+          </p:cNvPicPr>
+          <p:nvPr/>
+        </p:nvPicPr>
+        <p:blipFill>
+          <a:blip r:embed="rId7"/>
+          <a:stretch>
+            <a:fillRect/>
+          </a:stretch>
+        </p:blipFill>
+        <p:spPr>
+          <a:xfrm>
+            <a:off x="9930790" y="2057400"/>
+            <a:ext cx="1663800" cy="935888"/>
+          </a:xfrm>
+          <a:prstGeom prst="rect">
+            <a:avLst/>
+          </a:prstGeom>
+        </p:spPr>
+      </p:pic>
+      <p:sp>
+        <p:nvSpPr>
+          <p:cNvPr id="19" name="Rounded Rectangle 18"/>
+          <p:cNvSpPr/>
+          <p:nvPr/>
+        </p:nvSpPr>
+        <p:spPr>
+          <a:xfrm>
+            <a:off x="457200" y="4133088"/>
+            <a:ext cx="3657600" cy="2395728"/>
+          </a:xfrm>
+          <a:prstGeom prst="roundRect">
+            <a:avLst/>
+          </a:prstGeom>
+          <a:solidFill>
+            <a:srgbClr val="161B22"/>
+          </a:solidFill>
+          <a:ln w="9525">
+            <a:solidFill>
+              <a:srgbClr val="232A34"/>
+            </a:solidFill>
+          </a:ln>
+          <a:effectLst/>
+        </p:spPr>
+        <p:style>
+          <a:lnRef idx="1">
+            <a:schemeClr val="accent1"/>
+          </a:lnRef>
+          <a:fillRef idx="3">
+            <a:schemeClr val="accent1"/>
+          </a:fillRef>
+          <a:effectRef idx="2">
+            <a:schemeClr val="accent1"/>
+          </a:effectRef>
+          <a:fontRef idx="minor">
+            <a:schemeClr val="lt1"/>
+          </a:fontRef>
+        </p:style>
+        <p:txBody>
+          <a:bodyPr rtlCol="0" anchor="ctr"/>
+          <a:lstStyle/>
+          <a:p>
+            <a:pPr algn="ctr"/>
+          </a:p>
+        </p:txBody>
+      </p:sp>
+      <p:sp>
+        <p:nvSpPr>
+          <p:cNvPr id="20" name="TextBox 19"/>
+          <p:cNvSpPr txBox="1"/>
+          <p:nvPr/>
+        </p:nvSpPr>
+        <p:spPr>
+          <a:xfrm>
+            <a:off x="566928" y="4187952"/>
+            <a:ext cx="3438144" cy="365760"/>
+          </a:xfrm>
+          <a:prstGeom prst="rect">
+            <a:avLst/>
+          </a:prstGeom>
+          <a:noFill/>
+        </p:spPr>
+        <p:txBody>
+          <a:bodyPr wrap="square">
+            <a:spAutoFit/>
+          </a:bodyPr>
+          <a:lstStyle/>
+          <a:p>
+            <a:pPr algn="l"/>
+            <a:r>
+              <a:rPr sz="1250" b="1">
+                <a:solidFill>
+                  <a:srgbClr val="5EE6C5"/>
+                </a:solidFill>
+                <a:latin typeface="맑은 고딕"/>
+              </a:rPr>
+              <a:t>4. 연속입력·포커스·10분</a:t>
+            </a:r>
+          </a:p>
+        </p:txBody>
+      </p:sp>
+      <p:pic>
+        <p:nvPicPr>
+          <p:cNvPr id="21" name="Picture 20" descr="04_pause_after.png"/>
+          <p:cNvPicPr>
+            <a:picLocks noChangeAspect="1"/>
+          </p:cNvPicPr>
+          <p:nvPr/>
+        </p:nvPicPr>
+        <p:blipFill>
+          <a:blip r:embed="rId8"/>
+          <a:stretch>
+            <a:fillRect/>
+          </a:stretch>
+        </p:blipFill>
+        <p:spPr>
+          <a:xfrm>
+            <a:off x="1386075" y="4590288"/>
+            <a:ext cx="845061" cy="1828800"/>
+          </a:xfrm>
+          <a:prstGeom prst="rect">
+            <a:avLst/>
+          </a:prstGeom>
+        </p:spPr>
+      </p:pic>
+      <p:pic>
+        <p:nvPicPr>
+          <p:cNvPr id="22" name="Picture 21" descr="t600_10min.png"/>
+          <p:cNvPicPr>
+            <a:picLocks noChangeAspect="1"/>
+          </p:cNvPicPr>
+          <p:nvPr/>
+        </p:nvPicPr>
+        <p:blipFill>
+          <a:blip r:embed="rId9"/>
+          <a:stretch>
+            <a:fillRect/>
+          </a:stretch>
+        </p:blipFill>
+        <p:spPr>
+          <a:xfrm>
+            <a:off x="2340864" y="4590288"/>
+            <a:ext cx="845061" cy="1828800"/>
+          </a:xfrm>
+          <a:prstGeom prst="rect">
+            <a:avLst/>
+          </a:prstGeom>
+        </p:spPr>
+      </p:pic>
+      <p:sp>
+        <p:nvSpPr>
+          <p:cNvPr id="23" name="Rounded Rectangle 22"/>
+          <p:cNvSpPr/>
+          <p:nvPr/>
+        </p:nvSpPr>
+        <p:spPr>
+          <a:xfrm>
+            <a:off x="4251960" y="4133088"/>
+            <a:ext cx="3657600" cy="2395728"/>
+          </a:xfrm>
+          <a:prstGeom prst="roundRect">
+            <a:avLst/>
+          </a:prstGeom>
+          <a:solidFill>
+            <a:srgbClr val="161B22"/>
+          </a:solidFill>
+          <a:ln w="9525">
+            <a:solidFill>
+              <a:srgbClr val="232A34"/>
+            </a:solidFill>
+          </a:ln>
+          <a:effectLst/>
+        </p:spPr>
+        <p:style>
+          <a:lnRef idx="1">
+            <a:schemeClr val="accent1"/>
+          </a:lnRef>
+          <a:fillRef idx="3">
+            <a:schemeClr val="accent1"/>
+          </a:fillRef>
+          <a:effectRef idx="2">
+            <a:schemeClr val="accent1"/>
+          </a:effectRef>
+          <a:fontRef idx="minor">
+            <a:schemeClr val="lt1"/>
+          </a:fontRef>
+        </p:style>
+        <p:txBody>
+          <a:bodyPr rtlCol="0" anchor="ctr"/>
+          <a:lstStyle/>
+          <a:p>
+            <a:pPr algn="ctr"/>
+          </a:p>
+        </p:txBody>
+      </p:sp>
+      <p:sp>
+        <p:nvSpPr>
+          <p:cNvPr id="24" name="TextBox 23"/>
+          <p:cNvSpPr txBox="1"/>
+          <p:nvPr/>
+        </p:nvSpPr>
+        <p:spPr>
+          <a:xfrm>
+            <a:off x="4361688" y="4187952"/>
+            <a:ext cx="3438144" cy="365760"/>
+          </a:xfrm>
+          <a:prstGeom prst="rect">
+            <a:avLst/>
+          </a:prstGeom>
+          <a:noFill/>
+        </p:spPr>
+        <p:txBody>
+          <a:bodyPr wrap="square">
+            <a:spAutoFit/>
+          </a:bodyPr>
+          <a:lstStyle/>
+          <a:p>
+            <a:pPr algn="l"/>
+            <a:r>
+              <a:rPr sz="1250" b="1">
+                <a:solidFill>
+                  <a:srgbClr val="5EE6C5"/>
+                </a:solidFill>
+                <a:latin typeface="맑은 고딕"/>
+              </a:rPr>
+              <a:t>5. 콘솔 빨간 오류 0건</a:t>
+            </a:r>
+          </a:p>
+        </p:txBody>
+      </p:sp>
+      <p:pic>
+        <p:nvPicPr>
+          <p:cNvPr id="25" name="Picture 24" descr="콘솔오류확인.png"/>
+          <p:cNvPicPr>
+            <a:picLocks noChangeAspect="1"/>
+          </p:cNvPicPr>
+          <p:nvPr/>
+        </p:nvPicPr>
+        <p:blipFill>
+          <a:blip r:embed="rId10"/>
+          <a:stretch>
+            <a:fillRect/>
+          </a:stretch>
+        </p:blipFill>
+        <p:spPr>
+          <a:xfrm>
+            <a:off x="4549672" y="4590288"/>
+            <a:ext cx="3062176" cy="1645920"/>
+          </a:xfrm>
+          <a:prstGeom prst="rect">
+            <a:avLst/>
+          </a:prstGeom>
+        </p:spPr>
+      </p:pic>
+      <p:sp>
+        <p:nvSpPr>
+          <p:cNvPr id="26" name="TextBox 25"/>
+          <p:cNvSpPr txBox="1"/>
+          <p:nvPr/>
+        </p:nvSpPr>
+        <p:spPr>
+          <a:xfrm>
+            <a:off x="4361688" y="6263640"/>
+            <a:ext cx="3438144" cy="274320"/>
+          </a:xfrm>
+          <a:prstGeom prst="rect">
+            <a:avLst/>
+          </a:prstGeom>
+          <a:noFill/>
+        </p:spPr>
+        <p:txBody>
+          <a:bodyPr wrap="square">
+            <a:spAutoFit/>
+          </a:bodyPr>
+          <a:lstStyle/>
+          <a:p>
+            <a:pPr algn="ctr">
+              <a:spcAft>
+                <a:spcPts val="0"/>
+              </a:spcAft>
+            </a:pPr>
+            <a:r>
+              <a:rPr sz="1000" b="0">
+                <a:solidFill>
+                  <a:srgbClr val="8A94A6"/>
+                </a:solidFill>
+                <a:latin typeface="맑은 고딕"/>
+              </a:rPr>
+              <a:t>사용자 직접 확인 · 최고 16단계·3,242점</a:t>
+            </a:r>
+          </a:p>
+        </p:txBody>
+      </p:sp>
+      <p:sp>
+        <p:nvSpPr>
+          <p:cNvPr id="27" name="Rounded Rectangle 26"/>
+          <p:cNvSpPr/>
+          <p:nvPr/>
+        </p:nvSpPr>
+        <p:spPr>
+          <a:xfrm>
+            <a:off x="8046720" y="4133088"/>
+            <a:ext cx="3657600" cy="2395728"/>
+          </a:xfrm>
+          <a:prstGeom prst="roundRect">
+            <a:avLst/>
+          </a:prstGeom>
+          <a:solidFill>
+            <a:srgbClr val="161B22"/>
+          </a:solidFill>
+          <a:ln w="9525">
+            <a:solidFill>
+              <a:srgbClr val="232A34"/>
+            </a:solidFill>
+          </a:ln>
+          <a:effectLst/>
+        </p:spPr>
+        <p:style>
+          <a:lnRef idx="1">
+            <a:schemeClr val="accent1"/>
+          </a:lnRef>
+          <a:fillRef idx="3">
+            <a:schemeClr val="accent1"/>
+          </a:fillRef>
+          <a:effectRef idx="2">
+            <a:schemeClr val="accent1"/>
+          </a:effectRef>
+          <a:fontRef idx="minor">
+            <a:schemeClr val="lt1"/>
+          </a:fontRef>
+        </p:style>
+        <p:txBody>
+          <a:bodyPr rtlCol="0" anchor="ctr"/>
+          <a:lstStyle/>
+          <a:p>
+            <a:pPr algn="ctr"/>
+          </a:p>
+        </p:txBody>
+      </p:sp>
+      <p:sp>
+        <p:nvSpPr>
+          <p:cNvPr id="28" name="TextBox 27"/>
+          <p:cNvSpPr txBox="1"/>
+          <p:nvPr/>
+        </p:nvSpPr>
+        <p:spPr>
+          <a:xfrm>
+            <a:off x="8156448" y="4187952"/>
+            <a:ext cx="3438144" cy="365760"/>
+          </a:xfrm>
+          <a:prstGeom prst="rect">
+            <a:avLst/>
+          </a:prstGeom>
+          <a:noFill/>
+        </p:spPr>
+        <p:txBody>
+          <a:bodyPr wrap="square">
+            <a:spAutoFit/>
+          </a:bodyPr>
+          <a:lstStyle/>
+          <a:p>
+            <a:pPr algn="l"/>
+            <a:r>
+              <a:rPr sz="1250" b="1">
+                <a:solidFill>
+                  <a:srgbClr val="5EE6C5"/>
+                </a:solidFill>
+                <a:latin typeface="맑은 고딕"/>
+              </a:rPr>
+              <a:t>6. 난이도 전/후 10+10</a:t>
+            </a:r>
+          </a:p>
+        </p:txBody>
+      </p:sp>
+      <p:pic>
+        <p:nvPicPr>
+          <p:cNvPr id="29" name="Picture 28" descr="result_T4_4.png"/>
+          <p:cNvPicPr>
+            <a:picLocks noChangeAspect="1"/>
+          </p:cNvPicPr>
+          <p:nvPr/>
+        </p:nvPicPr>
+        <p:blipFill>
+          <a:blip r:embed="rId11"/>
+          <a:stretch>
+            <a:fillRect/>
+          </a:stretch>
+        </p:blipFill>
+        <p:spPr>
+          <a:xfrm>
+            <a:off x="8975595" y="4590288"/>
+            <a:ext cx="845061" cy="1828800"/>
+          </a:xfrm>
+          <a:prstGeom prst="rect">
+            <a:avLst/>
+          </a:prstGeom>
+        </p:spPr>
+      </p:pic>
+      <p:pic>
+        <p:nvPicPr>
+          <p:cNvPr id="30" name="Picture 29" descr="result_T5_4.png"/>
+          <p:cNvPicPr>
+            <a:picLocks noChangeAspect="1"/>
+          </p:cNvPicPr>
+          <p:nvPr/>
+        </p:nvPicPr>
+        <p:blipFill>
+          <a:blip r:embed="rId12"/>
+          <a:stretch>
+            <a:fillRect/>
+          </a:stretch>
+        </p:blipFill>
+        <p:spPr>
+          <a:xfrm>
+            <a:off x="9930384" y="4590288"/>
+            <a:ext cx="845061" cy="1828800"/>
+          </a:xfrm>
+          <a:prstGeom prst="rect">
+            <a:avLst/>
+          </a:prstGeom>
+        </p:spPr>
+      </p:pic>
+    </p:spTree>
+  </p:cSld>
+  <p:clrMapOvr>
+    <a:masterClrMapping/>
+  </p:clrMapOvr>
+</p:sld>
+</file>
+
+<file path=ppt/slides/slide24.xml><?xml version="1.0" encoding="utf-8"?>
+<p:sld xmlns:a="http://schemas.openxmlformats.org/drawingml/2006/main" xmlns:p="http://schemas.openxmlformats.org/presentationml/2006/main" xmlns:r="http://schemas.openxmlformats.org/officeDocument/2006/relationships">
+  <p:cSld>
+    <p:spTree>
+      <p:nvGrpSpPr>
+        <p:cNvPr id="1" name=""/>
+        <p:cNvGrpSpPr/>
+        <p:nvPr/>
+      </p:nvGrpSpPr>
+      <p:grpSpPr/>
+      <p:sp>
+        <p:nvSpPr>
+          <p:cNvPr id="2" name="Rectangle 1"/>
+          <p:cNvSpPr/>
+          <p:nvPr/>
+        </p:nvSpPr>
+        <p:spPr>
+          <a:xfrm>
+            <a:off x="0" y="0"/>
+            <a:ext cx="12191695" cy="6858000"/>
+          </a:xfrm>
+          <a:prstGeom prst="rect">
+            <a:avLst/>
+          </a:prstGeom>
+          <a:solidFill>
+            <a:srgbClr val="0E1116"/>
+          </a:solidFill>
+          <a:ln>
+            <a:noFill/>
+          </a:ln>
+          <a:effectLst/>
+        </p:spPr>
+        <p:style>
+          <a:lnRef idx="1">
+            <a:schemeClr val="accent1"/>
+          </a:lnRef>
+          <a:fillRef idx="3">
+            <a:schemeClr val="accent1"/>
+          </a:fillRef>
+          <a:effectRef idx="2">
+            <a:schemeClr val="accent1"/>
+          </a:effectRef>
+          <a:fontRef idx="minor">
+            <a:schemeClr val="lt1"/>
+          </a:fontRef>
+        </p:style>
+        <p:txBody>
+          <a:bodyPr rtlCol="0" anchor="ctr"/>
+          <a:lstStyle/>
+          <a:p>
+            <a:pPr algn="ctr"/>
+          </a:p>
+        </p:txBody>
+      </p:sp>
+      <p:sp>
+        <p:nvSpPr>
+          <p:cNvPr id="3" name="TextBox 2"/>
+          <p:cNvSpPr txBox="1"/>
+          <p:nvPr/>
+        </p:nvSpPr>
+        <p:spPr>
+          <a:xfrm>
+            <a:off x="11430000" y="6492240"/>
+            <a:ext cx="640080" cy="274320"/>
+          </a:xfrm>
+          <a:prstGeom prst="rect">
+            <a:avLst/>
+          </a:prstGeom>
+          <a:noFill/>
+        </p:spPr>
+        <p:txBody>
+          <a:bodyPr wrap="square">
+            <a:spAutoFit/>
+          </a:bodyPr>
+          <a:lstStyle/>
+          <a:p>
+            <a:pPr algn="r">
+              <a:spcAft>
+                <a:spcPts val="600"/>
+              </a:spcAft>
+            </a:pPr>
+            <a:r>
+              <a:rPr sz="1100" b="0">
+                <a:solidFill>
+                  <a:srgbClr val="8A94A6"/>
+                </a:solidFill>
+                <a:latin typeface="맑은 고딕"/>
+              </a:rPr>
+              <a:t>24</a:t>
+            </a:r>
+          </a:p>
+        </p:txBody>
+      </p:sp>
+      <p:sp>
+        <p:nvSpPr>
+          <p:cNvPr id="4" name="TextBox 3"/>
+          <p:cNvSpPr txBox="1"/>
+          <p:nvPr/>
+        </p:nvSpPr>
+        <p:spPr>
+          <a:xfrm>
+            <a:off x="640080" y="320040"/>
+            <a:ext cx="10881360" cy="365760"/>
+          </a:xfrm>
+          <a:prstGeom prst="rect">
+            <a:avLst/>
+          </a:prstGeom>
+          <a:noFill/>
+        </p:spPr>
+        <p:txBody>
+          <a:bodyPr wrap="square">
+            <a:spAutoFit/>
+          </a:bodyPr>
+          <a:lstStyle/>
+          <a:p>
+            <a:pPr algn="l">
+              <a:spcAft>
+                <a:spcPts val="600"/>
+              </a:spcAft>
+            </a:pPr>
+            <a:r>
+              <a:rPr sz="1400" b="1">
+                <a:solidFill>
+                  <a:srgbClr val="5EE6C5"/>
+                </a:solidFill>
+                <a:latin typeface="맑은 고딕"/>
+              </a:rPr>
+              <a:t>필수 체크리스트 · 증거 2/2</a:t>
+            </a:r>
+          </a:p>
+        </p:txBody>
+      </p:sp>
+      <p:sp>
+        <p:nvSpPr>
+          <p:cNvPr id="5" name="TextBox 4"/>
+          <p:cNvSpPr txBox="1"/>
+          <p:nvPr/>
+        </p:nvSpPr>
+        <p:spPr>
+          <a:xfrm>
+            <a:off x="640080" y="658368"/>
+            <a:ext cx="10881360" cy="822960"/>
+          </a:xfrm>
+          <a:prstGeom prst="rect">
+            <a:avLst/>
+          </a:prstGeom>
+          <a:noFill/>
+        </p:spPr>
+        <p:txBody>
+          <a:bodyPr wrap="square">
+            <a:spAutoFit/>
+          </a:bodyPr>
+          <a:lstStyle/>
+          <a:p>
+            <a:pPr algn="l">
+              <a:spcAft>
+                <a:spcPts val="600"/>
+              </a:spcAft>
+            </a:pPr>
+            <a:r>
+              <a:rPr sz="3200" b="1">
+                <a:solidFill>
+                  <a:srgbClr val="E8EDF4"/>
+                </a:solidFill>
+                <a:latin typeface="맑은 고딕"/>
+              </a:rPr>
+              <a:t>학생 자체 점검 — 스크린샷 증거 (7~11)</a:t>
+            </a:r>
+          </a:p>
+        </p:txBody>
+      </p:sp>
+      <p:sp>
+        <p:nvSpPr>
+          <p:cNvPr id="6" name="Rectangle 5"/>
+          <p:cNvSpPr/>
+          <p:nvPr/>
+        </p:nvSpPr>
+        <p:spPr>
+          <a:xfrm>
+            <a:off x="640080" y="1417320"/>
+            <a:ext cx="10881360" cy="25400"/>
+          </a:xfrm>
+          <a:prstGeom prst="rect">
+            <a:avLst/>
+          </a:prstGeom>
+          <a:solidFill>
+            <a:srgbClr val="232A34"/>
+          </a:solidFill>
+          <a:ln>
+            <a:noFill/>
+          </a:ln>
+          <a:effectLst/>
+        </p:spPr>
+        <p:style>
+          <a:lnRef idx="1">
+            <a:schemeClr val="accent1"/>
+          </a:lnRef>
+          <a:fillRef idx="3">
+            <a:schemeClr val="accent1"/>
+          </a:fillRef>
+          <a:effectRef idx="2">
+            <a:schemeClr val="accent1"/>
+          </a:effectRef>
+          <a:fontRef idx="minor">
+            <a:schemeClr val="lt1"/>
+          </a:fontRef>
+        </p:style>
+        <p:txBody>
+          <a:bodyPr rtlCol="0" anchor="ctr"/>
+          <a:lstStyle/>
+          <a:p>
+            <a:pPr algn="ctr"/>
+          </a:p>
+        </p:txBody>
+      </p:sp>
+      <p:sp>
+        <p:nvSpPr>
+          <p:cNvPr id="7" name="Rounded Rectangle 6"/>
+          <p:cNvSpPr/>
+          <p:nvPr/>
+        </p:nvSpPr>
+        <p:spPr>
+          <a:xfrm>
+            <a:off x="457200" y="1600200"/>
+            <a:ext cx="3657600" cy="2395728"/>
+          </a:xfrm>
+          <a:prstGeom prst="roundRect">
+            <a:avLst/>
+          </a:prstGeom>
+          <a:solidFill>
+            <a:srgbClr val="161B22"/>
+          </a:solidFill>
+          <a:ln w="9525">
+            <a:solidFill>
+              <a:srgbClr val="232A34"/>
+            </a:solidFill>
+          </a:ln>
+          <a:effectLst/>
+        </p:spPr>
+        <p:style>
+          <a:lnRef idx="1">
+            <a:schemeClr val="accent1"/>
+          </a:lnRef>
+          <a:fillRef idx="3">
+            <a:schemeClr val="accent1"/>
+          </a:fillRef>
+          <a:effectRef idx="2">
+            <a:schemeClr val="accent1"/>
+          </a:effectRef>
+          <a:fontRef idx="minor">
+            <a:schemeClr val="lt1"/>
+          </a:fontRef>
+        </p:style>
+        <p:txBody>
+          <a:bodyPr rtlCol="0" anchor="ctr"/>
+          <a:lstStyle/>
+          <a:p>
+            <a:pPr algn="ctr"/>
+          </a:p>
+        </p:txBody>
+      </p:sp>
+      <p:sp>
+        <p:nvSpPr>
+          <p:cNvPr id="8" name="TextBox 7"/>
+          <p:cNvSpPr txBox="1"/>
+          <p:nvPr/>
+        </p:nvSpPr>
+        <p:spPr>
+          <a:xfrm>
+            <a:off x="566928" y="1655064"/>
+            <a:ext cx="3438144" cy="365760"/>
+          </a:xfrm>
+          <a:prstGeom prst="rect">
+            <a:avLst/>
+          </a:prstGeom>
+          <a:noFill/>
+        </p:spPr>
+        <p:txBody>
+          <a:bodyPr wrap="square">
+            <a:spAutoFit/>
+          </a:bodyPr>
+          <a:lstStyle/>
+          <a:p>
+            <a:pPr algn="l"/>
+            <a:r>
+              <a:rPr sz="1250" b="1">
+                <a:solidFill>
+                  <a:srgbClr val="5EE6C5"/>
+                </a:solidFill>
+                <a:latin typeface="맑은 고딕"/>
+              </a:rPr>
+              <a:t>7. 손상값 → 기본값 실행</a:t>
+            </a:r>
+          </a:p>
+        </p:txBody>
+      </p:sp>
+      <p:pic>
+        <p:nvPicPr>
+          <p:cNvPr id="9" name="Picture 8" descr="storage_before_normal.png"/>
+          <p:cNvPicPr>
+            <a:picLocks noChangeAspect="1"/>
+          </p:cNvPicPr>
+          <p:nvPr/>
+        </p:nvPicPr>
+        <p:blipFill>
+          <a:blip r:embed="rId2"/>
+          <a:stretch>
+            <a:fillRect/>
+          </a:stretch>
+        </p:blipFill>
+        <p:spPr>
+          <a:xfrm>
+            <a:off x="1386075" y="2057400"/>
+            <a:ext cx="845061" cy="1828800"/>
+          </a:xfrm>
+          <a:prstGeom prst="rect">
+            <a:avLst/>
+          </a:prstGeom>
+        </p:spPr>
+      </p:pic>
+      <p:pic>
+        <p:nvPicPr>
+          <p:cNvPr id="10" name="Picture 9" descr="storage_after_corrupted_still_works.png"/>
+          <p:cNvPicPr>
+            <a:picLocks noChangeAspect="1"/>
+          </p:cNvPicPr>
+          <p:nvPr/>
+        </p:nvPicPr>
+        <p:blipFill>
+          <a:blip r:embed="rId3"/>
+          <a:stretch>
+            <a:fillRect/>
+          </a:stretch>
+        </p:blipFill>
+        <p:spPr>
+          <a:xfrm>
+            <a:off x="2340864" y="2057400"/>
+            <a:ext cx="845061" cy="1828800"/>
+          </a:xfrm>
+          <a:prstGeom prst="rect">
+            <a:avLst/>
+          </a:prstGeom>
+        </p:spPr>
+      </p:pic>
+      <p:sp>
+        <p:nvSpPr>
+          <p:cNvPr id="11" name="Rounded Rectangle 10"/>
+          <p:cNvSpPr/>
+          <p:nvPr/>
+        </p:nvSpPr>
+        <p:spPr>
+          <a:xfrm>
+            <a:off x="4251960" y="1600200"/>
+            <a:ext cx="3657600" cy="2395728"/>
+          </a:xfrm>
+          <a:prstGeom prst="roundRect">
+            <a:avLst/>
+          </a:prstGeom>
+          <a:solidFill>
+            <a:srgbClr val="161B22"/>
+          </a:solidFill>
+          <a:ln w="9525">
+            <a:solidFill>
+              <a:srgbClr val="232A34"/>
+            </a:solidFill>
+          </a:ln>
+          <a:effectLst/>
+        </p:spPr>
+        <p:style>
+          <a:lnRef idx="1">
+            <a:schemeClr val="accent1"/>
+          </a:lnRef>
+          <a:fillRef idx="3">
+            <a:schemeClr val="accent1"/>
+          </a:fillRef>
+          <a:effectRef idx="2">
+            <a:schemeClr val="accent1"/>
+          </a:effectRef>
+          <a:fontRef idx="minor">
+            <a:schemeClr val="lt1"/>
+          </a:fontRef>
+        </p:style>
+        <p:txBody>
+          <a:bodyPr rtlCol="0" anchor="ctr"/>
+          <a:lstStyle/>
+          <a:p>
+            <a:pPr algn="ctr"/>
+          </a:p>
+        </p:txBody>
+      </p:sp>
+      <p:sp>
+        <p:nvSpPr>
+          <p:cNvPr id="12" name="TextBox 11"/>
+          <p:cNvSpPr txBox="1"/>
+          <p:nvPr/>
+        </p:nvSpPr>
+        <p:spPr>
+          <a:xfrm>
+            <a:off x="4361688" y="1655064"/>
+            <a:ext cx="3438144" cy="365760"/>
+          </a:xfrm>
+          <a:prstGeom prst="rect">
+            <a:avLst/>
+          </a:prstGeom>
+          <a:noFill/>
+        </p:spPr>
+        <p:txBody>
+          <a:bodyPr wrap="square">
+            <a:spAutoFit/>
+          </a:bodyPr>
+          <a:lstStyle/>
+          <a:p>
+            <a:pPr algn="l"/>
+            <a:r>
+              <a:rPr sz="1250" b="1">
+                <a:solidFill>
+                  <a:srgbClr val="5EE6C5"/>
+                </a:solidFill>
+                <a:latin typeface="맑은 고딕"/>
+              </a:rPr>
+              <a:t>8. 재시작=초기화, 기록 유지</a:t>
+            </a:r>
+          </a:p>
+        </p:txBody>
+      </p:sp>
+      <p:pic>
+        <p:nvPicPr>
+          <p:cNvPr id="13" name="Picture 12" descr="13_restart_before.png"/>
+          <p:cNvPicPr>
+            <a:picLocks noChangeAspect="1"/>
+          </p:cNvPicPr>
+          <p:nvPr/>
+        </p:nvPicPr>
+        <p:blipFill>
+          <a:blip r:embed="rId4"/>
+          <a:stretch>
+            <a:fillRect/>
+          </a:stretch>
+        </p:blipFill>
+        <p:spPr>
+          <a:xfrm>
+            <a:off x="5180835" y="2057400"/>
+            <a:ext cx="845061" cy="1828800"/>
+          </a:xfrm>
+          <a:prstGeom prst="rect">
+            <a:avLst/>
+          </a:prstGeom>
+        </p:spPr>
+      </p:pic>
+      <p:pic>
+        <p:nvPicPr>
+          <p:cNvPr id="14" name="Picture 13" descr="13_restart_after.png"/>
+          <p:cNvPicPr>
+            <a:picLocks noChangeAspect="1"/>
+          </p:cNvPicPr>
+          <p:nvPr/>
+        </p:nvPicPr>
+        <p:blipFill>
+          <a:blip r:embed="rId5"/>
+          <a:stretch>
+            <a:fillRect/>
+          </a:stretch>
+        </p:blipFill>
+        <p:spPr>
+          <a:xfrm>
+            <a:off x="6135624" y="2057400"/>
+            <a:ext cx="845061" cy="1828800"/>
+          </a:xfrm>
+          <a:prstGeom prst="rect">
+            <a:avLst/>
+          </a:prstGeom>
+        </p:spPr>
+      </p:pic>
+      <p:sp>
+        <p:nvSpPr>
+          <p:cNvPr id="15" name="Rounded Rectangle 14"/>
+          <p:cNvSpPr/>
+          <p:nvPr/>
+        </p:nvSpPr>
+        <p:spPr>
+          <a:xfrm>
+            <a:off x="8046720" y="1600200"/>
+            <a:ext cx="3657600" cy="2395728"/>
+          </a:xfrm>
+          <a:prstGeom prst="roundRect">
+            <a:avLst/>
+          </a:prstGeom>
+          <a:solidFill>
+            <a:srgbClr val="161B22"/>
+          </a:solidFill>
+          <a:ln w="9525">
+            <a:solidFill>
+              <a:srgbClr val="232A34"/>
+            </a:solidFill>
+          </a:ln>
+          <a:effectLst/>
+        </p:spPr>
+        <p:style>
+          <a:lnRef idx="1">
+            <a:schemeClr val="accent1"/>
+          </a:lnRef>
+          <a:fillRef idx="3">
+            <a:schemeClr val="accent1"/>
+          </a:fillRef>
+          <a:effectRef idx="2">
+            <a:schemeClr val="accent1"/>
+          </a:effectRef>
+          <a:fontRef idx="minor">
+            <a:schemeClr val="lt1"/>
+          </a:fontRef>
+        </p:style>
+        <p:txBody>
+          <a:bodyPr rtlCol="0" anchor="ctr"/>
+          <a:lstStyle/>
+          <a:p>
+            <a:pPr algn="ctr"/>
+          </a:p>
+        </p:txBody>
+      </p:sp>
+      <p:sp>
+        <p:nvSpPr>
+          <p:cNvPr id="16" name="TextBox 15"/>
+          <p:cNvSpPr txBox="1"/>
+          <p:nvPr/>
+        </p:nvSpPr>
+        <p:spPr>
+          <a:xfrm>
+            <a:off x="8156448" y="1655064"/>
+            <a:ext cx="3438144" cy="365760"/>
+          </a:xfrm>
+          <a:prstGeom prst="rect">
+            <a:avLst/>
+          </a:prstGeom>
+          <a:noFill/>
+        </p:spPr>
+        <p:txBody>
+          <a:bodyPr wrap="square">
+            <a:spAutoFit/>
+          </a:bodyPr>
+          <a:lstStyle/>
+          <a:p>
+            <a:pPr algn="l"/>
+            <a:r>
+              <a:rPr sz="1250" b="1">
+                <a:solidFill>
+                  <a:srgbClr val="5EE6C5"/>
+                </a:solidFill>
+                <a:latin typeface="맑은 고딕"/>
+              </a:rPr>
+              <a:t>9. 효과 줄이기·끄기 작동</a:t>
+            </a:r>
+          </a:p>
+        </p:txBody>
+      </p:sp>
+      <p:pic>
+        <p:nvPicPr>
+          <p:cNvPr id="17" name="Picture 16" descr="06_sound_after.png"/>
+          <p:cNvPicPr>
+            <a:picLocks noChangeAspect="1"/>
+          </p:cNvPicPr>
+          <p:nvPr/>
+        </p:nvPicPr>
+        <p:blipFill>
+          <a:blip r:embed="rId6"/>
+          <a:stretch>
+            <a:fillRect/>
+          </a:stretch>
+        </p:blipFill>
+        <p:spPr>
+          <a:xfrm>
+            <a:off x="8975595" y="2057400"/>
+            <a:ext cx="845061" cy="1828800"/>
+          </a:xfrm>
+          <a:prstGeom prst="rect">
+            <a:avLst/>
+          </a:prstGeom>
+        </p:spPr>
+      </p:pic>
+      <p:pic>
+        <p:nvPicPr>
+          <p:cNvPr id="18" name="Picture 17" descr="07_motion_after.png"/>
+          <p:cNvPicPr>
+            <a:picLocks noChangeAspect="1"/>
+          </p:cNvPicPr>
+          <p:nvPr/>
+        </p:nvPicPr>
+        <p:blipFill>
+          <a:blip r:embed="rId7"/>
+          <a:stretch>
+            <a:fillRect/>
+          </a:stretch>
+        </p:blipFill>
+        <p:spPr>
+          <a:xfrm>
+            <a:off x="9930384" y="2057400"/>
+            <a:ext cx="845061" cy="1828800"/>
+          </a:xfrm>
+          <a:prstGeom prst="rect">
+            <a:avLst/>
+          </a:prstGeom>
+        </p:spPr>
+      </p:pic>
+      <p:sp>
+        <p:nvSpPr>
+          <p:cNvPr id="19" name="Rounded Rectangle 18"/>
+          <p:cNvSpPr/>
+          <p:nvPr/>
+        </p:nvSpPr>
+        <p:spPr>
+          <a:xfrm>
+            <a:off x="457200" y="4133088"/>
+            <a:ext cx="3657600" cy="2395728"/>
+          </a:xfrm>
+          <a:prstGeom prst="roundRect">
+            <a:avLst/>
+          </a:prstGeom>
+          <a:solidFill>
+            <a:srgbClr val="161B22"/>
+          </a:solidFill>
+          <a:ln w="9525">
+            <a:solidFill>
+              <a:srgbClr val="232A34"/>
+            </a:solidFill>
+          </a:ln>
+          <a:effectLst/>
+        </p:spPr>
+        <p:style>
+          <a:lnRef idx="1">
+            <a:schemeClr val="accent1"/>
+          </a:lnRef>
+          <a:fillRef idx="3">
+            <a:schemeClr val="accent1"/>
+          </a:fillRef>
+          <a:effectRef idx="2">
+            <a:schemeClr val="accent1"/>
+          </a:effectRef>
+          <a:fontRef idx="minor">
+            <a:schemeClr val="lt1"/>
+          </a:fontRef>
+        </p:style>
+        <p:txBody>
+          <a:bodyPr rtlCol="0" anchor="ctr"/>
+          <a:lstStyle/>
+          <a:p>
+            <a:pPr algn="ctr"/>
+          </a:p>
+        </p:txBody>
+      </p:sp>
+      <p:sp>
+        <p:nvSpPr>
+          <p:cNvPr id="20" name="TextBox 19"/>
+          <p:cNvSpPr txBox="1"/>
+          <p:nvPr/>
+        </p:nvSpPr>
+        <p:spPr>
+          <a:xfrm>
+            <a:off x="566928" y="4187952"/>
+            <a:ext cx="3438144" cy="365760"/>
+          </a:xfrm>
+          <a:prstGeom prst="rect">
+            <a:avLst/>
+          </a:prstGeom>
+          <a:noFill/>
+        </p:spPr>
+        <p:txBody>
+          <a:bodyPr wrap="square">
+            <a:spAutoFit/>
+          </a:bodyPr>
+          <a:lstStyle/>
+          <a:p>
+            <a:pPr algn="l"/>
+            <a:r>
+              <a:rPr sz="1250" b="1">
+                <a:solidFill>
+                  <a:srgbClr val="5EE6C5"/>
+                </a:solidFill>
+                <a:latin typeface="맑은 고딕"/>
+              </a:rPr>
+              <a:t>10. 개인정보·비밀값 0건</a:t>
+            </a:r>
+          </a:p>
+        </p:txBody>
+      </p:sp>
+      <p:sp>
+        <p:nvSpPr>
+          <p:cNvPr id="21" name="TextBox 20"/>
+          <p:cNvSpPr txBox="1"/>
+          <p:nvPr/>
+        </p:nvSpPr>
+        <p:spPr>
+          <a:xfrm>
+            <a:off x="566928" y="4636008"/>
+            <a:ext cx="3438144" cy="274320"/>
+          </a:xfrm>
+          <a:prstGeom prst="rect">
+            <a:avLst/>
+          </a:prstGeom>
+          <a:noFill/>
+        </p:spPr>
+        <p:txBody>
+          <a:bodyPr wrap="square">
+            <a:spAutoFit/>
+          </a:bodyPr>
+          <a:lstStyle/>
+          <a:p>
+            <a:pPr algn="ctr">
+              <a:spcAft>
+                <a:spcPts val="0"/>
+              </a:spcAft>
+            </a:pPr>
+            <a:r>
+              <a:rPr sz="1000" b="0">
+                <a:solidFill>
+                  <a:srgbClr val="8A94A6"/>
+                </a:solidFill>
+                <a:latin typeface="맑은 고딕"/>
+              </a:rPr>
+              <a:t>저장소 전수 grep 검사 — stulss(공개 계정명) 외 유출 0건</a:t>
+            </a:r>
+          </a:p>
+        </p:txBody>
+      </p:sp>
+      <p:sp>
+        <p:nvSpPr>
+          <p:cNvPr id="22" name="Rounded Rectangle 21"/>
+          <p:cNvSpPr/>
+          <p:nvPr/>
+        </p:nvSpPr>
+        <p:spPr>
+          <a:xfrm>
+            <a:off x="4251960" y="4133088"/>
+            <a:ext cx="3657600" cy="2395728"/>
+          </a:xfrm>
+          <a:prstGeom prst="roundRect">
+            <a:avLst/>
+          </a:prstGeom>
+          <a:solidFill>
+            <a:srgbClr val="161B22"/>
+          </a:solidFill>
+          <a:ln w="9525">
+            <a:solidFill>
+              <a:srgbClr val="232A34"/>
+            </a:solidFill>
+          </a:ln>
+          <a:effectLst/>
+        </p:spPr>
+        <p:style>
+          <a:lnRef idx="1">
+            <a:schemeClr val="accent1"/>
+          </a:lnRef>
+          <a:fillRef idx="3">
+            <a:schemeClr val="accent1"/>
+          </a:fillRef>
+          <a:effectRef idx="2">
+            <a:schemeClr val="accent1"/>
+          </a:effectRef>
+          <a:fontRef idx="minor">
+            <a:schemeClr val="lt1"/>
+          </a:fontRef>
+        </p:style>
+        <p:txBody>
+          <a:bodyPr rtlCol="0" anchor="ctr"/>
+          <a:lstStyle/>
+          <a:p>
+            <a:pPr algn="ctr"/>
+          </a:p>
+        </p:txBody>
+      </p:sp>
+      <p:sp>
+        <p:nvSpPr>
+          <p:cNvPr id="23" name="TextBox 22"/>
+          <p:cNvSpPr txBox="1"/>
+          <p:nvPr/>
+        </p:nvSpPr>
+        <p:spPr>
+          <a:xfrm>
+            <a:off x="4361688" y="4187952"/>
+            <a:ext cx="3438144" cy="365760"/>
+          </a:xfrm>
+          <a:prstGeom prst="rect">
+            <a:avLst/>
+          </a:prstGeom>
+          <a:noFill/>
+        </p:spPr>
+        <p:txBody>
+          <a:bodyPr wrap="square">
+            <a:spAutoFit/>
+          </a:bodyPr>
+          <a:lstStyle/>
+          <a:p>
+            <a:pPr algn="l"/>
+            <a:r>
+              <a:rPr sz="1250" b="1">
+                <a:solidFill>
+                  <a:srgbClr val="5EE6C5"/>
+                </a:solidFill>
+                <a:latin typeface="맑은 고딕"/>
+              </a:rPr>
+              <a:t>11. 위 1~10 모두 완료</a:t>
+            </a:r>
+          </a:p>
+        </p:txBody>
+      </p:sp>
+      <p:sp>
+        <p:nvSpPr>
+          <p:cNvPr id="24" name="TextBox 23"/>
+          <p:cNvSpPr txBox="1"/>
+          <p:nvPr/>
+        </p:nvSpPr>
+        <p:spPr>
+          <a:xfrm>
+            <a:off x="4361688" y="4636008"/>
+            <a:ext cx="3438144" cy="274320"/>
+          </a:xfrm>
+          <a:prstGeom prst="rect">
+            <a:avLst/>
+          </a:prstGeom>
+          <a:noFill/>
+        </p:spPr>
+        <p:txBody>
+          <a:bodyPr wrap="square">
+            <a:spAutoFit/>
+          </a:bodyPr>
+          <a:lstStyle/>
+          <a:p>
+            <a:pPr algn="ctr">
+              <a:spcAft>
+                <a:spcPts val="0"/>
+              </a:spcAft>
+            </a:pPr>
+            <a:r>
+              <a:rPr sz="1000" b="0">
+                <a:solidFill>
+                  <a:srgbClr val="8A94A6"/>
+                </a:solidFill>
+                <a:latin typeface="맑은 고딕"/>
+              </a:rPr>
+              <a:t>카드 1~5 통과기준 5/5 · 학생 자체 점검 11/11</a:t>
+            </a:r>
+          </a:p>
+        </p:txBody>
+      </p:sp>
+    </p:spTree>
+  </p:cSld>
+  <p:clrMapOvr>
+    <a:masterClrMapping/>
+  </p:clrMapOvr>
+</p:sld>
+</file>
+
+<file path=ppt/slides/slide25.xml><?xml version="1.0" encoding="utf-8"?>
+<p:sld xmlns:a="http://schemas.openxmlformats.org/drawingml/2006/main" xmlns:p="http://schemas.openxmlformats.org/presentationml/2006/main" xmlns:r="http://schemas.openxmlformats.org/officeDocument/2006/relationships">
+  <p:cSld>
+    <p:spTree>
+      <p:nvGrpSpPr>
+        <p:cNvPr id="1" name=""/>
+        <p:cNvGrpSpPr/>
+        <p:nvPr/>
+      </p:nvGrpSpPr>
+      <p:grpSpPr/>
+      <p:sp>
+        <p:nvSpPr>
+          <p:cNvPr id="2" name="Rectangle 1"/>
+          <p:cNvSpPr/>
+          <p:nvPr/>
+        </p:nvSpPr>
+        <p:spPr>
+          <a:xfrm>
+            <a:off x="0" y="0"/>
+            <a:ext cx="12191695" cy="6858000"/>
+          </a:xfrm>
+          <a:prstGeom prst="rect">
+            <a:avLst/>
+          </a:prstGeom>
+          <a:solidFill>
+            <a:srgbClr val="0E1116"/>
+          </a:solidFill>
+          <a:ln>
+            <a:noFill/>
+          </a:ln>
+          <a:effectLst/>
+        </p:spPr>
+        <p:style>
+          <a:lnRef idx="1">
+            <a:schemeClr val="accent1"/>
+          </a:lnRef>
+          <a:fillRef idx="3">
+            <a:schemeClr val="accent1"/>
+          </a:fillRef>
+          <a:effectRef idx="2">
+            <a:schemeClr val="accent1"/>
+          </a:effectRef>
+          <a:fontRef idx="minor">
+            <a:schemeClr val="lt1"/>
+          </a:fontRef>
+        </p:style>
+        <p:txBody>
+          <a:bodyPr rtlCol="0" anchor="ctr"/>
+          <a:lstStyle/>
+          <a:p>
+            <a:pPr algn="ctr"/>
+          </a:p>
+        </p:txBody>
+      </p:sp>
+      <p:sp>
+        <p:nvSpPr>
+          <p:cNvPr id="3" name="TextBox 2"/>
+          <p:cNvSpPr txBox="1"/>
+          <p:nvPr/>
+        </p:nvSpPr>
+        <p:spPr>
+          <a:xfrm>
+            <a:off x="11430000" y="6492240"/>
+            <a:ext cx="640080" cy="274320"/>
+          </a:xfrm>
+          <a:prstGeom prst="rect">
+            <a:avLst/>
+          </a:prstGeom>
+          <a:noFill/>
+        </p:spPr>
+        <p:txBody>
+          <a:bodyPr wrap="square">
+            <a:spAutoFit/>
+          </a:bodyPr>
+          <a:lstStyle/>
+          <a:p>
+            <a:pPr algn="r">
+              <a:spcAft>
+                <a:spcPts val="600"/>
+              </a:spcAft>
+            </a:pPr>
+            <a:r>
+              <a:rPr sz="1100" b="0">
+                <a:solidFill>
+                  <a:srgbClr val="8A94A6"/>
+                </a:solidFill>
+                <a:latin typeface="맑은 고딕"/>
+              </a:rPr>
+              <a:t>25</a:t>
             </a:r>
           </a:p>
         </p:txBody>

--- a/발표자료.pptx
+++ b/발표자료.pptx
@@ -3522,7 +3522,7 @@
                 </a:solidFill>
                 <a:latin typeface="맑은 고딕"/>
               </a:rPr>
-              <a:t>https://stulss.github.io/odd-one-out/</a:t>
+              <a:t>https://odd-one-out-nine.vercel.app/</a:t>
             </a:r>
           </a:p>
           <a:p>
@@ -9284,7 +9284,7 @@
                 </a:solidFill>
                 <a:latin typeface="맑은 고딕"/>
               </a:rPr>
-              <a:t>https://stulss.github.io/odd-one-out/</a:t>
+              <a:t>https://odd-one-out-nine.vercel.app/</a:t>
             </a:r>
           </a:p>
         </p:txBody>
@@ -13777,7 +13777,7 @@
                 </a:solidFill>
                 <a:latin typeface="맑은 고딕"/>
               </a:rPr>
-              <a:t>▶ 플레이: https://stulss.github.io/odd-one-out/</a:t>
+              <a:t>▶ 플레이: https://odd-one-out-nine.vercel.app/</a:t>
             </a:r>
           </a:p>
         </p:txBody>
